--- a/docs/presentation/Iceberg Alley SAR — Project Brief v2.pptx
+++ b/docs/presentation/Iceberg Alley SAR — Project Brief v2.pptx
@@ -7,15 +7,15 @@
   <p:sldIdLst>
     <p:sldId id="256" r:id="rId2"/>
     <p:sldId id="257" r:id="rId3"/>
+    <p:sldId id="262" r:id="rId8"/>
     <p:sldId id="258" r:id="rId4"/>
     <p:sldId id="259" r:id="rId5"/>
-    <p:sldId id="260" r:id="rId6"/>
-    <p:sldId id="261" r:id="rId7"/>
-    <p:sldId id="262" r:id="rId8"/>
-    <p:sldId id="263" r:id="rId9"/>
-    <p:sldId id="264" r:id="rId10"/>
     <p:sldId id="268" r:id="rId19"/>
     <p:sldId id="269" r:id="rId20"/>
+    <p:sldId id="263" r:id="rId9"/>
+    <p:sldId id="260" r:id="rId6"/>
+    <p:sldId id="264" r:id="rId10"/>
+    <p:sldId id="261" r:id="rId7"/>
     <p:sldId id="265" r:id="rId11"/>
     <p:sldId id="266" r:id="rId12"/>
     <p:sldId id="267" r:id="rId13"/>
@@ -514,10 +514,8 @@
           <a:lstStyle/>
           <a:p>
             <a:r>
-              <a:rPr lang="en-US" dirty="0"/>
-              <a:t>A portfolio project: hands-on SAR and maritime-domain work, from raw Sentinel-1 scenes to a validated detector and a CesiumJS viewer. Fifteen years of photogrammetry and geospatial AI, applied to a new sensor.</a:t>
-            </a:r>
-            <a:endParaRPr lang="en-US" dirty="0"/>
+              <a:t>A portfolio project: hands-on SAR and maritime-domain work, from raw Sentinel-1 scenes to a foundation-model detector, a fair benchmark against the classical CA-CFAR, and a live CesiumJS viewer. Fifteen years of photogrammetry and geospatial AI, applied to a new sensor.</a:t>
+            </a:r>
           </a:p>
         </p:txBody>
       </p:sp>
@@ -602,7 +600,7 @@
           <a:lstStyle/>
           <a:p>
             <a:r>
-              <a:t>39% (207 of 531) is a lower bound on precision, not an estimate. The unlabelled detections are strong targets, similar in size to matched ones. On its own, THOR fires on pack ice: 34–82% of its peaks on icy frames fall inside the CFAR's ice mask. An experimental iceberg-vs-ship CNN trained on the Kaggle Statoil/C-CORE chips exists, but it is mostly unsure on our data and is used only as a review hint.</a:t>
+              <a:t>At the matched count the CFAR has 546 and THOR 495 detections without a label on the test passes. On its own, THOR fires on pack ice: 34-82% of its peaks on icy passes fall inside the classical ice mask. A shape-based strip test would make the CFAR baseline stronger on large bergs; it must be tuned off the test passes.</a:t>
             </a:r>
           </a:p>
         </p:txBody>
@@ -688,7 +686,7 @@
           <a:lstStyle/>
           <a:p>
             <a:r>
-              <a:t>The run searches ASF, keeps the best-covering HH+HV scenes, orders HyP3 RTC processing (60 credits per 10 m scene), then masks, detects and exports CZML. Masking plus detection takes about 17 minutes per 10 m scene on a laptop. THOR inference needs a GPU: 8–15 minutes per scene on a laptop RTX 3070.</a:t>
+              <a:t>Re-runs reuse downloaded scenes and outputs, and a dry run shows the HyP3 credit cost first (60 credits per 10 m scene). Masking plus CFAR takes about 17 minutes per scene on a laptop CPU; THOR inference 8-15 minutes on a laptop RTX 3070. Next milestone: THOR inside the one-command run.</a:t>
             </a:r>
           </a:p>
         </p:txBody>
@@ -862,7 +860,7 @@
           <a:lstStyle/>
           <a:p>
             <a:r>
-              <a:t>Reference: Forgaard et al., 'Efficient iceberg detection in Sentinel-1 imagery using the THOR foundation model', IGARSS 2026. HyP3 gives gamma0, so it is converted to sigma0 with the incidence angle and normalized with THOR's dB statistics. At 8x8 patches a token covers 80 m. A CenterNet-style head was tried too; it matched but never beat the linear head on the 2019/2020 year folds, so the linear head is the main model.</a:t>
+              <a:t>Reference: Forgaard et al., 'Efficient iceberg detection in Sentinel-1 imagery using the THOR foundation model', IGARSS 2026. HyP3 gives gamma0, so it is converted to sigma0 with the incidence angle and normalized with THOR's dB statistics. At 8x8 patches a token covers 80 m. The head reads four encoder blocks: 4 x 192 features + 1 bias = 769 parameters. A CenterNet-style head matched but never beat it.</a:t>
             </a:r>
           </a:p>
         </p:txBody>
@@ -932,7 +930,7 @@
           <a:lstStyle/>
           <a:p>
             <a:r>
-              <a:t>Four held-out April 2019 frames with same-pass IIP labels (512 bergs), identical masks and 500 m matching. Precision can't be measured without AIS, so the comparison is recall at a matched number of detections: the CFAR is swept over PFA, THOR over its score, and both are read at the CFAR's count at PFA 1e-6. Nothing was tuned on these frames. THOR leads on every frame (by 0 to 15 points) and matches the CFAR's recall with about 28% fewer detections. Caveat: one month of one year, and THOR learned from IIP analyst labels.</a:t>
+              <a:t>IIP positions are truncated to 0.1 arc-minute, so each label is moved to its cell centre and snapped to the HH peak, then drawn as a Gaussian target. Heads were chosen on year folds (2019 vs 2020), never on April 2019. On its own THOR also lights up pack ice, which is why it runs on the classical pack-ice mask.</a:t>
             </a:r>
           </a:p>
         </p:txBody>
@@ -1090,10 +1088,8 @@
           <a:lstStyle/>
           <a:p>
             <a:r>
-              <a:rPr lang="en-US" dirty="0"/>
-              <a:t>Steps 4 and 5 (orange) are the detector itself. Each detection keeps its incidence angle, contrast, size and distance to pack ice as attributes.</a:t>
-            </a:r>
-            <a:endParaRPr lang="en-US" dirty="0"/>
+              <a:t>Steps 1-3 are classical SAR processing and feed both detectors; THOR depends on them, especially on the HV pack-ice mask. Every parameter lives in config.yaml, with lengths in metres so tuning carries over between 10 m and 20 m pixels.</a:t>
+            </a:r>
           </a:p>
         </p:txBody>
       </p:sp>
@@ -1178,10 +1174,8 @@
           <a:lstStyle/>
           <a:p>
             <a:r>
-              <a:rPr lang="en-US" dirty="0"/>
-              <a:t>A subtlety worth mentioning: HyP3 removes the HV thermal noise floor, so open-water HV sits at -30 to -40 dB with ENL below 1. A textbook ENL would set the threshold far too low, so ENL is estimated from each scene. Detection runs on linear power; dB is for display and reported values.</a:t>
-            </a:r>
-            <a:endParaRPr lang="en-US" dirty="0"/>
+              <a:t>HyP3 removes the HV thermal noise floor, so open-water HV sits at -30 to -40 dB with ENL below 1; the pack-ice mask and the CFAR baseline estimate ENL per scene. THOR takes sigma0 in dB, the CFAR linear power. CFAR (constant false alarm rate) is explained on the baseline slide.</a:t>
+            </a:r>
           </a:p>
         </p:txBody>
       </p:sp>
@@ -1266,10 +1260,8 @@
           <a:lstStyle/>
           <a:p>
             <a:r>
-              <a:rPr lang="en-US" dirty="0"/>
-              <a:t>The HH check matters at 10 m: IW GRD is oversampled (true resolution about 20 m), so HV speckle grains span about 2x2 pixels and pass the size filter. Real targets are bright in both polarizations. Thin strips of loose sea ice were the main false-alarm source until the structure-length filter. The vertical brightness steps in the image are the three IW sub-swaths.</a:t>
-            </a:r>
-            <a:endParaRPr lang="en-US" dirty="0"/>
+              <a:t>CFAR = constant false alarm rate: each pixel is compared with the mean of a ring of sea around it, so the false-alarm rate stays the same in calm and rough water. The threshold assumes gamma-distributed speckle with ENL estimated from the scene. The large bergs are 30+ dB above the sea, so the threshold fires, but their grown blobs measure 340-470 m and exceed the 300 m ice-strip rule. On its own, the CFAR found 78% of the labels on 2019-04-29 counting near-ice detections; under the comparison's rules it is 74%.</a:t>
+            </a:r>
           </a:p>
         </p:txBody>
       </p:sp>
@@ -1354,7 +1346,7 @@
           <a:lstStyle/>
           <a:p>
             <a:r>
-              <a:t>Vue 3, Vite and CesiumJS. At startup the viewer reads a manifest and loads one CZML file per scene and detector, so no scene names are hardcoded. `cli.py publish` writes the data, and a push to main deploys it with GitHub Actions. Esri imagery basemap, so no Cesium ion token is needed. Nothing is deleted: near-ice candidates are greyed out and can be hidden with a checkbox. Live: natali-kovalski.github.io/iceberg-alley-sar</a:t>
+              <a:t>Vue 3, Vite and CesiumJS. The viewer reads a manifest and loads one CZML file per scene and detector, so no scene names are hardcoded. `cli.py publish` writes the data, and a push to main deploys it with GitHub Actions. The '?' button explains the points and the method. Live: natali-kovalski.github.io/iceberg-alley-sar</a:t>
             </a:r>
           </a:p>
         </p:txBody>
@@ -1440,7 +1432,7 @@
           <a:lstStyle/>
           <a:p>
             <a:r>
-              <a:t>Validation uses spring 2019 because the IIP sightings database (NSIDC G00807) ends with the 2021 season. Same pipeline, same parameters as the 2025 scenes. Matching is one-to-one within 500 m. IIP positions are truncated to 0.1 arc-minute; moving them to the cell centre cut the median offset from 137 m to 67 m without changing recall. Caveat: the analysts looked at the same radar image, so this measures agreement with expert interpretation, not independent truth.</a:t>
+              <a:t>The test passes were never used for training or tuning; all of April 2019 was held out because the same bergs show up on nearby passes. Precision can't be measured without AIS ship positions, so both detectors are compared on recall at the same number of detections (the CFAR's count at PFA 1e-6). Caveats: one month of one year, and THOR learned from IIP analyst labels, so part of the gap may be agreement with their labelling style.</a:t>
             </a:r>
           </a:p>
         </p:txBody>
@@ -1526,7 +1518,7 @@
           <a:lstStyle/>
           <a:p>
             <a:r>
-              <a:t>The four large bergs are 30+ dB above the sea in HV, so the CFAR threshold fires on them. But each grown blob measures 340–470 m, above the 300 m ice-strip rule (max_structure_m), so the filter throws them away. THOR has no such rule and finds most of them (next slides). Small bergs that are a single 10 m pixel in HV are removed by the 2-pixel minimum.</a:t>
+              <a:t>Four held-out April 2019 passes with same-pass IIP labels (512 bergs), identical masks and 500 m matching. The CFAR is swept over PFA, THOR over its score, and both are read at the CFAR's count at PFA 1e-6. THOR leads on every pass (by 0 to 15 points) and matches the CFAR's recall with about 28% fewer detections. The CFAR saturates near 0.83; THOR reaches 0.92. Small bergs are a tie: an 80 m token is coarse for a 20 m target.</a:t>
             </a:r>
           </a:p>
         </p:txBody>
@@ -1612,10 +1604,8 @@
           <a:lstStyle/>
           <a:p>
             <a:r>
-              <a:rPr lang="en-US" dirty="0"/>
-              <a:t>NAIS charts are partly modelled and include growlers too small for SAR. Inshore, SAR finds 3 to 8 times the chart count; offshore on rough days it finds fewer. Sentinel-2 in April showed up to 37,800 bright objects per tile, mostly ice floes, so optical cannot separate small bergs from floes at 10 m.</a:t>
-            </a:r>
-            <a:endParaRPr lang="en-US" dirty="0"/>
+              <a:t>Same-pass IIP labels are the only per-berg truth: THOR is trained on them (2019-2020) and both detectors are tested on them (April 2019). They are not independent of the radar: the analysts looked at the same image. NAIS charts are partly modelled; Sentinel-2 can't separate small bergs from floes at 10 m.</a:t>
+            </a:r>
           </a:p>
         </p:txBody>
       </p:sp>
@@ -2227,14 +2217,13 @@
           <p:nvPr/>
         </p:nvPicPr>
         <p:blipFill>
-          <a:blip r:embed="rId1"/>
-          <a:srcRect l="26042" r="26042" t="0" b="0"/>
+          <a:blip r:embed="rId4"/>
           <a:stretch/>
         </p:blipFill>
         <p:spPr>
           <a:xfrm>
             <a:off x="6350000" y="0"/>
-            <a:ext cx="5842000" cy="6858000"/>
+            <a:ext cx="5836920" cy="6858000"/>
           </a:xfrm>
           <a:prstGeom prst="rect">
             <a:avLst/>
@@ -2309,7 +2298,7 @@
                 <a:ea typeface="IBM Plex Sans" pitchFamily="34" charset="-122"/>
                 <a:cs typeface="IBM Plex Sans" pitchFamily="34" charset="-120"/>
               </a:rPr>
-              <a:t>PROJECT BRIEF · SENTINEL-1 SAR</a:t>
+              <a:t>PROJECT BRIEF · SAR + FOUNDATION MODEL</a:t>
             </a:r>
             <a:endParaRPr lang="en-US" sz="1200" dirty="0"/>
           </a:p>
@@ -2399,7 +2388,7 @@
                 <a:ea typeface="IBM Plex Sans" pitchFamily="34" charset="-122"/>
                 <a:cs typeface="IBM Plex Sans" pitchFamily="34" charset="-120"/>
               </a:rPr>
-              <a:t>Detecting icebergs off Newfoundland in satellite radar with a classical detector and a foundation model, shown on a live interactive globe.</a:t>
+              <a:t>Finding icebergs off Newfoundland in satellite radar with THOR, a SAR foundation model, benchmarked against a classical detector and shown on a live globe.</a:t>
             </a:r>
             <a:endParaRPr lang="en-US" sz="1600" dirty="0"/>
           </a:p>
@@ -2676,7 +2665,7 @@
                 <a:ea typeface="IBM Plex Sans" pitchFamily="34" charset="-122"/>
                 <a:cs typeface="IBM Plex Sans" pitchFamily="34" charset="-120"/>
               </a:rPr>
-              <a:t>Precision unknown:</a:t>
+              <a:t>Precision unknown</a:t>
             </a:r>
             <a:r>
               <a:rPr lang="en-US" sz="1400" dirty="0">
@@ -2687,7 +2676,7 @@
                 <a:ea typeface="IBM Plex Sans" pitchFamily="34" charset="-122"/>
                 <a:cs typeface="IBM Plex Sans" pitchFamily="34" charset="-120"/>
               </a:rPr>
-              <a:t> 324 of 531 detections on the test pass have no label (bergs, boats or clutter)</a:t>
+              <a:t> for both: unlabelled detections may be bergs, boats or clutter</a:t>
             </a:r>
             <a:endParaRPr lang="en-US" sz="1400" dirty="0"/>
           </a:p>
@@ -2708,7 +2697,7 @@
                 <a:ea typeface="IBM Plex Sans" pitchFamily="34" charset="-122"/>
                 <a:cs typeface="IBM Plex Sans" pitchFamily="34" charset="-120"/>
               </a:rPr>
-              <a:t>CFAR drops large bergs:</a:t>
+              <a:t>One month of one year:</a:t>
             </a:r>
             <a:r>
               <a:rPr lang="en-US" sz="1400" dirty="0">
@@ -2719,7 +2708,7 @@
                 <a:ea typeface="IBM Plex Sans" pitchFamily="34" charset="-122"/>
                 <a:cs typeface="IBM Plex Sans" pitchFamily="34" charset="-120"/>
               </a:rPr>
-              <a:t> 4 of 14 found; its ice-strip rule rejects them</a:t>
+              <a:t> April 2019, 512 bergs</a:t>
             </a:r>
             <a:endParaRPr lang="en-US" sz="1400" dirty="0"/>
           </a:p>
@@ -2740,7 +2729,7 @@
                 <a:ea typeface="IBM Plex Sans" pitchFamily="34" charset="-122"/>
                 <a:cs typeface="IBM Plex Sans" pitchFamily="34" charset="-120"/>
               </a:rPr>
-              <a:t>Rough seas</a:t>
+              <a:t>THOR needs the pipeline:</a:t>
             </a:r>
             <a:r>
               <a:rPr lang="en-US" sz="1400" dirty="0">
@@ -2751,7 +2740,7 @@
                 <a:ea typeface="IBM Plex Sans" pitchFamily="34" charset="-122"/>
                 <a:cs typeface="IBM Plex Sans" pitchFamily="34" charset="-120"/>
               </a:rPr>
-              <a:t> raise the HV background 3–4 dB</a:t>
+              <a:t> the pack-ice mask, and a GPU</a:t>
             </a:r>
             <a:endParaRPr lang="en-US" sz="1400" dirty="0"/>
           </a:p>
@@ -2772,7 +2761,7 @@
                 <a:ea typeface="IBM Plex Sans" pitchFamily="34" charset="-122"/>
                 <a:cs typeface="IBM Plex Sans" pitchFamily="34" charset="-120"/>
               </a:rPr>
-              <a:t>THOR needs the pipeline:</a:t>
+              <a:t>Small bergs:</a:t>
             </a:r>
             <a:r>
               <a:rPr lang="en-US" sz="1400" dirty="0">
@@ -2783,7 +2772,7 @@
                 <a:ea typeface="IBM Plex Sans" pitchFamily="34" charset="-122"/>
                 <a:cs typeface="IBM Plex Sans" pitchFamily="34" charset="-120"/>
               </a:rPr>
-              <a:t> the pack-ice mask, and a GPU</a:t>
+              <a:t> a tie at 0.71</a:t>
             </a:r>
             <a:endParaRPr lang="en-US" sz="1400" dirty="0"/>
           </a:p>
@@ -2974,7 +2963,7 @@
                 <a:ea typeface="IBM Plex Sans" pitchFamily="34" charset="-122"/>
                 <a:cs typeface="IBM Plex Sans" pitchFamily="34" charset="-120"/>
               </a:rPr>
-              <a:t>Shape-based strip test,</a:t>
+              <a:t>THOR at 4×4 patches</a:t>
             </a:r>
             <a:r>
               <a:rPr lang="en-US" sz="1400" dirty="0">
@@ -2985,7 +2974,7 @@
                 <a:ea typeface="IBM Plex Sans" pitchFamily="34" charset="-122"/>
                 <a:cs typeface="IBM Plex Sans" pitchFamily="34" charset="-120"/>
               </a:rPr>
-              <a:t> so the CFAR keeps large bergs</a:t>
+              <a:t> for small bergs</a:t>
             </a:r>
             <a:endParaRPr lang="en-US" sz="1400" dirty="0"/>
           </a:p>
@@ -3006,7 +2995,7 @@
                 <a:ea typeface="IBM Plex Sans" pitchFamily="34" charset="-122"/>
                 <a:cs typeface="IBM Plex Sans" pitchFamily="34" charset="-120"/>
               </a:rPr>
-              <a:t>THOR at 4×4 patches</a:t>
+              <a:t>THOR in the one-command run</a:t>
             </a:r>
             <a:r>
               <a:rPr lang="en-US" sz="1400" dirty="0">
@@ -3017,7 +3006,7 @@
                 <a:ea typeface="IBM Plex Sans" pitchFamily="34" charset="-122"/>
                 <a:cs typeface="IBM Plex Sans" pitchFamily="34" charset="-120"/>
               </a:rPr>
-              <a:t> for small bergs</a:t>
+              <a:t> and as the viewer's main layer</a:t>
             </a:r>
             <a:endParaRPr lang="en-US" sz="1400" dirty="0"/>
           </a:p>
@@ -3038,7 +3027,7 @@
                 <a:ea typeface="IBM Plex Sans" pitchFamily="34" charset="-122"/>
                 <a:cs typeface="IBM Plex Sans" pitchFamily="34" charset="-120"/>
               </a:rPr>
-              <a:t>OS-CFAR or K-distribution</a:t>
+              <a:t>More years</a:t>
             </a:r>
             <a:r>
               <a:rPr lang="en-US" sz="1400" dirty="0">
@@ -3049,7 +3038,7 @@
                 <a:ea typeface="IBM Plex Sans" pitchFamily="34" charset="-122"/>
                 <a:cs typeface="IBM Plex Sans" pitchFamily="34" charset="-120"/>
               </a:rPr>
-              <a:t> for heavy-tailed sea clutter</a:t>
+              <a:t> and near-range passes</a:t>
             </a:r>
             <a:endParaRPr lang="en-US" sz="1400" dirty="0"/>
           </a:p>
@@ -3259,7 +3248,7 @@
                 <a:ea typeface="Source Serif 4" pitchFamily="18" charset="-122"/>
                 <a:cs typeface="Source Serif 4" pitchFamily="18" charset="-120"/>
               </a:rPr>
-              <a:t>One command, end to end</a:t>
+              <a:t>Two commands, end to end</a:t>
             </a:r>
             <a:endParaRPr lang="en-US" sz="3600" dirty="0"/>
           </a:p>
@@ -3274,7 +3263,7 @@
         <p:spPr>
           <a:xfrm>
             <a:off x="812782" y="1884611"/>
-            <a:ext cx="10566436" cy="690743"/>
+            <a:ext cx="10566436" cy="983351"/>
           </a:xfrm>
           <a:prstGeom prst="roundRect">
             <a:avLst>
@@ -3311,6 +3300,26 @@
             </a:r>
             <a:endParaRPr lang="en-US" sz="1600" dirty="0"/>
           </a:p>
+          <a:p>
+            <a:pPr algn="l" indent="0" marL="0">
+              <a:lnSpc>
+                <a:spcPts val="2240"/>
+              </a:lnSpc>
+              <a:buNone/>
+            </a:pPr>
+            <a:r>
+              <a:rPr lang="en-US" sz="1600" dirty="0">
+                <a:solidFill>
+                  <a:srgbClr val="EEF2F0"/>
+                </a:solidFill>
+                <a:latin typeface="Courier New" pitchFamily="49" charset="0"/>
+                <a:ea typeface="Courier New" pitchFamily="49" charset="-122"/>
+                <a:cs typeface="Courier New" pitchFamily="49" charset="-120"/>
+              </a:rPr>
+              <a:t>python -m iceberg_sar.cli thor-detect data/raw/&lt;scene&gt;</a:t>
+            </a:r>
+            <a:endParaRPr lang="en-US" sz="1600" dirty="0"/>
+          </a:p>
         </p:txBody>
       </p:sp>
       <p:sp>
@@ -3321,7 +3330,7 @@
         </p:nvSpPr>
         <p:spPr>
           <a:xfrm>
-            <a:off x="815957" y="2832528"/>
+            <a:off x="815957" y="3125136"/>
             <a:ext cx="2520932" cy="1158208"/>
           </a:xfrm>
           <a:prstGeom prst="roundRect">
@@ -3348,7 +3357,7 @@
         </p:nvSpPr>
         <p:spPr>
           <a:xfrm>
-            <a:off x="1021683" y="3038258"/>
+            <a:off x="1021683" y="3330866"/>
             <a:ext cx="2172765" cy="269208"/>
           </a:xfrm>
           <a:prstGeom prst="rect">
@@ -3392,7 +3401,7 @@
         </p:nvSpPr>
         <p:spPr>
           <a:xfrm>
-            <a:off x="1021683" y="3358189"/>
+            <a:off x="1021683" y="3650797"/>
             <a:ext cx="2172765" cy="452221"/>
           </a:xfrm>
           <a:prstGeom prst="rect">
@@ -3422,7 +3431,7 @@
                 <a:ea typeface="IBM Plex Sans" pitchFamily="34" charset="-122"/>
                 <a:cs typeface="IBM Plex Sans" pitchFamily="34" charset="-120"/>
               </a:rPr>
-              <a:t>Python 3.11, NumPy, SciPy, rasterio, GeoPandas, PyTorch</a:t>
+              <a:t>Python 3.11, NumPy, SciPy, rasterio, GeoPandas</a:t>
             </a:r>
             <a:endParaRPr lang="en-US" sz="1200" dirty="0"/>
           </a:p>
@@ -3436,7 +3445,7 @@
         </p:nvSpPr>
         <p:spPr>
           <a:xfrm>
-            <a:off x="3495585" y="2832528"/>
+            <a:off x="3495585" y="3125136"/>
             <a:ext cx="2521022" cy="1158208"/>
           </a:xfrm>
           <a:prstGeom prst="roundRect">
@@ -3463,7 +3472,7 @@
         </p:nvSpPr>
         <p:spPr>
           <a:xfrm>
-            <a:off x="3701310" y="3038258"/>
+            <a:off x="3701310" y="3330866"/>
             <a:ext cx="2172858" cy="269208"/>
           </a:xfrm>
           <a:prstGeom prst="rect">
@@ -3493,7 +3502,7 @@
                 <a:ea typeface="IBM Plex Sans" pitchFamily="34" charset="-122"/>
                 <a:cs typeface="IBM Plex Sans" pitchFamily="34" charset="-120"/>
               </a:rPr>
-              <a:t>Data</a:t>
+              <a:t>Model</a:t>
             </a:r>
             <a:endParaRPr lang="en-US" sz="1600" dirty="0"/>
           </a:p>
@@ -3507,7 +3516,7 @@
         </p:nvSpPr>
         <p:spPr>
           <a:xfrm>
-            <a:off x="3701310" y="3358189"/>
+            <a:off x="3701310" y="3650797"/>
             <a:ext cx="2172858" cy="452221"/>
           </a:xfrm>
           <a:prstGeom prst="rect">
@@ -3537,7 +3546,7 @@
                 <a:ea typeface="IBM Plex Sans" pitchFamily="34" charset="-122"/>
                 <a:cs typeface="IBM Plex Sans" pitchFamily="34" charset="-120"/>
               </a:rPr>
-              <a:t>asf_search, HyP3 RTC, OSM land polygons, IIP sightings</a:t>
+              <a:t>THOR Tiny via TerraTorch, PyTorch, CUDA GPU</a:t>
             </a:r>
             <a:endParaRPr lang="en-US" sz="1200" dirty="0"/>
           </a:p>
@@ -3551,7 +3560,7 @@
         </p:nvSpPr>
         <p:spPr>
           <a:xfrm>
-            <a:off x="6175303" y="2832528"/>
+            <a:off x="6175303" y="3125136"/>
             <a:ext cx="2521022" cy="1158208"/>
           </a:xfrm>
           <a:prstGeom prst="roundRect">
@@ -3578,7 +3587,7 @@
         </p:nvSpPr>
         <p:spPr>
           <a:xfrm>
-            <a:off x="6381028" y="3038258"/>
+            <a:off x="6381028" y="3330866"/>
             <a:ext cx="2172858" cy="269208"/>
           </a:xfrm>
           <a:prstGeom prst="rect">
@@ -3622,7 +3631,7 @@
         </p:nvSpPr>
         <p:spPr>
           <a:xfrm>
-            <a:off x="6381028" y="3358189"/>
+            <a:off x="6381028" y="3650797"/>
             <a:ext cx="2172858" cy="452221"/>
           </a:xfrm>
           <a:prstGeom prst="rect">
@@ -3666,7 +3675,7 @@
         </p:nvSpPr>
         <p:spPr>
           <a:xfrm>
-            <a:off x="8855021" y="2832528"/>
+            <a:off x="8855021" y="3125136"/>
             <a:ext cx="2521022" cy="1158208"/>
           </a:xfrm>
           <a:prstGeom prst="roundRect">
@@ -3693,7 +3702,7 @@
         </p:nvSpPr>
         <p:spPr>
           <a:xfrm>
-            <a:off x="9060746" y="3038258"/>
+            <a:off x="9060746" y="3330866"/>
             <a:ext cx="2172858" cy="269208"/>
           </a:xfrm>
           <a:prstGeom prst="rect">
@@ -3737,7 +3746,7 @@
         </p:nvSpPr>
         <p:spPr>
           <a:xfrm>
-            <a:off x="9060746" y="3358189"/>
+            <a:off x="9060746" y="3650797"/>
             <a:ext cx="2172858" cy="452221"/>
           </a:xfrm>
           <a:prstGeom prst="rect">
@@ -3781,7 +3790,7 @@
         </p:nvSpPr>
         <p:spPr>
           <a:xfrm>
-            <a:off x="812782" y="4247914"/>
+            <a:off x="812782" y="4540522"/>
             <a:ext cx="10883429" cy="594374"/>
           </a:xfrm>
           <a:prstGeom prst="rect">
@@ -3811,7 +3820,7 @@
                 <a:ea typeface="IBM Plex Sans" pitchFamily="34" charset="-122"/>
                 <a:cs typeface="IBM Plex Sans" pitchFamily="34" charset="-120"/>
               </a:rPr>
-              <a:t>Re-runs reuse downloaded scenes and outputs, and a dry run shows the HyP3 credit cost first. Then publish and git push update the live viewer.</a:t>
+              <a:t>run searches, orders HyP3 processing, masks and runs the baseline; thor-detect adds THOR. Then publish and git push update the live viewer.</a:t>
             </a:r>
             <a:endParaRPr lang="en-US" sz="1600" dirty="0"/>
           </a:p>
@@ -4127,7 +4136,7 @@
                 <a:ea typeface="IBM Plex Sans" pitchFamily="34" charset="-122"/>
                 <a:cs typeface="IBM Plex Sans" pitchFamily="34" charset="-120"/>
               </a:rPr>
-              <a:t>Live demo: natali-kovalski.github.io/iceberg-alley-sar. Contains modified Copernicus Sentinel data (2019–2026). Iceberg data: International Ice Patrol (NSIDC G00807) and the North American Ice Service. THOR weights: FM4CS (Apache 2.0). Land polygons © OpenStreetMap contributors.</a:t>
+              <a:t>Live demo: natali-kovalski.github.io/iceberg-alley-sar. Contains modified Copernicus Sentinel data (2019–2026). Iceberg data: International Ice Patrol (NSIDC G00807) and the North American Ice Service. THOR: FM4CS (Apache 2.0); Forgaard et al., IGARSS 2026. Land polygons © OpenStreetMap contributors.</a:t>
             </a:r>
             <a:endParaRPr lang="en-US" sz="1200" dirty="0"/>
           </a:p>
@@ -4196,7 +4205,7 @@
                 <a:ea typeface="IBM Plex Sans" pitchFamily="34" charset="-122"/>
                 <a:cs typeface="IBM Plex Sans" pitchFamily="34" charset="-120"/>
               </a:rPr>
-              <a:t>SECOND DETECTOR</a:t>
+              <a:t>THE DETECTOR</a:t>
             </a:r>
             <a:endParaRPr lang="en-US" sz="1200" dirty="0"/>
           </a:p>
@@ -4560,7 +4569,7 @@
                 <a:ea typeface="IBM Plex Sans" pitchFamily="34" charset="-122"/>
                 <a:cs typeface="IBM Plex Sans" pitchFamily="34" charset="-120"/>
               </a:rPr>
-              <a:t>A linear layer on cached features, trained on IIP labels from 2019–2020 frames. All of April 2019 is held out.</a:t>
+              <a:t>A linear layer on cached features turns them into an iceberg heatmap. Training takes minutes on a laptop GPU.</a:t>
             </a:r>
             <a:endParaRPr lang="en-US" sz="1600" dirty="0"/>
           </a:p>
@@ -4719,7 +4728,7 @@
                 <a:ea typeface="IBM Plex Sans" pitchFamily="34" charset="-122"/>
                 <a:cs typeface="IBM Plex Sans" pitchFamily="34" charset="-120"/>
               </a:rPr>
-              <a:t>Peaks must fall on the CFAR's masked raster. Output is the same GeoJSON, plus a score, so both run through one validation.</a:t>
+              <a:t>Peaks must fall on the classical masked raster. Output is the CFAR's GeoJSON schema, plus a score.</a:t>
             </a:r>
             <a:endParaRPr lang="en-US" sz="1600" dirty="0"/>
           </a:p>
@@ -4777,8 +4786,8 @@
         </p:nvSpPr>
         <p:spPr>
           <a:xfrm>
-            <a:off x="11146536" y="6238242"/>
-            <a:ext cx="237744" cy="238810"/>
+            <a:off x="11237976" y="6238242"/>
+            <a:ext cx="146304" cy="238810"/>
           </a:xfrm>
           <a:prstGeom prst="rect">
             <a:avLst/>
@@ -4807,7 +4816,7 @@
                 <a:ea typeface="IBM Plex Sans" pitchFamily="34" charset="-122"/>
                 <a:cs typeface="IBM Plex Sans" pitchFamily="34" charset="-120"/>
               </a:rPr>
-              <a:t>10</a:t>
+              <a:t>6</a:t>
             </a:r>
             <a:endParaRPr lang="en-US" sz="1200" dirty="0"/>
           </a:p>
@@ -4838,6 +4847,4115 @@
         <p:nvPr/>
       </p:nvGrpSpPr>
       <p:grpSpPr/>
+      <p:sp>
+        <p:nvSpPr>
+          <p:cNvPr id="2" name="Text 0"/>
+          <p:cNvSpPr/>
+          <p:nvPr/>
+        </p:nvSpPr>
+        <p:spPr>
+          <a:xfrm>
+            <a:off x="812782" y="1518949"/>
+            <a:ext cx="4447540" cy="238810"/>
+          </a:xfrm>
+          <a:prstGeom prst="rect">
+            <a:avLst/>
+          </a:prstGeom>
+          <a:noFill/>
+          <a:ln/>
+        </p:spPr>
+        <p:txBody>
+          <a:bodyPr wrap="square" lIns="0" tIns="0" rIns="0" bIns="0" rtlCol="0" anchor="t">
+            <a:normAutofit/>
+          </a:bodyPr>
+          <a:lstStyle/>
+          <a:p>
+            <a:pPr algn="l" indent="0" marL="0">
+              <a:lnSpc>
+                <a:spcPts val="1680"/>
+              </a:lnSpc>
+              <a:buNone/>
+            </a:pPr>
+            <a:r>
+              <a:rPr lang="en-US" sz="1200" b="1" spc="200" kern="0" dirty="0">
+                <a:solidFill>
+                  <a:srgbClr val="A84B1A"/>
+                </a:solidFill>
+                <a:latin typeface="IBM Plex Sans" pitchFamily="34" charset="0"/>
+                <a:ea typeface="IBM Plex Sans" pitchFamily="34" charset="-122"/>
+                <a:cs typeface="IBM Plex Sans" pitchFamily="34" charset="-120"/>
+              </a:rPr>
+              <a:t>TRAINING</a:t>
+            </a:r>
+            <a:endParaRPr lang="en-US" sz="1200" dirty="0"/>
+          </a:p>
+        </p:txBody>
+      </p:sp>
+      <p:sp>
+        <p:nvSpPr>
+          <p:cNvPr id="3" name="Text 1"/>
+          <p:cNvSpPr/>
+          <p:nvPr>
+            <p:ph type="title"/>
+          </p:nvPr>
+        </p:nvSpPr>
+        <p:spPr>
+          <a:xfrm>
+            <a:off x="812782" y="1935485"/>
+            <a:ext cx="4447540" cy="1031117"/>
+          </a:xfrm>
+          <a:prstGeom prst="rect">
+            <a:avLst/>
+          </a:prstGeom>
+          <a:noFill/>
+          <a:ln/>
+        </p:spPr>
+        <p:txBody>
+          <a:bodyPr wrap="square" lIns="0" tIns="0" rIns="0" bIns="0" rtlCol="0" anchor="t">
+            <a:normAutofit/>
+          </a:bodyPr>
+          <a:lstStyle/>
+          <a:p>
+            <a:pPr algn="l" indent="0" marL="0">
+              <a:lnSpc>
+                <a:spcPts val="3960"/>
+              </a:lnSpc>
+              <a:buNone/>
+            </a:pPr>
+            <a:r>
+              <a:rPr lang="en-US" sz="3600" b="1" i="0" dirty="0">
+                <a:solidFill>
+                  <a:srgbClr val="0E2233"/>
+                </a:solidFill>
+                <a:latin typeface="Source Serif 4" pitchFamily="18" charset="0"/>
+                <a:ea typeface="Source Serif 4" pitchFamily="18" charset="-122"/>
+                <a:cs typeface="Source Serif 4" pitchFamily="18" charset="-120"/>
+              </a:rPr>
+              <a:t>Learned from Ice Patrol labels</a:t>
+            </a:r>
+            <a:endParaRPr lang="en-US" sz="3600" dirty="0"/>
+          </a:p>
+        </p:txBody>
+      </p:sp>
+      <p:sp>
+        <p:nvSpPr>
+          <p:cNvPr id="4" name="Text 2"/>
+          <p:cNvSpPr/>
+          <p:nvPr/>
+        </p:nvSpPr>
+        <p:spPr>
+          <a:xfrm>
+            <a:off x="870440" y="3144332"/>
+            <a:ext cx="4382262" cy="2016810"/>
+          </a:xfrm>
+          <a:prstGeom prst="rect">
+            <a:avLst/>
+          </a:prstGeom>
+          <a:noFill/>
+          <a:ln/>
+        </p:spPr>
+        <p:txBody>
+          <a:bodyPr wrap="square" lIns="0" tIns="0" rIns="0" bIns="0" rtlCol="0" anchor="t">
+            <a:normAutofit/>
+          </a:bodyPr>
+          <a:lstStyle/>
+          <a:p>
+            <a:pPr algn="l" marL="196342" indent="-196342">
+              <a:lnSpc>
+                <a:spcPts val="2240"/>
+              </a:lnSpc>
+              <a:buSzPct val="100000"/>
+              <a:buChar char="•"/>
+            </a:pPr>
+            <a:r>
+              <a:rPr lang="en-US" sz="1600" b="1" dirty="0">
+                <a:solidFill>
+                  <a:srgbClr val="46566A"/>
+                </a:solidFill>
+                <a:latin typeface="IBM Plex Sans" pitchFamily="34" charset="0"/>
+                <a:ea typeface="IBM Plex Sans" pitchFamily="34" charset="-122"/>
+                <a:cs typeface="IBM Plex Sans" pitchFamily="34" charset="-120"/>
+              </a:rPr>
+              <a:t>Labels:</a:t>
+            </a:r>
+            <a:r>
+              <a:rPr lang="en-US" sz="1600" dirty="0">
+                <a:solidFill>
+                  <a:srgbClr val="46566A"/>
+                </a:solidFill>
+                <a:latin typeface="IBM Plex Sans" pitchFamily="34" charset="0"/>
+                <a:ea typeface="IBM Plex Sans" pitchFamily="34" charset="-122"/>
+                <a:cs typeface="IBM Plex Sans" pitchFamily="34" charset="-120"/>
+              </a:rPr>
+              <a:t> IIP analysts' berg positions on the same pass</a:t>
+            </a:r>
+            <a:endParaRPr lang="en-US" sz="1600" dirty="0"/>
+          </a:p>
+          <a:p>
+            <a:pPr algn="l" marL="196342" indent="-196342">
+              <a:lnSpc>
+                <a:spcPts val="2240"/>
+              </a:lnSpc>
+              <a:buSzPct val="100000"/>
+              <a:buChar char="•"/>
+            </a:pPr>
+            <a:r>
+              <a:rPr lang="en-US" sz="1600" b="1" dirty="0">
+                <a:solidFill>
+                  <a:srgbClr val="46566A"/>
+                </a:solidFill>
+                <a:latin typeface="IBM Plex Sans" pitchFamily="34" charset="0"/>
+                <a:ea typeface="IBM Plex Sans" pitchFamily="34" charset="-122"/>
+                <a:cs typeface="IBM Plex Sans" pitchFamily="34" charset="-120"/>
+              </a:rPr>
+              <a:t>Data:</a:t>
+            </a:r>
+            <a:r>
+              <a:rPr lang="en-US" sz="1600" dirty="0">
+                <a:solidFill>
+                  <a:srgbClr val="46566A"/>
+                </a:solidFill>
+                <a:latin typeface="IBM Plex Sans" pitchFamily="34" charset="0"/>
+                <a:ea typeface="IBM Plex Sans" pitchFamily="34" charset="-122"/>
+                <a:cs typeface="IBM Plex Sans" pitchFamily="34" charset="-120"/>
+              </a:rPr>
+              <a:t> 723 crops from 20 passes, 2019–2020</a:t>
+            </a:r>
+            <a:endParaRPr lang="en-US" sz="1600" dirty="0"/>
+          </a:p>
+          <a:p>
+            <a:pPr algn="l" marL="196342" indent="-196342">
+              <a:lnSpc>
+                <a:spcPts val="2240"/>
+              </a:lnSpc>
+              <a:buSzPct val="100000"/>
+              <a:buChar char="•"/>
+            </a:pPr>
+            <a:r>
+              <a:rPr lang="en-US" sz="1600" b="1" dirty="0">
+                <a:solidFill>
+                  <a:srgbClr val="46566A"/>
+                </a:solidFill>
+                <a:latin typeface="IBM Plex Sans" pitchFamily="34" charset="0"/>
+                <a:ea typeface="IBM Plex Sans" pitchFamily="34" charset="-122"/>
+                <a:cs typeface="IBM Plex Sans" pitchFamily="34" charset="-120"/>
+              </a:rPr>
+              <a:t>Held out:</a:t>
+            </a:r>
+            <a:r>
+              <a:rPr lang="en-US" sz="1600" dirty="0">
+                <a:solidFill>
+                  <a:srgbClr val="46566A"/>
+                </a:solidFill>
+                <a:latin typeface="IBM Plex Sans" pitchFamily="34" charset="0"/>
+                <a:ea typeface="IBM Plex Sans" pitchFamily="34" charset="-122"/>
+                <a:cs typeface="IBM Plex Sans" pitchFamily="34" charset="-120"/>
+              </a:rPr>
+              <a:t> all of April 2019, for the test</a:t>
+            </a:r>
+            <a:endParaRPr lang="en-US" sz="1600" dirty="0"/>
+          </a:p>
+          <a:p>
+            <a:pPr algn="l" marL="196342" indent="-196342">
+              <a:lnSpc>
+                <a:spcPts val="2240"/>
+              </a:lnSpc>
+              <a:buSzPct val="100000"/>
+              <a:buChar char="•"/>
+            </a:pPr>
+            <a:r>
+              <a:rPr lang="en-US" sz="1600" b="1" dirty="0">
+                <a:solidFill>
+                  <a:srgbClr val="46566A"/>
+                </a:solidFill>
+                <a:latin typeface="IBM Plex Sans" pitchFamily="34" charset="0"/>
+                <a:ea typeface="IBM Plex Sans" pitchFamily="34" charset="-122"/>
+                <a:cs typeface="IBM Plex Sans" pitchFamily="34" charset="-120"/>
+              </a:rPr>
+              <a:t>Detections:</a:t>
+            </a:r>
+            <a:r>
+              <a:rPr lang="en-US" sz="1600" dirty="0">
+                <a:solidFill>
+                  <a:srgbClr val="46566A"/>
+                </a:solidFill>
+                <a:latin typeface="IBM Plex Sans" pitchFamily="34" charset="0"/>
+                <a:ea typeface="IBM Plex Sans" pitchFamily="34" charset="-122"/>
+                <a:cs typeface="IBM Plex Sans" pitchFamily="34" charset="-120"/>
+              </a:rPr>
+              <a:t> heatmap peaks scoring ≥ 0.35</a:t>
+            </a:r>
+            <a:endParaRPr lang="en-US" sz="1600" dirty="0"/>
+          </a:p>
+        </p:txBody>
+      </p:sp>
+      <p:sp>
+        <p:nvSpPr>
+          <p:cNvPr id="5" name="Shape 3"/>
+          <p:cNvSpPr/>
+          <p:nvPr/>
+        </p:nvSpPr>
+        <p:spPr>
+          <a:xfrm>
+            <a:off x="5486400" y="1042415"/>
+            <a:ext cx="5882685" cy="4114800"/>
+          </a:xfrm>
+          <a:prstGeom prst="roundRect">
+            <a:avLst>
+              <a:gd name="adj" fmla="val 1788"/>
+            </a:avLst>
+          </a:prstGeom>
+          <a:solidFill>
+            <a:srgbClr val="0E2233"/>
+          </a:solidFill>
+          <a:ln/>
+        </p:spPr>
+      </p:sp>
+      <p:pic>
+        <p:nvPicPr>
+          <p:cNvPr id="6" name="Image 0" descr="HV radar scene of 8 May 2025 with land and pack ice masked in black and 140 detections circled in red">    </p:cNvPr>
+          <p:cNvPicPr>
+            <a:picLocks noChangeAspect="1"/>
+          </p:cNvPicPr>
+          <p:nvPr/>
+        </p:nvPicPr>
+        <p:blipFill>
+          <a:blip r:embed="rId4"/>
+          <a:stretch/>
+        </p:blipFill>
+        <p:spPr>
+          <a:xfrm>
+            <a:off x="5486400" y="1042415"/>
+            <a:ext cx="5882685" cy="4114800"/>
+          </a:xfrm>
+          <a:prstGeom prst="roundRect">
+            <a:avLst>
+              <a:gd name="adj" fmla="val 1788"/>
+            </a:avLst>
+          </a:prstGeom>
+        </p:spPr>
+      </p:pic>
+      <p:sp>
+        <p:nvSpPr>
+          <p:cNvPr id="7" name="Text 4"/>
+          <p:cNvSpPr/>
+          <p:nvPr/>
+        </p:nvSpPr>
+        <p:spPr>
+          <a:xfrm>
+            <a:off x="5486346" y="5248655"/>
+            <a:ext cx="5882685" cy="238810"/>
+          </a:xfrm>
+          <a:prstGeom prst="rect">
+            <a:avLst/>
+          </a:prstGeom>
+          <a:noFill/>
+          <a:ln/>
+        </p:spPr>
+        <p:txBody>
+          <a:bodyPr wrap="square" lIns="0" tIns="0" rIns="0" bIns="0" rtlCol="0" anchor="t">
+            <a:normAutofit/>
+          </a:bodyPr>
+          <a:lstStyle/>
+          <a:p>
+            <a:pPr algn="l" indent="0" marL="0">
+              <a:lnSpc>
+                <a:spcPts val="1680"/>
+              </a:lnSpc>
+              <a:buNone/>
+            </a:pPr>
+            <a:r>
+              <a:rPr lang="en-US" sz="1200" dirty="0">
+                <a:solidFill>
+                  <a:srgbClr val="5A6978"/>
+                </a:solidFill>
+                <a:latin typeface="IBM Plex Sans" pitchFamily="34" charset="0"/>
+                <a:ea typeface="IBM Plex Sans" pitchFamily="34" charset="-122"/>
+                <a:cs typeface="IBM Plex Sans" pitchFamily="34" charset="-120"/>
+              </a:rPr>
+              <a:t>THOR heatmaps on 2020 validation crops: IIP labels (red circles), THOR peaks (green ×).</a:t>
+            </a:r>
+            <a:endParaRPr lang="en-US" sz="1200" dirty="0"/>
+          </a:p>
+        </p:txBody>
+      </p:sp>
+      <p:sp>
+        <p:nvSpPr>
+          <p:cNvPr id="8" name="Text 5"/>
+          <p:cNvSpPr/>
+          <p:nvPr/>
+        </p:nvSpPr>
+        <p:spPr>
+          <a:xfrm>
+            <a:off x="812782" y="6238242"/>
+            <a:ext cx="4114800" cy="238810"/>
+          </a:xfrm>
+          <a:prstGeom prst="rect">
+            <a:avLst/>
+          </a:prstGeom>
+          <a:noFill/>
+          <a:ln/>
+        </p:spPr>
+        <p:txBody>
+          <a:bodyPr wrap="square" lIns="0" tIns="0" rIns="0" bIns="0" rtlCol="0" anchor="t">
+            <a:normAutofit/>
+          </a:bodyPr>
+          <a:lstStyle/>
+          <a:p>
+            <a:pPr algn="l" indent="0" marL="0">
+              <a:lnSpc>
+                <a:spcPts val="1680"/>
+              </a:lnSpc>
+              <a:buNone/>
+            </a:pPr>
+            <a:r>
+              <a:rPr lang="en-US" sz="1200" dirty="0">
+                <a:solidFill>
+                  <a:srgbClr val="5A6978"/>
+                </a:solidFill>
+                <a:latin typeface="IBM Plex Sans" pitchFamily="34" charset="0"/>
+                <a:ea typeface="IBM Plex Sans" pitchFamily="34" charset="-122"/>
+                <a:cs typeface="IBM Plex Sans" pitchFamily="34" charset="-120"/>
+              </a:rPr>
+              <a:t>Iceberg Alley SAR · Project brief</a:t>
+            </a:r>
+            <a:endParaRPr lang="en-US" sz="1200" dirty="0"/>
+          </a:p>
+        </p:txBody>
+      </p:sp>
+      <p:sp>
+        <p:nvSpPr>
+          <p:cNvPr id="9" name="Text 6"/>
+          <p:cNvSpPr/>
+          <p:nvPr/>
+        </p:nvSpPr>
+        <p:spPr>
+          <a:xfrm>
+            <a:off x="11237976" y="6238242"/>
+            <a:ext cx="146304" cy="238810"/>
+          </a:xfrm>
+          <a:prstGeom prst="rect">
+            <a:avLst/>
+          </a:prstGeom>
+          <a:noFill/>
+          <a:ln/>
+        </p:spPr>
+        <p:txBody>
+          <a:bodyPr wrap="square" lIns="0" tIns="0" rIns="0" bIns="0" rtlCol="0" anchor="t">
+            <a:normAutofit/>
+          </a:bodyPr>
+          <a:lstStyle/>
+          <a:p>
+            <a:pPr algn="r" indent="0" marL="0">
+              <a:lnSpc>
+                <a:spcPts val="1680"/>
+              </a:lnSpc>
+              <a:buNone/>
+            </a:pPr>
+            <a:r>
+              <a:rPr lang="en-US" sz="1200" dirty="0">
+                <a:solidFill>
+                  <a:srgbClr val="5A6978"/>
+                </a:solidFill>
+                <a:latin typeface="IBM Plex Sans" pitchFamily="34" charset="0"/>
+                <a:ea typeface="IBM Plex Sans" pitchFamily="34" charset="-122"/>
+                <a:cs typeface="IBM Plex Sans" pitchFamily="34" charset="-120"/>
+              </a:rPr>
+              <a:t>7</a:t>
+            </a:r>
+            <a:endParaRPr lang="en-US" sz="1200" dirty="0"/>
+          </a:p>
+        </p:txBody>
+      </p:sp>
+    </p:spTree>
+  </p:cSld>
+  <p:clrMapOvr>
+    <a:masterClrMapping/>
+  </p:clrMapOvr>
+</p:sld>
+</file>
+
+<file path=ppt/slides/slide2.xml><?xml version="1.0" encoding="utf-8"?>
+<p:sld xmlns:a="http://schemas.openxmlformats.org/drawingml/2006/main" xmlns:r="http://schemas.openxmlformats.org/officeDocument/2006/relationships" xmlns:p="http://schemas.openxmlformats.org/presentationml/2006/main">
+  <p:cSld name="Slide 2">
+    <p:bg>
+      <p:bgPr>
+        <a:solidFill>
+          <a:srgbClr val="F4F6F3"/>
+        </a:solidFill>
+      </p:bgPr>
+    </p:bg>
+    <p:spTree>
+      <p:nvGrpSpPr>
+        <p:cNvPr id="1" name=""/>
+        <p:cNvGrpSpPr/>
+        <p:nvPr/>
+      </p:nvGrpSpPr>
+      <p:grpSpPr>
+        <a:xfrm>
+          <a:off x="0" y="0"/>
+          <a:ext cx="0" cy="0"/>
+          <a:chOff x="0" y="0"/>
+          <a:chExt cx="0" cy="0"/>
+        </a:xfrm>
+      </p:grpSpPr>
+      <p:sp>
+        <p:nvSpPr>
+          <p:cNvPr id="2" name="Text 0"/>
+          <p:cNvSpPr/>
+          <p:nvPr/>
+        </p:nvSpPr>
+        <p:spPr>
+          <a:xfrm>
+            <a:off x="812782" y="812781"/>
+            <a:ext cx="10883429" cy="238810"/>
+          </a:xfrm>
+          <a:prstGeom prst="rect">
+            <a:avLst/>
+          </a:prstGeom>
+          <a:noFill/>
+          <a:ln/>
+        </p:spPr>
+        <p:txBody>
+          <a:bodyPr wrap="square" lIns="0" tIns="0" rIns="0" bIns="0" rtlCol="0" anchor="t">
+            <a:normAutofit/>
+          </a:bodyPr>
+          <a:lstStyle/>
+          <a:p>
+            <a:pPr algn="l" indent="0" marL="0">
+              <a:lnSpc>
+                <a:spcPts val="1680"/>
+              </a:lnSpc>
+              <a:buNone/>
+            </a:pPr>
+            <a:r>
+              <a:rPr lang="en-US" sz="1200" b="1" spc="200" kern="0" dirty="0">
+                <a:solidFill>
+                  <a:srgbClr val="A84B1A"/>
+                </a:solidFill>
+                <a:latin typeface="IBM Plex Sans" pitchFamily="34" charset="0"/>
+                <a:ea typeface="IBM Plex Sans" pitchFamily="34" charset="-122"/>
+                <a:cs typeface="IBM Plex Sans" pitchFamily="34" charset="-120"/>
+              </a:rPr>
+              <a:t>THE PROBLEM</a:t>
+            </a:r>
+            <a:endParaRPr lang="en-US" sz="1200" dirty="0"/>
+          </a:p>
+        </p:txBody>
+      </p:sp>
+      <p:sp>
+        <p:nvSpPr>
+          <p:cNvPr id="3" name="Text 1"/>
+          <p:cNvSpPr/>
+          <p:nvPr>
+            <p:ph type="title"/>
+          </p:nvPr>
+        </p:nvSpPr>
+        <p:spPr>
+          <a:xfrm>
+            <a:off x="812782" y="1127756"/>
+            <a:ext cx="10883429" cy="528259"/>
+          </a:xfrm>
+          <a:prstGeom prst="rect">
+            <a:avLst/>
+          </a:prstGeom>
+          <a:noFill/>
+          <a:ln/>
+        </p:spPr>
+        <p:txBody>
+          <a:bodyPr wrap="square" lIns="0" tIns="0" rIns="0" bIns="0" rtlCol="0" anchor="t">
+            <a:normAutofit/>
+          </a:bodyPr>
+          <a:lstStyle/>
+          <a:p>
+            <a:pPr algn="l" indent="0" marL="0">
+              <a:lnSpc>
+                <a:spcPts val="3960"/>
+              </a:lnSpc>
+              <a:buNone/>
+            </a:pPr>
+            <a:r>
+              <a:rPr lang="en-US" sz="3600" b="1" i="0" dirty="0">
+                <a:solidFill>
+                  <a:srgbClr val="0E2233"/>
+                </a:solidFill>
+                <a:latin typeface="Source Serif 4" pitchFamily="18" charset="0"/>
+                <a:ea typeface="Source Serif 4" pitchFamily="18" charset="-122"/>
+                <a:cs typeface="Source Serif 4" pitchFamily="18" charset="-120"/>
+              </a:rPr>
+              <a:t>Every spring, icebergs drift into busy water</a:t>
+            </a:r>
+            <a:endParaRPr lang="en-US" sz="3600" dirty="0"/>
+          </a:p>
+        </p:txBody>
+      </p:sp>
+      <p:sp>
+        <p:nvSpPr>
+          <p:cNvPr id="4" name="Shape 2"/>
+          <p:cNvSpPr/>
+          <p:nvPr/>
+        </p:nvSpPr>
+        <p:spPr>
+          <a:xfrm>
+            <a:off x="815957" y="1938572"/>
+            <a:ext cx="3380347" cy="3900253"/>
+          </a:xfrm>
+          <a:prstGeom prst="roundRect">
+            <a:avLst>
+              <a:gd name="adj" fmla="val 2912"/>
+            </a:avLst>
+          </a:prstGeom>
+          <a:solidFill>
+            <a:srgbClr val="FBFCFA"/>
+          </a:solidFill>
+          <a:ln w="6350">
+            <a:solidFill>
+              <a:srgbClr val="D5DEE0"/>
+            </a:solidFill>
+            <a:prstDash val="solid"/>
+          </a:ln>
+        </p:spPr>
+      </p:sp>
+      <p:sp>
+        <p:nvSpPr>
+          <p:cNvPr id="5" name="Text 3"/>
+          <p:cNvSpPr/>
+          <p:nvPr/>
+        </p:nvSpPr>
+        <p:spPr>
+          <a:xfrm>
+            <a:off x="1123337" y="2245951"/>
+            <a:ext cx="2848555" cy="238810"/>
+          </a:xfrm>
+          <a:prstGeom prst="rect">
+            <a:avLst/>
+          </a:prstGeom>
+          <a:noFill/>
+          <a:ln/>
+        </p:spPr>
+        <p:txBody>
+          <a:bodyPr wrap="square" lIns="0" tIns="0" rIns="0" bIns="0" rtlCol="0" anchor="t">
+            <a:normAutofit/>
+          </a:bodyPr>
+          <a:lstStyle/>
+          <a:p>
+            <a:pPr algn="l" indent="0" marL="0">
+              <a:lnSpc>
+                <a:spcPts val="1680"/>
+              </a:lnSpc>
+              <a:buNone/>
+            </a:pPr>
+            <a:r>
+              <a:rPr lang="en-US" sz="1200" b="1" dirty="0">
+                <a:solidFill>
+                  <a:srgbClr val="A84B1A"/>
+                </a:solidFill>
+                <a:latin typeface="IBM Plex Sans" pitchFamily="34" charset="0"/>
+                <a:ea typeface="IBM Plex Sans" pitchFamily="34" charset="-122"/>
+                <a:cs typeface="IBM Plex Sans" pitchFamily="34" charset="-120"/>
+              </a:rPr>
+              <a:t>01</a:t>
+            </a:r>
+            <a:endParaRPr lang="en-US" sz="1200" dirty="0"/>
+          </a:p>
+        </p:txBody>
+      </p:sp>
+      <p:sp>
+        <p:nvSpPr>
+          <p:cNvPr id="6" name="Text 4"/>
+          <p:cNvSpPr/>
+          <p:nvPr/>
+        </p:nvSpPr>
+        <p:spPr>
+          <a:xfrm>
+            <a:off x="1123337" y="2586362"/>
+            <a:ext cx="2848555" cy="360669"/>
+          </a:xfrm>
+          <a:prstGeom prst="rect">
+            <a:avLst/>
+          </a:prstGeom>
+          <a:noFill/>
+          <a:ln/>
+        </p:spPr>
+        <p:txBody>
+          <a:bodyPr wrap="square" lIns="0" tIns="0" rIns="0" bIns="0" rtlCol="0" anchor="t">
+            <a:normAutofit/>
+          </a:bodyPr>
+          <a:lstStyle/>
+          <a:p>
+            <a:pPr algn="l" indent="0" marL="0">
+              <a:lnSpc>
+                <a:spcPts val="2640"/>
+              </a:lnSpc>
+              <a:buNone/>
+            </a:pPr>
+            <a:r>
+              <a:rPr lang="en-US" sz="2200" b="1" dirty="0">
+                <a:solidFill>
+                  <a:srgbClr val="0E2233"/>
+                </a:solidFill>
+                <a:latin typeface="Source Serif 4" pitchFamily="18" charset="0"/>
+                <a:ea typeface="Source Serif 4" pitchFamily="18" charset="-122"/>
+                <a:cs typeface="Source Serif 4" pitchFamily="18" charset="-120"/>
+              </a:rPr>
+              <a:t>The hazard</a:t>
+            </a:r>
+            <a:endParaRPr lang="en-US" sz="2200" dirty="0"/>
+          </a:p>
+        </p:txBody>
+      </p:sp>
+      <p:sp>
+        <p:nvSpPr>
+          <p:cNvPr id="7" name="Text 5"/>
+          <p:cNvSpPr/>
+          <p:nvPr/>
+        </p:nvSpPr>
+        <p:spPr>
+          <a:xfrm>
+            <a:off x="1123337" y="3048631"/>
+            <a:ext cx="2848555" cy="1447836"/>
+          </a:xfrm>
+          <a:prstGeom prst="rect">
+            <a:avLst/>
+          </a:prstGeom>
+          <a:noFill/>
+          <a:ln/>
+        </p:spPr>
+        <p:txBody>
+          <a:bodyPr wrap="square" lIns="0" tIns="0" rIns="0" bIns="0" rtlCol="0" anchor="t">
+            <a:normAutofit/>
+          </a:bodyPr>
+          <a:lstStyle/>
+          <a:p>
+            <a:pPr algn="l" indent="0" marL="0">
+              <a:lnSpc>
+                <a:spcPts val="2240"/>
+              </a:lnSpc>
+              <a:buNone/>
+            </a:pPr>
+            <a:r>
+              <a:rPr lang="en-US" sz="1600" dirty="0">
+                <a:solidFill>
+                  <a:srgbClr val="46566A"/>
+                </a:solidFill>
+                <a:latin typeface="IBM Plex Sans" pitchFamily="34" charset="0"/>
+                <a:ea typeface="IBM Plex Sans" pitchFamily="34" charset="-122"/>
+                <a:cs typeface="IBM Plex Sans" pitchFamily="34" charset="-120"/>
+              </a:rPr>
+              <a:t>Greenland bergs ride the Labrador Current down "Iceberg Alley", past shipping lanes, fishing grounds and offshore platforms.</a:t>
+            </a:r>
+            <a:endParaRPr lang="en-US" sz="1600" dirty="0"/>
+          </a:p>
+        </p:txBody>
+      </p:sp>
+      <p:sp>
+        <p:nvSpPr>
+          <p:cNvPr id="8" name="Shape 6"/>
+          <p:cNvSpPr/>
+          <p:nvPr/>
+        </p:nvSpPr>
+        <p:spPr>
+          <a:xfrm>
+            <a:off x="4405781" y="1938572"/>
+            <a:ext cx="3380437" cy="3900253"/>
+          </a:xfrm>
+          <a:prstGeom prst="roundRect">
+            <a:avLst>
+              <a:gd name="adj" fmla="val 2912"/>
+            </a:avLst>
+          </a:prstGeom>
+          <a:solidFill>
+            <a:srgbClr val="FBFCFA"/>
+          </a:solidFill>
+          <a:ln w="6350">
+            <a:solidFill>
+              <a:srgbClr val="D5DEE0"/>
+            </a:solidFill>
+            <a:prstDash val="solid"/>
+          </a:ln>
+        </p:spPr>
+      </p:sp>
+      <p:sp>
+        <p:nvSpPr>
+          <p:cNvPr id="9" name="Text 7"/>
+          <p:cNvSpPr/>
+          <p:nvPr/>
+        </p:nvSpPr>
+        <p:spPr>
+          <a:xfrm>
+            <a:off x="4713161" y="2245951"/>
+            <a:ext cx="2848648" cy="238810"/>
+          </a:xfrm>
+          <a:prstGeom prst="rect">
+            <a:avLst/>
+          </a:prstGeom>
+          <a:noFill/>
+          <a:ln/>
+        </p:spPr>
+        <p:txBody>
+          <a:bodyPr wrap="square" lIns="0" tIns="0" rIns="0" bIns="0" rtlCol="0" anchor="t">
+            <a:normAutofit/>
+          </a:bodyPr>
+          <a:lstStyle/>
+          <a:p>
+            <a:pPr algn="l" indent="0" marL="0">
+              <a:lnSpc>
+                <a:spcPts val="1680"/>
+              </a:lnSpc>
+              <a:buNone/>
+            </a:pPr>
+            <a:r>
+              <a:rPr lang="en-US" sz="1200" b="1" dirty="0">
+                <a:solidFill>
+                  <a:srgbClr val="A84B1A"/>
+                </a:solidFill>
+                <a:latin typeface="IBM Plex Sans" pitchFamily="34" charset="0"/>
+                <a:ea typeface="IBM Plex Sans" pitchFamily="34" charset="-122"/>
+                <a:cs typeface="IBM Plex Sans" pitchFamily="34" charset="-120"/>
+              </a:rPr>
+              <a:t>02</a:t>
+            </a:r>
+            <a:endParaRPr lang="en-US" sz="1200" dirty="0"/>
+          </a:p>
+        </p:txBody>
+      </p:sp>
+      <p:sp>
+        <p:nvSpPr>
+          <p:cNvPr id="10" name="Text 8"/>
+          <p:cNvSpPr/>
+          <p:nvPr/>
+        </p:nvSpPr>
+        <p:spPr>
+          <a:xfrm>
+            <a:off x="4713161" y="2586362"/>
+            <a:ext cx="2848648" cy="360669"/>
+          </a:xfrm>
+          <a:prstGeom prst="rect">
+            <a:avLst/>
+          </a:prstGeom>
+          <a:noFill/>
+          <a:ln/>
+        </p:spPr>
+        <p:txBody>
+          <a:bodyPr wrap="square" lIns="0" tIns="0" rIns="0" bIns="0" rtlCol="0" anchor="t">
+            <a:normAutofit/>
+          </a:bodyPr>
+          <a:lstStyle/>
+          <a:p>
+            <a:pPr algn="l" indent="0" marL="0">
+              <a:lnSpc>
+                <a:spcPts val="2640"/>
+              </a:lnSpc>
+              <a:buNone/>
+            </a:pPr>
+            <a:r>
+              <a:rPr lang="en-US" sz="2200" b="1" dirty="0">
+                <a:solidFill>
+                  <a:srgbClr val="0E2233"/>
+                </a:solidFill>
+                <a:latin typeface="Source Serif 4" pitchFamily="18" charset="0"/>
+                <a:ea typeface="Source Serif 4" pitchFamily="18" charset="-122"/>
+                <a:cs typeface="Source Serif 4" pitchFamily="18" charset="-120"/>
+              </a:rPr>
+              <a:t>The gap</a:t>
+            </a:r>
+            <a:endParaRPr lang="en-US" sz="2200" dirty="0"/>
+          </a:p>
+        </p:txBody>
+      </p:sp>
+      <p:sp>
+        <p:nvSpPr>
+          <p:cNvPr id="11" name="Text 9"/>
+          <p:cNvSpPr/>
+          <p:nvPr/>
+        </p:nvSpPr>
+        <p:spPr>
+          <a:xfrm>
+            <a:off x="4713161" y="3048631"/>
+            <a:ext cx="2848648" cy="1163349"/>
+          </a:xfrm>
+          <a:prstGeom prst="rect">
+            <a:avLst/>
+          </a:prstGeom>
+          <a:noFill/>
+          <a:ln/>
+        </p:spPr>
+        <p:txBody>
+          <a:bodyPr wrap="square" lIns="0" tIns="0" rIns="0" bIns="0" rtlCol="0" anchor="t">
+            <a:normAutofit/>
+          </a:bodyPr>
+          <a:lstStyle/>
+          <a:p>
+            <a:pPr algn="l" indent="0" marL="0">
+              <a:lnSpc>
+                <a:spcPts val="2240"/>
+              </a:lnSpc>
+              <a:buNone/>
+            </a:pPr>
+            <a:r>
+              <a:rPr lang="en-US" sz="1600" dirty="0">
+                <a:solidFill>
+                  <a:srgbClr val="46566A"/>
+                </a:solidFill>
+                <a:latin typeface="IBM Plex Sans" pitchFamily="34" charset="0"/>
+                <a:ea typeface="IBM Plex Sans" pitchFamily="34" charset="-122"/>
+                <a:cs typeface="IBM Plex Sans" pitchFamily="34" charset="-120"/>
+              </a:rPr>
+              <a:t>Aircraft reconnaissance is costly and limited by weather, and this coast is often fogged in.</a:t>
+            </a:r>
+            <a:endParaRPr lang="en-US" sz="1600" dirty="0"/>
+          </a:p>
+        </p:txBody>
+      </p:sp>
+      <p:sp>
+        <p:nvSpPr>
+          <p:cNvPr id="12" name="Shape 10"/>
+          <p:cNvSpPr/>
+          <p:nvPr/>
+        </p:nvSpPr>
+        <p:spPr>
+          <a:xfrm>
+            <a:off x="7995696" y="1938572"/>
+            <a:ext cx="3380347" cy="3900253"/>
+          </a:xfrm>
+          <a:prstGeom prst="roundRect">
+            <a:avLst>
+              <a:gd name="adj" fmla="val 2912"/>
+            </a:avLst>
+          </a:prstGeom>
+          <a:solidFill>
+            <a:srgbClr val="FBFCFA"/>
+          </a:solidFill>
+          <a:ln w="6350">
+            <a:solidFill>
+              <a:srgbClr val="D5DEE0"/>
+            </a:solidFill>
+            <a:prstDash val="solid"/>
+          </a:ln>
+        </p:spPr>
+      </p:sp>
+      <p:sp>
+        <p:nvSpPr>
+          <p:cNvPr id="13" name="Text 11"/>
+          <p:cNvSpPr/>
+          <p:nvPr/>
+        </p:nvSpPr>
+        <p:spPr>
+          <a:xfrm>
+            <a:off x="8303075" y="2245951"/>
+            <a:ext cx="2848555" cy="238810"/>
+          </a:xfrm>
+          <a:prstGeom prst="rect">
+            <a:avLst/>
+          </a:prstGeom>
+          <a:noFill/>
+          <a:ln/>
+        </p:spPr>
+        <p:txBody>
+          <a:bodyPr wrap="square" lIns="0" tIns="0" rIns="0" bIns="0" rtlCol="0" anchor="t">
+            <a:normAutofit/>
+          </a:bodyPr>
+          <a:lstStyle/>
+          <a:p>
+            <a:pPr algn="l" indent="0" marL="0">
+              <a:lnSpc>
+                <a:spcPts val="1680"/>
+              </a:lnSpc>
+              <a:buNone/>
+            </a:pPr>
+            <a:r>
+              <a:rPr lang="en-US" sz="1200" b="1" dirty="0">
+                <a:solidFill>
+                  <a:srgbClr val="A84B1A"/>
+                </a:solidFill>
+                <a:latin typeface="IBM Plex Sans" pitchFamily="34" charset="0"/>
+                <a:ea typeface="IBM Plex Sans" pitchFamily="34" charset="-122"/>
+                <a:cs typeface="IBM Plex Sans" pitchFamily="34" charset="-120"/>
+              </a:rPr>
+              <a:t>03</a:t>
+            </a:r>
+            <a:endParaRPr lang="en-US" sz="1200" dirty="0"/>
+          </a:p>
+        </p:txBody>
+      </p:sp>
+      <p:sp>
+        <p:nvSpPr>
+          <p:cNvPr id="14" name="Text 12"/>
+          <p:cNvSpPr/>
+          <p:nvPr/>
+        </p:nvSpPr>
+        <p:spPr>
+          <a:xfrm>
+            <a:off x="8303075" y="2586362"/>
+            <a:ext cx="2848555" cy="360669"/>
+          </a:xfrm>
+          <a:prstGeom prst="rect">
+            <a:avLst/>
+          </a:prstGeom>
+          <a:noFill/>
+          <a:ln/>
+        </p:spPr>
+        <p:txBody>
+          <a:bodyPr wrap="square" lIns="0" tIns="0" rIns="0" bIns="0" rtlCol="0" anchor="t">
+            <a:normAutofit/>
+          </a:bodyPr>
+          <a:lstStyle/>
+          <a:p>
+            <a:pPr algn="l" indent="0" marL="0">
+              <a:lnSpc>
+                <a:spcPts val="2640"/>
+              </a:lnSpc>
+              <a:buNone/>
+            </a:pPr>
+            <a:r>
+              <a:rPr lang="en-US" sz="2200" b="1" dirty="0">
+                <a:solidFill>
+                  <a:srgbClr val="0E2233"/>
+                </a:solidFill>
+                <a:latin typeface="Source Serif 4" pitchFamily="18" charset="0"/>
+                <a:ea typeface="Source Serif 4" pitchFamily="18" charset="-122"/>
+                <a:cs typeface="Source Serif 4" pitchFamily="18" charset="-120"/>
+              </a:rPr>
+              <a:t>The idea</a:t>
+            </a:r>
+            <a:endParaRPr lang="en-US" sz="2200" dirty="0"/>
+          </a:p>
+        </p:txBody>
+      </p:sp>
+      <p:sp>
+        <p:nvSpPr>
+          <p:cNvPr id="15" name="Text 13"/>
+          <p:cNvSpPr/>
+          <p:nvPr/>
+        </p:nvSpPr>
+        <p:spPr>
+          <a:xfrm>
+            <a:off x="8303075" y="3048631"/>
+            <a:ext cx="2848555" cy="1163349"/>
+          </a:xfrm>
+          <a:prstGeom prst="rect">
+            <a:avLst/>
+          </a:prstGeom>
+          <a:noFill/>
+          <a:ln/>
+        </p:spPr>
+        <p:txBody>
+          <a:bodyPr wrap="square" lIns="0" tIns="0" rIns="0" bIns="0" rtlCol="0" anchor="t">
+            <a:normAutofit/>
+          </a:bodyPr>
+          <a:lstStyle/>
+          <a:p>
+            <a:pPr algn="l" indent="0" marL="0">
+              <a:lnSpc>
+                <a:spcPts val="2240"/>
+              </a:lnSpc>
+              <a:buNone/>
+            </a:pPr>
+            <a:r>
+              <a:rPr lang="en-US" sz="1600" dirty="0">
+                <a:solidFill>
+                  <a:srgbClr val="46566A"/>
+                </a:solidFill>
+                <a:latin typeface="IBM Plex Sans" pitchFamily="34" charset="0"/>
+                <a:ea typeface="IBM Plex Sans" pitchFamily="34" charset="-122"/>
+                <a:cs typeface="IBM Plex Sans" pitchFamily="34" charset="-120"/>
+              </a:rPr>
+              <a:t>Radar sees through cloud and darkness. A foundation model pretrained on Sentinel-1 can learn to find bergs from a few hundred labels.</a:t>
+            </a:r>
+            <a:endParaRPr lang="en-US" sz="1600" dirty="0"/>
+          </a:p>
+        </p:txBody>
+      </p:sp>
+      <p:sp>
+        <p:nvSpPr>
+          <p:cNvPr id="16" name="Text 14"/>
+          <p:cNvSpPr/>
+          <p:nvPr/>
+        </p:nvSpPr>
+        <p:spPr>
+          <a:xfrm>
+            <a:off x="812782" y="6238242"/>
+            <a:ext cx="4114800" cy="238810"/>
+          </a:xfrm>
+          <a:prstGeom prst="rect">
+            <a:avLst/>
+          </a:prstGeom>
+          <a:noFill/>
+          <a:ln/>
+        </p:spPr>
+        <p:txBody>
+          <a:bodyPr wrap="square" lIns="0" tIns="0" rIns="0" bIns="0" rtlCol="0" anchor="t">
+            <a:normAutofit/>
+          </a:bodyPr>
+          <a:lstStyle/>
+          <a:p>
+            <a:pPr algn="l" indent="0" marL="0">
+              <a:lnSpc>
+                <a:spcPts val="1680"/>
+              </a:lnSpc>
+              <a:buNone/>
+            </a:pPr>
+            <a:r>
+              <a:rPr lang="en-US" sz="1200" dirty="0">
+                <a:solidFill>
+                  <a:srgbClr val="5A6978"/>
+                </a:solidFill>
+                <a:latin typeface="IBM Plex Sans" pitchFamily="34" charset="0"/>
+                <a:ea typeface="IBM Plex Sans" pitchFamily="34" charset="-122"/>
+                <a:cs typeface="IBM Plex Sans" pitchFamily="34" charset="-120"/>
+              </a:rPr>
+              <a:t>Iceberg Alley SAR · Project brief</a:t>
+            </a:r>
+            <a:endParaRPr lang="en-US" sz="1200" dirty="0"/>
+          </a:p>
+        </p:txBody>
+      </p:sp>
+      <p:sp>
+        <p:nvSpPr>
+          <p:cNvPr id="17" name="Text 15"/>
+          <p:cNvSpPr/>
+          <p:nvPr/>
+        </p:nvSpPr>
+        <p:spPr>
+          <a:xfrm>
+            <a:off x="11237976" y="6238242"/>
+            <a:ext cx="146304" cy="238810"/>
+          </a:xfrm>
+          <a:prstGeom prst="rect">
+            <a:avLst/>
+          </a:prstGeom>
+          <a:noFill/>
+          <a:ln/>
+        </p:spPr>
+        <p:txBody>
+          <a:bodyPr wrap="square" lIns="0" tIns="0" rIns="0" bIns="0" rtlCol="0" anchor="t">
+            <a:normAutofit/>
+          </a:bodyPr>
+          <a:lstStyle/>
+          <a:p>
+            <a:pPr algn="r" indent="0" marL="0">
+              <a:lnSpc>
+                <a:spcPts val="1680"/>
+              </a:lnSpc>
+              <a:buNone/>
+            </a:pPr>
+            <a:r>
+              <a:rPr lang="en-US" sz="1200" dirty="0">
+                <a:solidFill>
+                  <a:srgbClr val="5A6978"/>
+                </a:solidFill>
+                <a:latin typeface="IBM Plex Sans" pitchFamily="34" charset="0"/>
+                <a:ea typeface="IBM Plex Sans" pitchFamily="34" charset="-122"/>
+                <a:cs typeface="IBM Plex Sans" pitchFamily="34" charset="-120"/>
+              </a:rPr>
+              <a:t>2</a:t>
+            </a:r>
+            <a:endParaRPr lang="en-US" sz="1200" dirty="0"/>
+          </a:p>
+        </p:txBody>
+      </p:sp>
+    </p:spTree>
+  </p:cSld>
+  <p:clrMapOvr>
+    <a:masterClrMapping/>
+  </p:clrMapOvr>
+</p:sld>
+</file>
+
+<file path=ppt/slides/slide3.xml><?xml version="1.0" encoding="utf-8"?>
+<p:sld xmlns:a="http://schemas.openxmlformats.org/drawingml/2006/main" xmlns:r="http://schemas.openxmlformats.org/officeDocument/2006/relationships" xmlns:p="http://schemas.openxmlformats.org/presentationml/2006/main">
+  <p:cSld name="Slide 3">
+    <p:bg>
+      <p:bgPr>
+        <a:solidFill>
+          <a:srgbClr val="F4F6F3"/>
+        </a:solidFill>
+      </p:bgPr>
+    </p:bg>
+    <p:spTree>
+      <p:nvGrpSpPr>
+        <p:cNvPr id="1" name=""/>
+        <p:cNvGrpSpPr/>
+        <p:nvPr/>
+      </p:nvGrpSpPr>
+      <p:grpSpPr>
+        <a:xfrm>
+          <a:off x="0" y="0"/>
+          <a:ext cx="0" cy="0"/>
+          <a:chOff x="0" y="0"/>
+          <a:chExt cx="0" cy="0"/>
+        </a:xfrm>
+      </p:grpSpPr>
+      <p:sp>
+        <p:nvSpPr>
+          <p:cNvPr id="2" name="Text 0"/>
+          <p:cNvSpPr/>
+          <p:nvPr/>
+        </p:nvSpPr>
+        <p:spPr>
+          <a:xfrm>
+            <a:off x="812782" y="812781"/>
+            <a:ext cx="10883429" cy="238810"/>
+          </a:xfrm>
+          <a:prstGeom prst="rect">
+            <a:avLst/>
+          </a:prstGeom>
+          <a:noFill/>
+          <a:ln/>
+        </p:spPr>
+        <p:txBody>
+          <a:bodyPr wrap="square" lIns="0" tIns="0" rIns="0" bIns="0" rtlCol="0" anchor="t">
+            <a:normAutofit/>
+          </a:bodyPr>
+          <a:lstStyle/>
+          <a:p>
+            <a:pPr algn="l" indent="0" marL="0">
+              <a:lnSpc>
+                <a:spcPts val="1680"/>
+              </a:lnSpc>
+              <a:buNone/>
+            </a:pPr>
+            <a:r>
+              <a:rPr lang="en-US" sz="1200" b="1" spc="200" kern="0" dirty="0">
+                <a:solidFill>
+                  <a:srgbClr val="A84B1A"/>
+                </a:solidFill>
+                <a:latin typeface="IBM Plex Sans" pitchFamily="34" charset="0"/>
+                <a:ea typeface="IBM Plex Sans" pitchFamily="34" charset="-122"/>
+                <a:cs typeface="IBM Plex Sans" pitchFamily="34" charset="-120"/>
+              </a:rPr>
+              <a:t>APPROACH</a:t>
+            </a:r>
+            <a:endParaRPr lang="en-US" sz="1200" dirty="0"/>
+          </a:p>
+        </p:txBody>
+      </p:sp>
+      <p:sp>
+        <p:nvSpPr>
+          <p:cNvPr id="3" name="Text 1"/>
+          <p:cNvSpPr/>
+          <p:nvPr>
+            <p:ph type="title"/>
+          </p:nvPr>
+        </p:nvSpPr>
+        <p:spPr>
+          <a:xfrm>
+            <a:off x="812782" y="1127756"/>
+            <a:ext cx="10883429" cy="528259"/>
+          </a:xfrm>
+          <a:prstGeom prst="rect">
+            <a:avLst/>
+          </a:prstGeom>
+          <a:noFill/>
+          <a:ln/>
+        </p:spPr>
+        <p:txBody>
+          <a:bodyPr wrap="square" lIns="0" tIns="0" rIns="0" bIns="0" rtlCol="0" anchor="t">
+            <a:normAutofit/>
+          </a:bodyPr>
+          <a:lstStyle/>
+          <a:p>
+            <a:pPr algn="l" indent="0" marL="0">
+              <a:lnSpc>
+                <a:spcPts val="3960"/>
+              </a:lnSpc>
+              <a:buNone/>
+            </a:pPr>
+            <a:r>
+              <a:rPr lang="en-US" sz="3600" b="1" i="0" dirty="0">
+                <a:solidFill>
+                  <a:srgbClr val="0E2233"/>
+                </a:solidFill>
+                <a:latin typeface="Source Serif 4" pitchFamily="18" charset="0"/>
+                <a:ea typeface="Source Serif 4" pitchFamily="18" charset="-122"/>
+                <a:cs typeface="Source Serif 4" pitchFamily="18" charset="-120"/>
+              </a:rPr>
+              <a:t>Six steps from raw scene to globe</a:t>
+            </a:r>
+            <a:endParaRPr lang="en-US" sz="3600" dirty="0"/>
+          </a:p>
+        </p:txBody>
+      </p:sp>
+      <p:sp>
+        <p:nvSpPr>
+          <p:cNvPr id="4" name="Shape 2"/>
+          <p:cNvSpPr/>
+          <p:nvPr/>
+        </p:nvSpPr>
+        <p:spPr>
+          <a:xfrm>
+            <a:off x="815957" y="1938572"/>
+            <a:ext cx="1670086" cy="3310984"/>
+          </a:xfrm>
+          <a:prstGeom prst="roundRect">
+            <a:avLst>
+              <a:gd name="adj" fmla="val 4373"/>
+            </a:avLst>
+          </a:prstGeom>
+          <a:solidFill>
+            <a:srgbClr val="FBFCFA"/>
+          </a:solidFill>
+          <a:ln w="6350">
+            <a:solidFill>
+              <a:srgbClr val="D5DEE0"/>
+            </a:solidFill>
+            <a:prstDash val="solid"/>
+          </a:ln>
+        </p:spPr>
+      </p:sp>
+      <p:sp>
+        <p:nvSpPr>
+          <p:cNvPr id="5" name="Text 3"/>
+          <p:cNvSpPr/>
+          <p:nvPr/>
+        </p:nvSpPr>
+        <p:spPr>
+          <a:xfrm>
+            <a:off x="1021683" y="2144297"/>
+            <a:ext cx="1309435" cy="238810"/>
+          </a:xfrm>
+          <a:prstGeom prst="rect">
+            <a:avLst/>
+          </a:prstGeom>
+          <a:noFill/>
+          <a:ln/>
+        </p:spPr>
+        <p:txBody>
+          <a:bodyPr wrap="square" lIns="0" tIns="0" rIns="0" bIns="0" rtlCol="0" anchor="t">
+            <a:normAutofit/>
+          </a:bodyPr>
+          <a:lstStyle/>
+          <a:p>
+            <a:pPr algn="l" indent="0" marL="0">
+              <a:lnSpc>
+                <a:spcPts val="1680"/>
+              </a:lnSpc>
+              <a:buNone/>
+            </a:pPr>
+            <a:r>
+              <a:rPr lang="en-US" sz="1200" b="1" dirty="0">
+                <a:solidFill>
+                  <a:srgbClr val="A84B1A"/>
+                </a:solidFill>
+                <a:latin typeface="IBM Plex Sans" pitchFamily="34" charset="0"/>
+                <a:ea typeface="IBM Plex Sans" pitchFamily="34" charset="-122"/>
+                <a:cs typeface="IBM Plex Sans" pitchFamily="34" charset="-120"/>
+              </a:rPr>
+              <a:t>01</a:t>
+            </a:r>
+            <a:endParaRPr lang="en-US" sz="1200" dirty="0"/>
+          </a:p>
+        </p:txBody>
+      </p:sp>
+      <p:sp>
+        <p:nvSpPr>
+          <p:cNvPr id="6" name="Text 4"/>
+          <p:cNvSpPr/>
+          <p:nvPr/>
+        </p:nvSpPr>
+        <p:spPr>
+          <a:xfrm>
+            <a:off x="1021683" y="2459272"/>
+            <a:ext cx="1309435" cy="269208"/>
+          </a:xfrm>
+          <a:prstGeom prst="rect">
+            <a:avLst/>
+          </a:prstGeom>
+          <a:noFill/>
+          <a:ln/>
+        </p:spPr>
+        <p:txBody>
+          <a:bodyPr wrap="square" lIns="0" tIns="0" rIns="0" bIns="0" rtlCol="0" anchor="t">
+            <a:normAutofit/>
+          </a:bodyPr>
+          <a:lstStyle/>
+          <a:p>
+            <a:pPr algn="l" indent="0" marL="0">
+              <a:lnSpc>
+                <a:spcPts val="1920"/>
+              </a:lnSpc>
+              <a:buNone/>
+            </a:pPr>
+            <a:r>
+              <a:rPr lang="en-US" sz="1600" b="1" dirty="0">
+                <a:solidFill>
+                  <a:srgbClr val="0E2233"/>
+                </a:solidFill>
+                <a:latin typeface="IBM Plex Sans" pitchFamily="34" charset="0"/>
+                <a:ea typeface="IBM Plex Sans" pitchFamily="34" charset="-122"/>
+                <a:cs typeface="IBM Plex Sans" pitchFamily="34" charset="-120"/>
+              </a:rPr>
+              <a:t>Search</a:t>
+            </a:r>
+            <a:endParaRPr lang="en-US" sz="1600" dirty="0"/>
+          </a:p>
+        </p:txBody>
+      </p:sp>
+      <p:sp>
+        <p:nvSpPr>
+          <p:cNvPr id="7" name="Text 5"/>
+          <p:cNvSpPr/>
+          <p:nvPr/>
+        </p:nvSpPr>
+        <p:spPr>
+          <a:xfrm>
+            <a:off x="1021683" y="2804643"/>
+            <a:ext cx="1309435" cy="665632"/>
+          </a:xfrm>
+          <a:prstGeom prst="rect">
+            <a:avLst/>
+          </a:prstGeom>
+          <a:noFill/>
+          <a:ln/>
+        </p:spPr>
+        <p:txBody>
+          <a:bodyPr wrap="square" lIns="0" tIns="0" rIns="0" bIns="0" rtlCol="0" anchor="t">
+            <a:normAutofit/>
+          </a:bodyPr>
+          <a:lstStyle/>
+          <a:p>
+            <a:pPr algn="l" indent="0" marL="0">
+              <a:lnSpc>
+                <a:spcPts val="1680"/>
+              </a:lnSpc>
+              <a:buNone/>
+            </a:pPr>
+            <a:r>
+              <a:rPr lang="en-US" sz="1200" dirty="0">
+                <a:solidFill>
+                  <a:srgbClr val="46566A"/>
+                </a:solidFill>
+                <a:latin typeface="IBM Plex Sans" pitchFamily="34" charset="0"/>
+                <a:ea typeface="IBM Plex Sans" pitchFamily="34" charset="-122"/>
+                <a:cs typeface="IBM Plex Sans" pitchFamily="34" charset="-120"/>
+              </a:rPr>
+              <a:t>ASF search for HH+HV scenes over the AOI</a:t>
+            </a:r>
+            <a:endParaRPr lang="en-US" sz="1200" dirty="0"/>
+          </a:p>
+        </p:txBody>
+      </p:sp>
+      <p:sp>
+        <p:nvSpPr>
+          <p:cNvPr id="8" name="Shape 6"/>
+          <p:cNvSpPr/>
+          <p:nvPr/>
+        </p:nvSpPr>
+        <p:spPr>
+          <a:xfrm>
+            <a:off x="2593957" y="1938572"/>
+            <a:ext cx="1670086" cy="3310984"/>
+          </a:xfrm>
+          <a:prstGeom prst="roundRect">
+            <a:avLst>
+              <a:gd name="adj" fmla="val 4373"/>
+            </a:avLst>
+          </a:prstGeom>
+          <a:solidFill>
+            <a:srgbClr val="FBFCFA"/>
+          </a:solidFill>
+          <a:ln w="6350">
+            <a:solidFill>
+              <a:srgbClr val="D5DEE0"/>
+            </a:solidFill>
+            <a:prstDash val="solid"/>
+          </a:ln>
+        </p:spPr>
+      </p:sp>
+      <p:sp>
+        <p:nvSpPr>
+          <p:cNvPr id="9" name="Text 7"/>
+          <p:cNvSpPr/>
+          <p:nvPr/>
+        </p:nvSpPr>
+        <p:spPr>
+          <a:xfrm>
+            <a:off x="2799682" y="2144297"/>
+            <a:ext cx="1309435" cy="238810"/>
+          </a:xfrm>
+          <a:prstGeom prst="rect">
+            <a:avLst/>
+          </a:prstGeom>
+          <a:noFill/>
+          <a:ln/>
+        </p:spPr>
+        <p:txBody>
+          <a:bodyPr wrap="square" lIns="0" tIns="0" rIns="0" bIns="0" rtlCol="0" anchor="t">
+            <a:normAutofit/>
+          </a:bodyPr>
+          <a:lstStyle/>
+          <a:p>
+            <a:pPr algn="l" indent="0" marL="0">
+              <a:lnSpc>
+                <a:spcPts val="1680"/>
+              </a:lnSpc>
+              <a:buNone/>
+            </a:pPr>
+            <a:r>
+              <a:rPr lang="en-US" sz="1200" b="1" dirty="0">
+                <a:solidFill>
+                  <a:srgbClr val="A84B1A"/>
+                </a:solidFill>
+                <a:latin typeface="IBM Plex Sans" pitchFamily="34" charset="0"/>
+                <a:ea typeface="IBM Plex Sans" pitchFamily="34" charset="-122"/>
+                <a:cs typeface="IBM Plex Sans" pitchFamily="34" charset="-120"/>
+              </a:rPr>
+              <a:t>02</a:t>
+            </a:r>
+            <a:endParaRPr lang="en-US" sz="1200" dirty="0"/>
+          </a:p>
+        </p:txBody>
+      </p:sp>
+      <p:sp>
+        <p:nvSpPr>
+          <p:cNvPr id="10" name="Text 8"/>
+          <p:cNvSpPr/>
+          <p:nvPr/>
+        </p:nvSpPr>
+        <p:spPr>
+          <a:xfrm>
+            <a:off x="2799682" y="2459272"/>
+            <a:ext cx="1309435" cy="269208"/>
+          </a:xfrm>
+          <a:prstGeom prst="rect">
+            <a:avLst/>
+          </a:prstGeom>
+          <a:noFill/>
+          <a:ln/>
+        </p:spPr>
+        <p:txBody>
+          <a:bodyPr wrap="square" lIns="0" tIns="0" rIns="0" bIns="0" rtlCol="0" anchor="t">
+            <a:normAutofit/>
+          </a:bodyPr>
+          <a:lstStyle/>
+          <a:p>
+            <a:pPr algn="l" indent="0" marL="0">
+              <a:lnSpc>
+                <a:spcPts val="1920"/>
+              </a:lnSpc>
+              <a:buNone/>
+            </a:pPr>
+            <a:r>
+              <a:rPr lang="en-US" sz="1600" b="1" dirty="0">
+                <a:solidFill>
+                  <a:srgbClr val="0E2233"/>
+                </a:solidFill>
+                <a:latin typeface="IBM Plex Sans" pitchFamily="34" charset="0"/>
+                <a:ea typeface="IBM Plex Sans" pitchFamily="34" charset="-122"/>
+                <a:cs typeface="IBM Plex Sans" pitchFamily="34" charset="-120"/>
+              </a:rPr>
+              <a:t>Calibrate</a:t>
+            </a:r>
+            <a:endParaRPr lang="en-US" sz="1600" dirty="0"/>
+          </a:p>
+        </p:txBody>
+      </p:sp>
+      <p:sp>
+        <p:nvSpPr>
+          <p:cNvPr id="11" name="Text 9"/>
+          <p:cNvSpPr/>
+          <p:nvPr/>
+        </p:nvSpPr>
+        <p:spPr>
+          <a:xfrm>
+            <a:off x="2799682" y="2804643"/>
+            <a:ext cx="1309435" cy="879042"/>
+          </a:xfrm>
+          <a:prstGeom prst="rect">
+            <a:avLst/>
+          </a:prstGeom>
+          <a:noFill/>
+          <a:ln/>
+        </p:spPr>
+        <p:txBody>
+          <a:bodyPr wrap="square" lIns="0" tIns="0" rIns="0" bIns="0" rtlCol="0" anchor="t">
+            <a:normAutofit/>
+          </a:bodyPr>
+          <a:lstStyle/>
+          <a:p>
+            <a:pPr algn="l" indent="0" marL="0">
+              <a:lnSpc>
+                <a:spcPts val="1680"/>
+              </a:lnSpc>
+              <a:buNone/>
+            </a:pPr>
+            <a:r>
+              <a:rPr lang="en-US" sz="1200" dirty="0">
+                <a:solidFill>
+                  <a:srgbClr val="46566A"/>
+                </a:solidFill>
+                <a:latin typeface="IBM Plex Sans" pitchFamily="34" charset="0"/>
+                <a:ea typeface="IBM Plex Sans" pitchFamily="34" charset="-122"/>
+                <a:cs typeface="IBM Plex Sans" pitchFamily="34" charset="-120"/>
+              </a:rPr>
+              <a:t>HyP3 terrain correction to 10 m, sigma0 for THOR</a:t>
+            </a:r>
+            <a:endParaRPr lang="en-US" sz="1200" dirty="0"/>
+          </a:p>
+        </p:txBody>
+      </p:sp>
+      <p:sp>
+        <p:nvSpPr>
+          <p:cNvPr id="12" name="Shape 10"/>
+          <p:cNvSpPr/>
+          <p:nvPr/>
+        </p:nvSpPr>
+        <p:spPr>
+          <a:xfrm>
+            <a:off x="4371957" y="1938572"/>
+            <a:ext cx="1670086" cy="3310984"/>
+          </a:xfrm>
+          <a:prstGeom prst="roundRect">
+            <a:avLst>
+              <a:gd name="adj" fmla="val 4373"/>
+            </a:avLst>
+          </a:prstGeom>
+          <a:solidFill>
+            <a:srgbClr val="FBFCFA"/>
+          </a:solidFill>
+          <a:ln w="6350">
+            <a:solidFill>
+              <a:srgbClr val="D5DEE0"/>
+            </a:solidFill>
+            <a:prstDash val="solid"/>
+          </a:ln>
+        </p:spPr>
+      </p:sp>
+      <p:sp>
+        <p:nvSpPr>
+          <p:cNvPr id="13" name="Text 11"/>
+          <p:cNvSpPr/>
+          <p:nvPr/>
+        </p:nvSpPr>
+        <p:spPr>
+          <a:xfrm>
+            <a:off x="4577682" y="2144297"/>
+            <a:ext cx="1309435" cy="238810"/>
+          </a:xfrm>
+          <a:prstGeom prst="rect">
+            <a:avLst/>
+          </a:prstGeom>
+          <a:noFill/>
+          <a:ln/>
+        </p:spPr>
+        <p:txBody>
+          <a:bodyPr wrap="square" lIns="0" tIns="0" rIns="0" bIns="0" rtlCol="0" anchor="t">
+            <a:normAutofit/>
+          </a:bodyPr>
+          <a:lstStyle/>
+          <a:p>
+            <a:pPr algn="l" indent="0" marL="0">
+              <a:lnSpc>
+                <a:spcPts val="1680"/>
+              </a:lnSpc>
+              <a:buNone/>
+            </a:pPr>
+            <a:r>
+              <a:rPr lang="en-US" sz="1200" b="1" dirty="0">
+                <a:solidFill>
+                  <a:srgbClr val="A84B1A"/>
+                </a:solidFill>
+                <a:latin typeface="IBM Plex Sans" pitchFamily="34" charset="0"/>
+                <a:ea typeface="IBM Plex Sans" pitchFamily="34" charset="-122"/>
+                <a:cs typeface="IBM Plex Sans" pitchFamily="34" charset="-120"/>
+              </a:rPr>
+              <a:t>03</a:t>
+            </a:r>
+            <a:endParaRPr lang="en-US" sz="1200" dirty="0"/>
+          </a:p>
+        </p:txBody>
+      </p:sp>
+      <p:sp>
+        <p:nvSpPr>
+          <p:cNvPr id="14" name="Text 12"/>
+          <p:cNvSpPr/>
+          <p:nvPr/>
+        </p:nvSpPr>
+        <p:spPr>
+          <a:xfrm>
+            <a:off x="4577682" y="2459272"/>
+            <a:ext cx="1309435" cy="269208"/>
+          </a:xfrm>
+          <a:prstGeom prst="rect">
+            <a:avLst/>
+          </a:prstGeom>
+          <a:noFill/>
+          <a:ln/>
+        </p:spPr>
+        <p:txBody>
+          <a:bodyPr wrap="square" lIns="0" tIns="0" rIns="0" bIns="0" rtlCol="0" anchor="t">
+            <a:normAutofit/>
+          </a:bodyPr>
+          <a:lstStyle/>
+          <a:p>
+            <a:pPr algn="l" indent="0" marL="0">
+              <a:lnSpc>
+                <a:spcPts val="1920"/>
+              </a:lnSpc>
+              <a:buNone/>
+            </a:pPr>
+            <a:r>
+              <a:rPr lang="en-US" sz="1600" b="1" dirty="0">
+                <a:solidFill>
+                  <a:srgbClr val="0E2233"/>
+                </a:solidFill>
+                <a:latin typeface="IBM Plex Sans" pitchFamily="34" charset="0"/>
+                <a:ea typeface="IBM Plex Sans" pitchFamily="34" charset="-122"/>
+                <a:cs typeface="IBM Plex Sans" pitchFamily="34" charset="-120"/>
+              </a:rPr>
+              <a:t>Mask</a:t>
+            </a:r>
+            <a:endParaRPr lang="en-US" sz="1600" dirty="0"/>
+          </a:p>
+        </p:txBody>
+      </p:sp>
+      <p:sp>
+        <p:nvSpPr>
+          <p:cNvPr id="15" name="Text 13"/>
+          <p:cNvSpPr/>
+          <p:nvPr/>
+        </p:nvSpPr>
+        <p:spPr>
+          <a:xfrm>
+            <a:off x="4577682" y="2804643"/>
+            <a:ext cx="1309435" cy="879042"/>
+          </a:xfrm>
+          <a:prstGeom prst="rect">
+            <a:avLst/>
+          </a:prstGeom>
+          <a:noFill/>
+          <a:ln/>
+        </p:spPr>
+        <p:txBody>
+          <a:bodyPr wrap="square" lIns="0" tIns="0" rIns="0" bIns="0" rtlCol="0" anchor="t">
+            <a:normAutofit/>
+          </a:bodyPr>
+          <a:lstStyle/>
+          <a:p>
+            <a:pPr algn="l" indent="0" marL="0">
+              <a:lnSpc>
+                <a:spcPts val="1680"/>
+              </a:lnSpc>
+              <a:buNone/>
+            </a:pPr>
+            <a:r>
+              <a:rPr lang="en-US" sz="1200" dirty="0">
+                <a:solidFill>
+                  <a:srgbClr val="46566A"/>
+                </a:solidFill>
+                <a:latin typeface="IBM Plex Sans" pitchFamily="34" charset="0"/>
+                <a:ea typeface="IBM Plex Sans" pitchFamily="34" charset="-122"/>
+                <a:cs typeface="IBM Plex Sans" pitchFamily="34" charset="-120"/>
+              </a:rPr>
+              <a:t>Land plus 500 m from OSM; pack ice from HV texture</a:t>
+            </a:r>
+            <a:endParaRPr lang="en-US" sz="1200" dirty="0"/>
+          </a:p>
+        </p:txBody>
+      </p:sp>
+      <p:sp>
+        <p:nvSpPr>
+          <p:cNvPr id="16" name="Shape 14"/>
+          <p:cNvSpPr/>
+          <p:nvPr/>
+        </p:nvSpPr>
+        <p:spPr>
+          <a:xfrm>
+            <a:off x="6149957" y="1938572"/>
+            <a:ext cx="1670086" cy="3310984"/>
+          </a:xfrm>
+          <a:prstGeom prst="roundRect">
+            <a:avLst>
+              <a:gd name="adj" fmla="val 4373"/>
+            </a:avLst>
+          </a:prstGeom>
+          <a:solidFill>
+            <a:srgbClr val="FBFCFA"/>
+          </a:solidFill>
+          <a:ln w="6350">
+            <a:solidFill>
+              <a:srgbClr val="D5DEE0"/>
+            </a:solidFill>
+            <a:prstDash val="solid"/>
+          </a:ln>
+        </p:spPr>
+      </p:sp>
+      <p:sp>
+        <p:nvSpPr>
+          <p:cNvPr id="17" name="Text 15"/>
+          <p:cNvSpPr/>
+          <p:nvPr/>
+        </p:nvSpPr>
+        <p:spPr>
+          <a:xfrm>
+            <a:off x="6355682" y="2144297"/>
+            <a:ext cx="1309435" cy="238810"/>
+          </a:xfrm>
+          <a:prstGeom prst="rect">
+            <a:avLst/>
+          </a:prstGeom>
+          <a:noFill/>
+          <a:ln/>
+        </p:spPr>
+        <p:txBody>
+          <a:bodyPr wrap="square" lIns="0" tIns="0" rIns="0" bIns="0" rtlCol="0" anchor="t">
+            <a:normAutofit/>
+          </a:bodyPr>
+          <a:lstStyle/>
+          <a:p>
+            <a:pPr algn="l" indent="0" marL="0">
+              <a:lnSpc>
+                <a:spcPts val="1680"/>
+              </a:lnSpc>
+              <a:buNone/>
+            </a:pPr>
+            <a:r>
+              <a:rPr lang="en-US" sz="1200" b="1" dirty="0">
+                <a:solidFill>
+                  <a:srgbClr val="A84B1A"/>
+                </a:solidFill>
+                <a:latin typeface="IBM Plex Sans" pitchFamily="34" charset="0"/>
+                <a:ea typeface="IBM Plex Sans" pitchFamily="34" charset="-122"/>
+                <a:cs typeface="IBM Plex Sans" pitchFamily="34" charset="-120"/>
+              </a:rPr>
+              <a:t>04</a:t>
+            </a:r>
+            <a:endParaRPr lang="en-US" sz="1200" dirty="0"/>
+          </a:p>
+        </p:txBody>
+      </p:sp>
+      <p:sp>
+        <p:nvSpPr>
+          <p:cNvPr id="18" name="Text 16"/>
+          <p:cNvSpPr/>
+          <p:nvPr/>
+        </p:nvSpPr>
+        <p:spPr>
+          <a:xfrm>
+            <a:off x="6355682" y="2459272"/>
+            <a:ext cx="1309435" cy="269208"/>
+          </a:xfrm>
+          <a:prstGeom prst="rect">
+            <a:avLst/>
+          </a:prstGeom>
+          <a:noFill/>
+          <a:ln/>
+        </p:spPr>
+        <p:txBody>
+          <a:bodyPr wrap="square" lIns="0" tIns="0" rIns="0" bIns="0" rtlCol="0" anchor="t">
+            <a:normAutofit/>
+          </a:bodyPr>
+          <a:lstStyle/>
+          <a:p>
+            <a:pPr algn="l" indent="0" marL="0">
+              <a:lnSpc>
+                <a:spcPts val="1920"/>
+              </a:lnSpc>
+              <a:buNone/>
+            </a:pPr>
+            <a:r>
+              <a:rPr lang="en-US" sz="1600" b="1" dirty="0">
+                <a:solidFill>
+                  <a:srgbClr val="0E2233"/>
+                </a:solidFill>
+                <a:latin typeface="IBM Plex Sans" pitchFamily="34" charset="0"/>
+                <a:ea typeface="IBM Plex Sans" pitchFamily="34" charset="-122"/>
+                <a:cs typeface="IBM Plex Sans" pitchFamily="34" charset="-120"/>
+              </a:rPr>
+              <a:t>Detect</a:t>
+            </a:r>
+            <a:endParaRPr lang="en-US" sz="1600" dirty="0"/>
+          </a:p>
+        </p:txBody>
+      </p:sp>
+      <p:sp>
+        <p:nvSpPr>
+          <p:cNvPr id="19" name="Text 17"/>
+          <p:cNvSpPr/>
+          <p:nvPr/>
+        </p:nvSpPr>
+        <p:spPr>
+          <a:xfrm>
+            <a:off x="6355682" y="2804643"/>
+            <a:ext cx="1309435" cy="879042"/>
+          </a:xfrm>
+          <a:prstGeom prst="rect">
+            <a:avLst/>
+          </a:prstGeom>
+          <a:noFill/>
+          <a:ln/>
+        </p:spPr>
+        <p:txBody>
+          <a:bodyPr wrap="square" lIns="0" tIns="0" rIns="0" bIns="0" rtlCol="0" anchor="t">
+            <a:normAutofit/>
+          </a:bodyPr>
+          <a:lstStyle/>
+          <a:p>
+            <a:pPr algn="l" indent="0" marL="0">
+              <a:lnSpc>
+                <a:spcPts val="1680"/>
+              </a:lnSpc>
+              <a:buNone/>
+            </a:pPr>
+            <a:r>
+              <a:rPr lang="en-US" sz="1200" dirty="0">
+                <a:solidFill>
+                  <a:srgbClr val="46566A"/>
+                </a:solidFill>
+                <a:latin typeface="IBM Plex Sans" pitchFamily="34" charset="0"/>
+                <a:ea typeface="IBM Plex Sans" pitchFamily="34" charset="-122"/>
+                <a:cs typeface="IBM Plex Sans" pitchFamily="34" charset="-120"/>
+              </a:rPr>
+              <a:t>THOR: frozen encoder + 769-parameter head</a:t>
+            </a:r>
+            <a:endParaRPr lang="en-US" sz="1200" dirty="0"/>
+          </a:p>
+        </p:txBody>
+      </p:sp>
+      <p:sp>
+        <p:nvSpPr>
+          <p:cNvPr id="20" name="Shape 18"/>
+          <p:cNvSpPr/>
+          <p:nvPr/>
+        </p:nvSpPr>
+        <p:spPr>
+          <a:xfrm>
+            <a:off x="7927956" y="1938572"/>
+            <a:ext cx="1670086" cy="3310984"/>
+          </a:xfrm>
+          <a:prstGeom prst="roundRect">
+            <a:avLst>
+              <a:gd name="adj" fmla="val 4373"/>
+            </a:avLst>
+          </a:prstGeom>
+          <a:solidFill>
+            <a:srgbClr val="FBFCFA"/>
+          </a:solidFill>
+          <a:ln w="6350">
+            <a:solidFill>
+              <a:srgbClr val="D5DEE0"/>
+            </a:solidFill>
+            <a:prstDash val="solid"/>
+          </a:ln>
+        </p:spPr>
+      </p:sp>
+      <p:sp>
+        <p:nvSpPr>
+          <p:cNvPr id="21" name="Text 19"/>
+          <p:cNvSpPr/>
+          <p:nvPr/>
+        </p:nvSpPr>
+        <p:spPr>
+          <a:xfrm>
+            <a:off x="8133683" y="2144297"/>
+            <a:ext cx="1309435" cy="238810"/>
+          </a:xfrm>
+          <a:prstGeom prst="rect">
+            <a:avLst/>
+          </a:prstGeom>
+          <a:noFill/>
+          <a:ln/>
+        </p:spPr>
+        <p:txBody>
+          <a:bodyPr wrap="square" lIns="0" tIns="0" rIns="0" bIns="0" rtlCol="0" anchor="t">
+            <a:normAutofit/>
+          </a:bodyPr>
+          <a:lstStyle/>
+          <a:p>
+            <a:pPr algn="l" indent="0" marL="0">
+              <a:lnSpc>
+                <a:spcPts val="1680"/>
+              </a:lnSpc>
+              <a:buNone/>
+            </a:pPr>
+            <a:r>
+              <a:rPr lang="en-US" sz="1200" b="1" dirty="0">
+                <a:solidFill>
+                  <a:srgbClr val="A84B1A"/>
+                </a:solidFill>
+                <a:latin typeface="IBM Plex Sans" pitchFamily="34" charset="0"/>
+                <a:ea typeface="IBM Plex Sans" pitchFamily="34" charset="-122"/>
+                <a:cs typeface="IBM Plex Sans" pitchFamily="34" charset="-120"/>
+              </a:rPr>
+              <a:t>05</a:t>
+            </a:r>
+            <a:endParaRPr lang="en-US" sz="1200" dirty="0"/>
+          </a:p>
+        </p:txBody>
+      </p:sp>
+      <p:sp>
+        <p:nvSpPr>
+          <p:cNvPr id="22" name="Text 20"/>
+          <p:cNvSpPr/>
+          <p:nvPr/>
+        </p:nvSpPr>
+        <p:spPr>
+          <a:xfrm>
+            <a:off x="8133683" y="2459272"/>
+            <a:ext cx="1309435" cy="269208"/>
+          </a:xfrm>
+          <a:prstGeom prst="rect">
+            <a:avLst/>
+          </a:prstGeom>
+          <a:noFill/>
+          <a:ln/>
+        </p:spPr>
+        <p:txBody>
+          <a:bodyPr wrap="square" lIns="0" tIns="0" rIns="0" bIns="0" rtlCol="0" anchor="t">
+            <a:normAutofit/>
+          </a:bodyPr>
+          <a:lstStyle/>
+          <a:p>
+            <a:pPr algn="l" indent="0" marL="0">
+              <a:lnSpc>
+                <a:spcPts val="1920"/>
+              </a:lnSpc>
+              <a:buNone/>
+            </a:pPr>
+            <a:r>
+              <a:rPr lang="en-US" sz="1600" b="1" dirty="0">
+                <a:solidFill>
+                  <a:srgbClr val="0E2233"/>
+                </a:solidFill>
+                <a:latin typeface="IBM Plex Sans" pitchFamily="34" charset="0"/>
+                <a:ea typeface="IBM Plex Sans" pitchFamily="34" charset="-122"/>
+                <a:cs typeface="IBM Plex Sans" pitchFamily="34" charset="-120"/>
+              </a:rPr>
+              <a:t>Baseline</a:t>
+            </a:r>
+            <a:endParaRPr lang="en-US" sz="1600" dirty="0"/>
+          </a:p>
+        </p:txBody>
+      </p:sp>
+      <p:sp>
+        <p:nvSpPr>
+          <p:cNvPr id="23" name="Text 21"/>
+          <p:cNvSpPr/>
+          <p:nvPr/>
+        </p:nvSpPr>
+        <p:spPr>
+          <a:xfrm>
+            <a:off x="8133683" y="2804643"/>
+            <a:ext cx="1309435" cy="665632"/>
+          </a:xfrm>
+          <a:prstGeom prst="rect">
+            <a:avLst/>
+          </a:prstGeom>
+          <a:noFill/>
+          <a:ln/>
+        </p:spPr>
+        <p:txBody>
+          <a:bodyPr wrap="square" lIns="0" tIns="0" rIns="0" bIns="0" rtlCol="0" anchor="t">
+            <a:normAutofit/>
+          </a:bodyPr>
+          <a:lstStyle/>
+          <a:p>
+            <a:pPr algn="l" indent="0" marL="0">
+              <a:lnSpc>
+                <a:spcPts val="1680"/>
+              </a:lnSpc>
+              <a:buNone/>
+            </a:pPr>
+            <a:r>
+              <a:rPr lang="en-US" sz="1200" dirty="0">
+                <a:solidFill>
+                  <a:srgbClr val="46566A"/>
+                </a:solidFill>
+                <a:latin typeface="IBM Plex Sans" pitchFamily="34" charset="0"/>
+                <a:ea typeface="IBM Plex Sans" pitchFamily="34" charset="-122"/>
+                <a:cs typeface="IBM Plex Sans" pitchFamily="34" charset="-120"/>
+              </a:rPr>
+              <a:t>CA-CFAR on HV, same masks, same output</a:t>
+            </a:r>
+            <a:endParaRPr lang="en-US" sz="1200" dirty="0"/>
+          </a:p>
+        </p:txBody>
+      </p:sp>
+      <p:sp>
+        <p:nvSpPr>
+          <p:cNvPr id="24" name="Shape 22"/>
+          <p:cNvSpPr/>
+          <p:nvPr/>
+        </p:nvSpPr>
+        <p:spPr>
+          <a:xfrm>
+            <a:off x="9705956" y="1938572"/>
+            <a:ext cx="1670086" cy="3310984"/>
+          </a:xfrm>
+          <a:prstGeom prst="roundRect">
+            <a:avLst>
+              <a:gd name="adj" fmla="val 4373"/>
+            </a:avLst>
+          </a:prstGeom>
+          <a:solidFill>
+            <a:srgbClr val="FBFCFA"/>
+          </a:solidFill>
+          <a:ln w="6350">
+            <a:solidFill>
+              <a:srgbClr val="D5DEE0"/>
+            </a:solidFill>
+            <a:prstDash val="solid"/>
+          </a:ln>
+        </p:spPr>
+      </p:sp>
+      <p:sp>
+        <p:nvSpPr>
+          <p:cNvPr id="25" name="Text 23"/>
+          <p:cNvSpPr/>
+          <p:nvPr/>
+        </p:nvSpPr>
+        <p:spPr>
+          <a:xfrm>
+            <a:off x="9911682" y="2144297"/>
+            <a:ext cx="1309435" cy="238810"/>
+          </a:xfrm>
+          <a:prstGeom prst="rect">
+            <a:avLst/>
+          </a:prstGeom>
+          <a:noFill/>
+          <a:ln/>
+        </p:spPr>
+        <p:txBody>
+          <a:bodyPr wrap="square" lIns="0" tIns="0" rIns="0" bIns="0" rtlCol="0" anchor="t">
+            <a:normAutofit/>
+          </a:bodyPr>
+          <a:lstStyle/>
+          <a:p>
+            <a:pPr algn="l" indent="0" marL="0">
+              <a:lnSpc>
+                <a:spcPts val="1680"/>
+              </a:lnSpc>
+              <a:buNone/>
+            </a:pPr>
+            <a:r>
+              <a:rPr lang="en-US" sz="1200" b="1" dirty="0">
+                <a:solidFill>
+                  <a:srgbClr val="A84B1A"/>
+                </a:solidFill>
+                <a:latin typeface="IBM Plex Sans" pitchFamily="34" charset="0"/>
+                <a:ea typeface="IBM Plex Sans" pitchFamily="34" charset="-122"/>
+                <a:cs typeface="IBM Plex Sans" pitchFamily="34" charset="-120"/>
+              </a:rPr>
+              <a:t>06</a:t>
+            </a:r>
+            <a:endParaRPr lang="en-US" sz="1200" dirty="0"/>
+          </a:p>
+        </p:txBody>
+      </p:sp>
+      <p:sp>
+        <p:nvSpPr>
+          <p:cNvPr id="26" name="Text 24"/>
+          <p:cNvSpPr/>
+          <p:nvPr/>
+        </p:nvSpPr>
+        <p:spPr>
+          <a:xfrm>
+            <a:off x="9911682" y="2459272"/>
+            <a:ext cx="1309435" cy="269208"/>
+          </a:xfrm>
+          <a:prstGeom prst="rect">
+            <a:avLst/>
+          </a:prstGeom>
+          <a:noFill/>
+          <a:ln/>
+        </p:spPr>
+        <p:txBody>
+          <a:bodyPr wrap="square" lIns="0" tIns="0" rIns="0" bIns="0" rtlCol="0" anchor="t">
+            <a:normAutofit/>
+          </a:bodyPr>
+          <a:lstStyle/>
+          <a:p>
+            <a:pPr algn="l" indent="0" marL="0">
+              <a:lnSpc>
+                <a:spcPts val="1920"/>
+              </a:lnSpc>
+              <a:buNone/>
+            </a:pPr>
+            <a:r>
+              <a:rPr lang="en-US" sz="1600" b="1" dirty="0">
+                <a:solidFill>
+                  <a:srgbClr val="0E2233"/>
+                </a:solidFill>
+                <a:latin typeface="IBM Plex Sans" pitchFamily="34" charset="0"/>
+                <a:ea typeface="IBM Plex Sans" pitchFamily="34" charset="-122"/>
+                <a:cs typeface="IBM Plex Sans" pitchFamily="34" charset="-120"/>
+              </a:rPr>
+              <a:t>Publish</a:t>
+            </a:r>
+            <a:endParaRPr lang="en-US" sz="1600" dirty="0"/>
+          </a:p>
+        </p:txBody>
+      </p:sp>
+      <p:sp>
+        <p:nvSpPr>
+          <p:cNvPr id="27" name="Text 25"/>
+          <p:cNvSpPr/>
+          <p:nvPr/>
+        </p:nvSpPr>
+        <p:spPr>
+          <a:xfrm>
+            <a:off x="9911682" y="2804643"/>
+            <a:ext cx="1309435" cy="879042"/>
+          </a:xfrm>
+          <a:prstGeom prst="rect">
+            <a:avLst/>
+          </a:prstGeom>
+          <a:noFill/>
+          <a:ln/>
+        </p:spPr>
+        <p:txBody>
+          <a:bodyPr wrap="square" lIns="0" tIns="0" rIns="0" bIns="0" rtlCol="0" anchor="t">
+            <a:normAutofit/>
+          </a:bodyPr>
+          <a:lstStyle/>
+          <a:p>
+            <a:pPr algn="l" indent="0" marL="0">
+              <a:lnSpc>
+                <a:spcPts val="1680"/>
+              </a:lnSpc>
+              <a:buNone/>
+            </a:pPr>
+            <a:r>
+              <a:rPr lang="en-US" sz="1200" dirty="0">
+                <a:solidFill>
+                  <a:srgbClr val="46566A"/>
+                </a:solidFill>
+                <a:latin typeface="IBM Plex Sans" pitchFamily="34" charset="0"/>
+                <a:ea typeface="IBM Plex Sans" pitchFamily="34" charset="-122"/>
+                <a:cs typeface="IBM Plex Sans" pitchFamily="34" charset="-120"/>
+              </a:rPr>
+              <a:t>GeoJSON and CZML, published to a live web viewer</a:t>
+            </a:r>
+            <a:endParaRPr lang="en-US" sz="1200" dirty="0"/>
+          </a:p>
+        </p:txBody>
+      </p:sp>
+      <p:sp>
+        <p:nvSpPr>
+          <p:cNvPr id="28" name="Text 26"/>
+          <p:cNvSpPr/>
+          <p:nvPr/>
+        </p:nvSpPr>
+        <p:spPr>
+          <a:xfrm>
+            <a:off x="812782" y="5557512"/>
+            <a:ext cx="11379218" cy="309887"/>
+          </a:xfrm>
+          <a:prstGeom prst="rect">
+            <a:avLst/>
+          </a:prstGeom>
+          <a:noFill/>
+          <a:ln/>
+        </p:spPr>
+        <p:txBody>
+          <a:bodyPr wrap="square" lIns="0" tIns="0" rIns="0" bIns="0" rtlCol="0" anchor="t">
+            <a:normAutofit/>
+          </a:bodyPr>
+          <a:lstStyle/>
+          <a:p>
+            <a:pPr algn="l" indent="0" marL="0">
+              <a:lnSpc>
+                <a:spcPts val="2240"/>
+              </a:lnSpc>
+              <a:buNone/>
+            </a:pPr>
+            <a:r>
+              <a:rPr lang="en-US" sz="1600" dirty="0">
+                <a:solidFill>
+                  <a:srgbClr val="46566A"/>
+                </a:solidFill>
+                <a:latin typeface="IBM Plex Sans" pitchFamily="34" charset="0"/>
+                <a:ea typeface="IBM Plex Sans" pitchFamily="34" charset="-122"/>
+                <a:cs typeface="IBM Plex Sans" pitchFamily="34" charset="-120"/>
+              </a:rPr>
+              <a:t>THOR and the CFAR share the masks and the output schema, so both run through one validation and one viewer.</a:t>
+            </a:r>
+            <a:endParaRPr lang="en-US" sz="1600" dirty="0"/>
+          </a:p>
+        </p:txBody>
+      </p:sp>
+      <p:sp>
+        <p:nvSpPr>
+          <p:cNvPr id="29" name="Text 27"/>
+          <p:cNvSpPr/>
+          <p:nvPr/>
+        </p:nvSpPr>
+        <p:spPr>
+          <a:xfrm>
+            <a:off x="812782" y="6238242"/>
+            <a:ext cx="4114800" cy="238810"/>
+          </a:xfrm>
+          <a:prstGeom prst="rect">
+            <a:avLst/>
+          </a:prstGeom>
+          <a:noFill/>
+          <a:ln/>
+        </p:spPr>
+        <p:txBody>
+          <a:bodyPr wrap="square" lIns="0" tIns="0" rIns="0" bIns="0" rtlCol="0" anchor="t">
+            <a:normAutofit/>
+          </a:bodyPr>
+          <a:lstStyle/>
+          <a:p>
+            <a:pPr algn="l" indent="0" marL="0">
+              <a:lnSpc>
+                <a:spcPts val="1680"/>
+              </a:lnSpc>
+              <a:buNone/>
+            </a:pPr>
+            <a:r>
+              <a:rPr lang="en-US" sz="1200" dirty="0">
+                <a:solidFill>
+                  <a:srgbClr val="5A6978"/>
+                </a:solidFill>
+                <a:latin typeface="IBM Plex Sans" pitchFamily="34" charset="0"/>
+                <a:ea typeface="IBM Plex Sans" pitchFamily="34" charset="-122"/>
+                <a:cs typeface="IBM Plex Sans" pitchFamily="34" charset="-120"/>
+              </a:rPr>
+              <a:t>Iceberg Alley SAR · Project brief</a:t>
+            </a:r>
+            <a:endParaRPr lang="en-US" sz="1200" dirty="0"/>
+          </a:p>
+        </p:txBody>
+      </p:sp>
+      <p:sp>
+        <p:nvSpPr>
+          <p:cNvPr id="30" name="Text 28"/>
+          <p:cNvSpPr/>
+          <p:nvPr/>
+        </p:nvSpPr>
+        <p:spPr>
+          <a:xfrm>
+            <a:off x="11237976" y="6238242"/>
+            <a:ext cx="146304" cy="238810"/>
+          </a:xfrm>
+          <a:prstGeom prst="rect">
+            <a:avLst/>
+          </a:prstGeom>
+          <a:noFill/>
+          <a:ln/>
+        </p:spPr>
+        <p:txBody>
+          <a:bodyPr wrap="square" lIns="0" tIns="0" rIns="0" bIns="0" rtlCol="0" anchor="t">
+            <a:normAutofit/>
+          </a:bodyPr>
+          <a:lstStyle/>
+          <a:p>
+            <a:pPr algn="r" indent="0" marL="0">
+              <a:lnSpc>
+                <a:spcPts val="1680"/>
+              </a:lnSpc>
+              <a:buNone/>
+            </a:pPr>
+            <a:r>
+              <a:rPr lang="en-US" sz="1200" dirty="0">
+                <a:solidFill>
+                  <a:srgbClr val="5A6978"/>
+                </a:solidFill>
+                <a:latin typeface="IBM Plex Sans" pitchFamily="34" charset="0"/>
+                <a:ea typeface="IBM Plex Sans" pitchFamily="34" charset="-122"/>
+                <a:cs typeface="IBM Plex Sans" pitchFamily="34" charset="-120"/>
+              </a:rPr>
+              <a:t>4</a:t>
+            </a:r>
+            <a:endParaRPr lang="en-US" sz="1200" dirty="0"/>
+          </a:p>
+        </p:txBody>
+      </p:sp>
+    </p:spTree>
+  </p:cSld>
+  <p:clrMapOvr>
+    <a:masterClrMapping/>
+  </p:clrMapOvr>
+</p:sld>
+</file>
+
+<file path=ppt/slides/slide4.xml><?xml version="1.0" encoding="utf-8"?>
+<p:sld xmlns:a="http://schemas.openxmlformats.org/drawingml/2006/main" xmlns:r="http://schemas.openxmlformats.org/officeDocument/2006/relationships" xmlns:p="http://schemas.openxmlformats.org/presentationml/2006/main">
+  <p:cSld name="Slide 4">
+    <p:bg>
+      <p:bgPr>
+        <a:solidFill>
+          <a:srgbClr val="E4ECEE"/>
+        </a:solidFill>
+      </p:bgPr>
+    </p:bg>
+    <p:spTree>
+      <p:nvGrpSpPr>
+        <p:cNvPr id="1" name=""/>
+        <p:cNvGrpSpPr/>
+        <p:nvPr/>
+      </p:nvGrpSpPr>
+      <p:grpSpPr>
+        <a:xfrm>
+          <a:off x="0" y="0"/>
+          <a:ext cx="0" cy="0"/>
+          <a:chOff x="0" y="0"/>
+          <a:chExt cx="0" cy="0"/>
+        </a:xfrm>
+      </p:grpSpPr>
+      <p:sp>
+        <p:nvSpPr>
+          <p:cNvPr id="2" name="Text 0"/>
+          <p:cNvSpPr/>
+          <p:nvPr/>
+        </p:nvSpPr>
+        <p:spPr>
+          <a:xfrm>
+            <a:off x="812782" y="812781"/>
+            <a:ext cx="10883429" cy="238810"/>
+          </a:xfrm>
+          <a:prstGeom prst="rect">
+            <a:avLst/>
+          </a:prstGeom>
+          <a:noFill/>
+          <a:ln/>
+        </p:spPr>
+        <p:txBody>
+          <a:bodyPr wrap="square" lIns="0" tIns="0" rIns="0" bIns="0" rtlCol="0" anchor="t">
+            <a:normAutofit/>
+          </a:bodyPr>
+          <a:lstStyle/>
+          <a:p>
+            <a:pPr algn="l" indent="0" marL="0">
+              <a:lnSpc>
+                <a:spcPts val="1680"/>
+              </a:lnSpc>
+              <a:buNone/>
+            </a:pPr>
+            <a:r>
+              <a:rPr lang="en-US" sz="1200" b="1" spc="200" kern="0" dirty="0">
+                <a:solidFill>
+                  <a:srgbClr val="A84B1A"/>
+                </a:solidFill>
+                <a:latin typeface="IBM Plex Sans" pitchFamily="34" charset="0"/>
+                <a:ea typeface="IBM Plex Sans" pitchFamily="34" charset="-122"/>
+                <a:cs typeface="IBM Plex Sans" pitchFamily="34" charset="-120"/>
+              </a:rPr>
+              <a:t>SAR AND ML IN ONE SLIDE</a:t>
+            </a:r>
+            <a:endParaRPr lang="en-US" sz="1200" dirty="0"/>
+          </a:p>
+        </p:txBody>
+      </p:sp>
+      <p:sp>
+        <p:nvSpPr>
+          <p:cNvPr id="3" name="Text 1"/>
+          <p:cNvSpPr/>
+          <p:nvPr>
+            <p:ph type="title"/>
+          </p:nvPr>
+        </p:nvSpPr>
+        <p:spPr>
+          <a:xfrm>
+            <a:off x="812782" y="1127756"/>
+            <a:ext cx="10883429" cy="528259"/>
+          </a:xfrm>
+          <a:prstGeom prst="rect">
+            <a:avLst/>
+          </a:prstGeom>
+          <a:noFill/>
+          <a:ln/>
+        </p:spPr>
+        <p:txBody>
+          <a:bodyPr wrap="square" lIns="0" tIns="0" rIns="0" bIns="0" rtlCol="0" anchor="t">
+            <a:normAutofit/>
+          </a:bodyPr>
+          <a:lstStyle/>
+          <a:p>
+            <a:pPr algn="l" indent="0" marL="0">
+              <a:lnSpc>
+                <a:spcPts val="3960"/>
+              </a:lnSpc>
+              <a:buNone/>
+            </a:pPr>
+            <a:r>
+              <a:rPr lang="en-US" sz="3600" b="1" i="0" dirty="0">
+                <a:solidFill>
+                  <a:srgbClr val="0E2233"/>
+                </a:solidFill>
+                <a:latin typeface="Source Serif 4" pitchFamily="18" charset="0"/>
+                <a:ea typeface="Source Serif 4" pitchFamily="18" charset="-122"/>
+                <a:cs typeface="Source Serif 4" pitchFamily="18" charset="-120"/>
+              </a:rPr>
+              <a:t>Four ideas behind the detector</a:t>
+            </a:r>
+            <a:endParaRPr lang="en-US" sz="3600" dirty="0"/>
+          </a:p>
+        </p:txBody>
+      </p:sp>
+      <p:sp>
+        <p:nvSpPr>
+          <p:cNvPr id="4" name="Shape 2"/>
+          <p:cNvSpPr/>
+          <p:nvPr/>
+        </p:nvSpPr>
+        <p:spPr>
+          <a:xfrm>
+            <a:off x="812782" y="1884614"/>
+            <a:ext cx="5207000" cy="1902474"/>
+          </a:xfrm>
+          <a:prstGeom prst="roundRect">
+            <a:avLst>
+              <a:gd name="adj" fmla="val 5340"/>
+            </a:avLst>
+          </a:prstGeom>
+          <a:solidFill>
+            <a:srgbClr val="FBFCFA"/>
+          </a:solidFill>
+          <a:ln/>
+        </p:spPr>
+      </p:sp>
+      <p:sp>
+        <p:nvSpPr>
+          <p:cNvPr id="5" name="Text 3"/>
+          <p:cNvSpPr/>
+          <p:nvPr/>
+        </p:nvSpPr>
+        <p:spPr>
+          <a:xfrm>
+            <a:off x="1066782" y="2113178"/>
+            <a:ext cx="4839970" cy="360669"/>
+          </a:xfrm>
+          <a:prstGeom prst="rect">
+            <a:avLst/>
+          </a:prstGeom>
+          <a:noFill/>
+          <a:ln/>
+        </p:spPr>
+        <p:txBody>
+          <a:bodyPr wrap="square" lIns="0" tIns="0" rIns="0" bIns="0" rtlCol="0" anchor="t">
+            <a:normAutofit/>
+          </a:bodyPr>
+          <a:lstStyle/>
+          <a:p>
+            <a:pPr algn="l" indent="0" marL="0">
+              <a:lnSpc>
+                <a:spcPts val="2640"/>
+              </a:lnSpc>
+              <a:buNone/>
+            </a:pPr>
+            <a:r>
+              <a:rPr lang="en-US" sz="2200" b="1" dirty="0">
+                <a:solidFill>
+                  <a:srgbClr val="0E2233"/>
+                </a:solidFill>
+                <a:latin typeface="Source Serif 4" pitchFamily="18" charset="0"/>
+                <a:ea typeface="Source Serif 4" pitchFamily="18" charset="-122"/>
+                <a:cs typeface="Source Serif 4" pitchFamily="18" charset="-120"/>
+              </a:rPr>
+              <a:t>Backscatter</a:t>
+            </a:r>
+            <a:endParaRPr lang="en-US" sz="2200" dirty="0"/>
+          </a:p>
+        </p:txBody>
+      </p:sp>
+      <p:sp>
+        <p:nvSpPr>
+          <p:cNvPr id="6" name="Text 4"/>
+          <p:cNvSpPr/>
+          <p:nvPr/>
+        </p:nvSpPr>
+        <p:spPr>
+          <a:xfrm>
+            <a:off x="1066782" y="2524575"/>
+            <a:ext cx="4839970" cy="573989"/>
+          </a:xfrm>
+          <a:prstGeom prst="rect">
+            <a:avLst/>
+          </a:prstGeom>
+          <a:noFill/>
+          <a:ln/>
+        </p:spPr>
+        <p:txBody>
+          <a:bodyPr wrap="square" lIns="0" tIns="0" rIns="0" bIns="0" rtlCol="0" anchor="t">
+            <a:normAutofit/>
+          </a:bodyPr>
+          <a:lstStyle/>
+          <a:p>
+            <a:pPr algn="l" indent="0" marL="0">
+              <a:lnSpc>
+                <a:spcPts val="2160"/>
+              </a:lnSpc>
+              <a:buNone/>
+            </a:pPr>
+            <a:r>
+              <a:rPr lang="en-US" sz="1600" dirty="0">
+                <a:solidFill>
+                  <a:srgbClr val="46566A"/>
+                </a:solidFill>
+                <a:latin typeface="IBM Plex Sans" pitchFamily="34" charset="0"/>
+                <a:ea typeface="IBM Plex Sans" pitchFamily="34" charset="-122"/>
+                <a:cs typeface="IBM Plex Sans" pitchFamily="34" charset="-120"/>
+              </a:rPr>
+              <a:t>Calm water reflects radar away and looks dark. An iceberg's facets send energy back and look bright.</a:t>
+            </a:r>
+            <a:endParaRPr lang="en-US" sz="1600" dirty="0"/>
+          </a:p>
+        </p:txBody>
+      </p:sp>
+      <p:sp>
+        <p:nvSpPr>
+          <p:cNvPr id="7" name="Shape 5"/>
+          <p:cNvSpPr/>
+          <p:nvPr/>
+        </p:nvSpPr>
+        <p:spPr>
+          <a:xfrm>
+            <a:off x="6172128" y="1884614"/>
+            <a:ext cx="5207090" cy="1902474"/>
+          </a:xfrm>
+          <a:prstGeom prst="roundRect">
+            <a:avLst>
+              <a:gd name="adj" fmla="val 5340"/>
+            </a:avLst>
+          </a:prstGeom>
+          <a:solidFill>
+            <a:srgbClr val="FBFCFA"/>
+          </a:solidFill>
+          <a:ln/>
+        </p:spPr>
+      </p:sp>
+      <p:sp>
+        <p:nvSpPr>
+          <p:cNvPr id="8" name="Text 6"/>
+          <p:cNvSpPr/>
+          <p:nvPr/>
+        </p:nvSpPr>
+        <p:spPr>
+          <a:xfrm>
+            <a:off x="6426128" y="2113178"/>
+            <a:ext cx="4840063" cy="360669"/>
+          </a:xfrm>
+          <a:prstGeom prst="rect">
+            <a:avLst/>
+          </a:prstGeom>
+          <a:noFill/>
+          <a:ln/>
+        </p:spPr>
+        <p:txBody>
+          <a:bodyPr wrap="square" lIns="0" tIns="0" rIns="0" bIns="0" rtlCol="0" anchor="t">
+            <a:normAutofit/>
+          </a:bodyPr>
+          <a:lstStyle/>
+          <a:p>
+            <a:pPr algn="l" indent="0" marL="0">
+              <a:lnSpc>
+                <a:spcPts val="2640"/>
+              </a:lnSpc>
+              <a:buNone/>
+            </a:pPr>
+            <a:r>
+              <a:rPr lang="en-US" sz="2200" b="1" dirty="0">
+                <a:solidFill>
+                  <a:srgbClr val="0E2233"/>
+                </a:solidFill>
+                <a:latin typeface="Source Serif 4" pitchFamily="18" charset="0"/>
+                <a:ea typeface="Source Serif 4" pitchFamily="18" charset="-122"/>
+                <a:cs typeface="Source Serif 4" pitchFamily="18" charset="-120"/>
+              </a:rPr>
+              <a:t>Polarization</a:t>
+            </a:r>
+            <a:endParaRPr lang="en-US" sz="2200" dirty="0"/>
+          </a:p>
+        </p:txBody>
+      </p:sp>
+      <p:sp>
+        <p:nvSpPr>
+          <p:cNvPr id="9" name="Text 7"/>
+          <p:cNvSpPr/>
+          <p:nvPr/>
+        </p:nvSpPr>
+        <p:spPr>
+          <a:xfrm>
+            <a:off x="6426128" y="2524575"/>
+            <a:ext cx="4840063" cy="573989"/>
+          </a:xfrm>
+          <a:prstGeom prst="rect">
+            <a:avLst/>
+          </a:prstGeom>
+          <a:noFill/>
+          <a:ln/>
+        </p:spPr>
+        <p:txBody>
+          <a:bodyPr wrap="square" lIns="0" tIns="0" rIns="0" bIns="0" rtlCol="0" anchor="t">
+            <a:normAutofit/>
+          </a:bodyPr>
+          <a:lstStyle/>
+          <a:p>
+            <a:pPr algn="l" indent="0" marL="0">
+              <a:lnSpc>
+                <a:spcPts val="2160"/>
+              </a:lnSpc>
+              <a:buNone/>
+            </a:pPr>
+            <a:r>
+              <a:rPr lang="en-US" sz="1600" dirty="0">
+                <a:solidFill>
+                  <a:srgbClr val="46566A"/>
+                </a:solidFill>
+                <a:latin typeface="IBM Plex Sans" pitchFamily="34" charset="0"/>
+                <a:ea typeface="IBM Plex Sans" pitchFamily="34" charset="-122"/>
+                <a:cs typeface="IBM Plex Sans" pitchFamily="34" charset="-120"/>
+              </a:rPr>
+              <a:t>Sea clutter is far weaker in cross-pol (HV), so bergs stand out there. HH is the second check.</a:t>
+            </a:r>
+            <a:endParaRPr lang="en-US" sz="1600" dirty="0"/>
+          </a:p>
+        </p:txBody>
+      </p:sp>
+      <p:sp>
+        <p:nvSpPr>
+          <p:cNvPr id="10" name="Shape 8"/>
+          <p:cNvSpPr/>
+          <p:nvPr/>
+        </p:nvSpPr>
+        <p:spPr>
+          <a:xfrm>
+            <a:off x="812782" y="3939434"/>
+            <a:ext cx="5207000" cy="1902564"/>
+          </a:xfrm>
+          <a:prstGeom prst="roundRect">
+            <a:avLst>
+              <a:gd name="adj" fmla="val 5340"/>
+            </a:avLst>
+          </a:prstGeom>
+          <a:solidFill>
+            <a:srgbClr val="FBFCFA"/>
+          </a:solidFill>
+          <a:ln/>
+        </p:spPr>
+      </p:sp>
+      <p:sp>
+        <p:nvSpPr>
+          <p:cNvPr id="11" name="Text 9"/>
+          <p:cNvSpPr/>
+          <p:nvPr/>
+        </p:nvSpPr>
+        <p:spPr>
+          <a:xfrm>
+            <a:off x="1066782" y="4167998"/>
+            <a:ext cx="4839970" cy="360669"/>
+          </a:xfrm>
+          <a:prstGeom prst="rect">
+            <a:avLst/>
+          </a:prstGeom>
+          <a:noFill/>
+          <a:ln/>
+        </p:spPr>
+        <p:txBody>
+          <a:bodyPr wrap="square" lIns="0" tIns="0" rIns="0" bIns="0" rtlCol="0" anchor="t">
+            <a:normAutofit/>
+          </a:bodyPr>
+          <a:lstStyle/>
+          <a:p>
+            <a:pPr algn="l" indent="0" marL="0">
+              <a:lnSpc>
+                <a:spcPts val="2640"/>
+              </a:lnSpc>
+              <a:buNone/>
+            </a:pPr>
+            <a:r>
+              <a:rPr lang="en-US" sz="2200" b="1" dirty="0">
+                <a:solidFill>
+                  <a:srgbClr val="0E2233"/>
+                </a:solidFill>
+                <a:latin typeface="Source Serif 4" pitchFamily="18" charset="0"/>
+                <a:ea typeface="Source Serif 4" pitchFamily="18" charset="-122"/>
+                <a:cs typeface="Source Serif 4" pitchFamily="18" charset="-120"/>
+              </a:rPr>
+              <a:t>Speckle</a:t>
+            </a:r>
+            <a:endParaRPr lang="en-US" sz="2200" dirty="0"/>
+          </a:p>
+        </p:txBody>
+      </p:sp>
+      <p:sp>
+        <p:nvSpPr>
+          <p:cNvPr id="12" name="Text 10"/>
+          <p:cNvSpPr/>
+          <p:nvPr/>
+        </p:nvSpPr>
+        <p:spPr>
+          <a:xfrm>
+            <a:off x="1066782" y="4579395"/>
+            <a:ext cx="4839970" cy="573989"/>
+          </a:xfrm>
+          <a:prstGeom prst="rect">
+            <a:avLst/>
+          </a:prstGeom>
+          <a:noFill/>
+          <a:ln/>
+        </p:spPr>
+        <p:txBody>
+          <a:bodyPr wrap="square" lIns="0" tIns="0" rIns="0" bIns="0" rtlCol="0" anchor="t">
+            <a:normAutofit/>
+          </a:bodyPr>
+          <a:lstStyle/>
+          <a:p>
+            <a:pPr algn="l" indent="0" marL="0">
+              <a:lnSpc>
+                <a:spcPts val="2160"/>
+              </a:lnSpc>
+              <a:buNone/>
+            </a:pPr>
+            <a:r>
+              <a:rPr lang="en-US" sz="1600" dirty="0">
+                <a:solidFill>
+                  <a:srgbClr val="46566A"/>
+                </a:solidFill>
+                <a:latin typeface="IBM Plex Sans" pitchFamily="34" charset="0"/>
+                <a:ea typeface="IBM Plex Sans" pitchFamily="34" charset="-122"/>
+                <a:cs typeface="IBM Plex Sans" pitchFamily="34" charset="-120"/>
+              </a:rPr>
+              <a:t>Grainy noise in every SAR image. Its strength (ENL) is measured per scene and sets the threshold.</a:t>
+            </a:r>
+            <a:endParaRPr lang="en-US" sz="1600" dirty="0"/>
+          </a:p>
+        </p:txBody>
+      </p:sp>
+      <p:sp>
+        <p:nvSpPr>
+          <p:cNvPr id="13" name="Shape 11"/>
+          <p:cNvSpPr/>
+          <p:nvPr/>
+        </p:nvSpPr>
+        <p:spPr>
+          <a:xfrm>
+            <a:off x="6172128" y="3939434"/>
+            <a:ext cx="5207090" cy="1902564"/>
+          </a:xfrm>
+          <a:prstGeom prst="roundRect">
+            <a:avLst>
+              <a:gd name="adj" fmla="val 5340"/>
+            </a:avLst>
+          </a:prstGeom>
+          <a:solidFill>
+            <a:srgbClr val="FBFCFA"/>
+          </a:solidFill>
+          <a:ln/>
+        </p:spPr>
+      </p:sp>
+      <p:sp>
+        <p:nvSpPr>
+          <p:cNvPr id="14" name="Text 12"/>
+          <p:cNvSpPr/>
+          <p:nvPr/>
+        </p:nvSpPr>
+        <p:spPr>
+          <a:xfrm>
+            <a:off x="6426128" y="4167998"/>
+            <a:ext cx="4840063" cy="360669"/>
+          </a:xfrm>
+          <a:prstGeom prst="rect">
+            <a:avLst/>
+          </a:prstGeom>
+          <a:noFill/>
+          <a:ln/>
+        </p:spPr>
+        <p:txBody>
+          <a:bodyPr wrap="square" lIns="0" tIns="0" rIns="0" bIns="0" rtlCol="0" anchor="t">
+            <a:normAutofit/>
+          </a:bodyPr>
+          <a:lstStyle/>
+          <a:p>
+            <a:pPr algn="l" indent="0" marL="0">
+              <a:lnSpc>
+                <a:spcPts val="2640"/>
+              </a:lnSpc>
+              <a:buNone/>
+            </a:pPr>
+            <a:r>
+              <a:rPr lang="en-US" sz="2200" b="1" dirty="0">
+                <a:solidFill>
+                  <a:srgbClr val="0E2233"/>
+                </a:solidFill>
+                <a:latin typeface="Source Serif 4" pitchFamily="18" charset="0"/>
+                <a:ea typeface="Source Serif 4" pitchFamily="18" charset="-122"/>
+                <a:cs typeface="Source Serif 4" pitchFamily="18" charset="-120"/>
+              </a:rPr>
+              <a:t>Foundation model</a:t>
+            </a:r>
+            <a:endParaRPr lang="en-US" sz="2200" dirty="0"/>
+          </a:p>
+        </p:txBody>
+      </p:sp>
+      <p:sp>
+        <p:nvSpPr>
+          <p:cNvPr id="15" name="Text 13"/>
+          <p:cNvSpPr/>
+          <p:nvPr/>
+        </p:nvSpPr>
+        <p:spPr>
+          <a:xfrm>
+            <a:off x="6426128" y="4579395"/>
+            <a:ext cx="4840063" cy="573989"/>
+          </a:xfrm>
+          <a:prstGeom prst="rect">
+            <a:avLst/>
+          </a:prstGeom>
+          <a:noFill/>
+          <a:ln/>
+        </p:spPr>
+        <p:txBody>
+          <a:bodyPr wrap="square" lIns="0" tIns="0" rIns="0" bIns="0" rtlCol="0" anchor="t">
+            <a:normAutofit/>
+          </a:bodyPr>
+          <a:lstStyle/>
+          <a:p>
+            <a:pPr algn="l" indent="0" marL="0">
+              <a:lnSpc>
+                <a:spcPts val="2160"/>
+              </a:lnSpc>
+              <a:buNone/>
+            </a:pPr>
+            <a:r>
+              <a:rPr lang="en-US" sz="1600" dirty="0">
+                <a:solidFill>
+                  <a:srgbClr val="46566A"/>
+                </a:solidFill>
+                <a:latin typeface="IBM Plex Sans" pitchFamily="34" charset="0"/>
+                <a:ea typeface="IBM Plex Sans" pitchFamily="34" charset="-122"/>
+                <a:cs typeface="IBM Plex Sans" pitchFamily="34" charset="-120"/>
+              </a:rPr>
+              <a:t>A network pretrained on huge amounts of unlabelled imagery. A tiny head on its features can learn a new task from a few hundred labels.</a:t>
+            </a:r>
+            <a:endParaRPr lang="en-US" sz="1600" dirty="0"/>
+          </a:p>
+        </p:txBody>
+      </p:sp>
+      <p:sp>
+        <p:nvSpPr>
+          <p:cNvPr id="16" name="Text 14"/>
+          <p:cNvSpPr/>
+          <p:nvPr/>
+        </p:nvSpPr>
+        <p:spPr>
+          <a:xfrm>
+            <a:off x="812782" y="6238242"/>
+            <a:ext cx="4114800" cy="238810"/>
+          </a:xfrm>
+          <a:prstGeom prst="rect">
+            <a:avLst/>
+          </a:prstGeom>
+          <a:noFill/>
+          <a:ln/>
+        </p:spPr>
+        <p:txBody>
+          <a:bodyPr wrap="square" lIns="0" tIns="0" rIns="0" bIns="0" rtlCol="0" anchor="t">
+            <a:normAutofit/>
+          </a:bodyPr>
+          <a:lstStyle/>
+          <a:p>
+            <a:pPr algn="l" indent="0" marL="0">
+              <a:lnSpc>
+                <a:spcPts val="1680"/>
+              </a:lnSpc>
+              <a:buNone/>
+            </a:pPr>
+            <a:r>
+              <a:rPr lang="en-US" sz="1200" dirty="0">
+                <a:solidFill>
+                  <a:srgbClr val="5A6978"/>
+                </a:solidFill>
+                <a:latin typeface="IBM Plex Sans" pitchFamily="34" charset="0"/>
+                <a:ea typeface="IBM Plex Sans" pitchFamily="34" charset="-122"/>
+                <a:cs typeface="IBM Plex Sans" pitchFamily="34" charset="-120"/>
+              </a:rPr>
+              <a:t>Iceberg Alley SAR · Project brief</a:t>
+            </a:r>
+            <a:endParaRPr lang="en-US" sz="1200" dirty="0"/>
+          </a:p>
+        </p:txBody>
+      </p:sp>
+      <p:sp>
+        <p:nvSpPr>
+          <p:cNvPr id="17" name="Text 15"/>
+          <p:cNvSpPr/>
+          <p:nvPr/>
+        </p:nvSpPr>
+        <p:spPr>
+          <a:xfrm>
+            <a:off x="11237976" y="6238242"/>
+            <a:ext cx="146304" cy="238810"/>
+          </a:xfrm>
+          <a:prstGeom prst="rect">
+            <a:avLst/>
+          </a:prstGeom>
+          <a:noFill/>
+          <a:ln/>
+        </p:spPr>
+        <p:txBody>
+          <a:bodyPr wrap="square" lIns="0" tIns="0" rIns="0" bIns="0" rtlCol="0" anchor="t">
+            <a:normAutofit/>
+          </a:bodyPr>
+          <a:lstStyle/>
+          <a:p>
+            <a:pPr algn="r" indent="0" marL="0">
+              <a:lnSpc>
+                <a:spcPts val="1680"/>
+              </a:lnSpc>
+              <a:buNone/>
+            </a:pPr>
+            <a:r>
+              <a:rPr lang="en-US" sz="1200" dirty="0">
+                <a:solidFill>
+                  <a:srgbClr val="5A6978"/>
+                </a:solidFill>
+                <a:latin typeface="IBM Plex Sans" pitchFamily="34" charset="0"/>
+                <a:ea typeface="IBM Plex Sans" pitchFamily="34" charset="-122"/>
+                <a:cs typeface="IBM Plex Sans" pitchFamily="34" charset="-120"/>
+              </a:rPr>
+              <a:t>5</a:t>
+            </a:r>
+            <a:endParaRPr lang="en-US" sz="1200" dirty="0"/>
+          </a:p>
+        </p:txBody>
+      </p:sp>
+    </p:spTree>
+  </p:cSld>
+  <p:clrMapOvr>
+    <a:masterClrMapping/>
+  </p:clrMapOvr>
+</p:sld>
+</file>
+
+<file path=ppt/slides/slide5.xml><?xml version="1.0" encoding="utf-8"?>
+<p:sld xmlns:a="http://schemas.openxmlformats.org/drawingml/2006/main" xmlns:r="http://schemas.openxmlformats.org/officeDocument/2006/relationships" xmlns:p="http://schemas.openxmlformats.org/presentationml/2006/main">
+  <p:cSld name="Slide 5">
+    <p:bg>
+      <p:bgPr>
+        <a:solidFill>
+          <a:srgbClr val="F4F6F3"/>
+        </a:solidFill>
+      </p:bgPr>
+    </p:bg>
+    <p:spTree>
+      <p:nvGrpSpPr>
+        <p:cNvPr id="1" name=""/>
+        <p:cNvGrpSpPr/>
+        <p:nvPr/>
+      </p:nvGrpSpPr>
+      <p:grpSpPr>
+        <a:xfrm>
+          <a:off x="0" y="0"/>
+          <a:ext cx="0" cy="0"/>
+          <a:chOff x="0" y="0"/>
+          <a:chExt cx="0" cy="0"/>
+        </a:xfrm>
+      </p:grpSpPr>
+      <p:sp>
+        <p:nvSpPr>
+          <p:cNvPr id="2" name="Text 0"/>
+          <p:cNvSpPr/>
+          <p:nvPr/>
+        </p:nvSpPr>
+        <p:spPr>
+          <a:xfrm>
+            <a:off x="812782" y="1518949"/>
+            <a:ext cx="4447540" cy="238810"/>
+          </a:xfrm>
+          <a:prstGeom prst="rect">
+            <a:avLst/>
+          </a:prstGeom>
+          <a:noFill/>
+          <a:ln/>
+        </p:spPr>
+        <p:txBody>
+          <a:bodyPr wrap="square" lIns="0" tIns="0" rIns="0" bIns="0" rtlCol="0" anchor="t">
+            <a:normAutofit/>
+          </a:bodyPr>
+          <a:lstStyle/>
+          <a:p>
+            <a:pPr algn="l" indent="0" marL="0">
+              <a:lnSpc>
+                <a:spcPts val="1680"/>
+              </a:lnSpc>
+              <a:buNone/>
+            </a:pPr>
+            <a:r>
+              <a:rPr lang="en-US" sz="1200" b="1" spc="200" kern="0" dirty="0">
+                <a:solidFill>
+                  <a:srgbClr val="A84B1A"/>
+                </a:solidFill>
+                <a:latin typeface="IBM Plex Sans" pitchFamily="34" charset="0"/>
+                <a:ea typeface="IBM Plex Sans" pitchFamily="34" charset="-122"/>
+                <a:cs typeface="IBM Plex Sans" pitchFamily="34" charset="-120"/>
+              </a:rPr>
+              <a:t>THE BASELINE</a:t>
+            </a:r>
+            <a:endParaRPr lang="en-US" sz="1200" dirty="0"/>
+          </a:p>
+        </p:txBody>
+      </p:sp>
+      <p:sp>
+        <p:nvSpPr>
+          <p:cNvPr id="3" name="Text 1"/>
+          <p:cNvSpPr/>
+          <p:nvPr>
+            <p:ph type="title"/>
+          </p:nvPr>
+        </p:nvSpPr>
+        <p:spPr>
+          <a:xfrm>
+            <a:off x="812782" y="1935485"/>
+            <a:ext cx="4447540" cy="1031117"/>
+          </a:xfrm>
+          <a:prstGeom prst="rect">
+            <a:avLst/>
+          </a:prstGeom>
+          <a:noFill/>
+          <a:ln/>
+        </p:spPr>
+        <p:txBody>
+          <a:bodyPr wrap="square" lIns="0" tIns="0" rIns="0" bIns="0" rtlCol="0" anchor="t">
+            <a:normAutofit/>
+          </a:bodyPr>
+          <a:lstStyle/>
+          <a:p>
+            <a:pPr algn="l" indent="0" marL="0">
+              <a:lnSpc>
+                <a:spcPts val="3960"/>
+              </a:lnSpc>
+              <a:buNone/>
+            </a:pPr>
+            <a:r>
+              <a:rPr lang="en-US" sz="3600" b="1" i="0" dirty="0">
+                <a:solidFill>
+                  <a:srgbClr val="0E2233"/>
+                </a:solidFill>
+                <a:latin typeface="Source Serif 4" pitchFamily="18" charset="0"/>
+                <a:ea typeface="Source Serif 4" pitchFamily="18" charset="-122"/>
+                <a:cs typeface="Source Serif 4" pitchFamily="18" charset="-120"/>
+              </a:rPr>
+              <a:t>CA-CFAR: the classical detector</a:t>
+            </a:r>
+            <a:endParaRPr lang="en-US" sz="3600" dirty="0"/>
+          </a:p>
+        </p:txBody>
+      </p:sp>
+      <p:sp>
+        <p:nvSpPr>
+          <p:cNvPr id="4" name="Text 2"/>
+          <p:cNvSpPr/>
+          <p:nvPr/>
+        </p:nvSpPr>
+        <p:spPr>
+          <a:xfrm>
+            <a:off x="870440" y="3144332"/>
+            <a:ext cx="4382262" cy="2016810"/>
+          </a:xfrm>
+          <a:prstGeom prst="rect">
+            <a:avLst/>
+          </a:prstGeom>
+          <a:noFill/>
+          <a:ln/>
+        </p:spPr>
+        <p:txBody>
+          <a:bodyPr wrap="square" lIns="0" tIns="0" rIns="0" bIns="0" rtlCol="0" anchor="t">
+            <a:normAutofit/>
+          </a:bodyPr>
+          <a:lstStyle/>
+          <a:p>
+            <a:pPr algn="l" marL="196342" indent="-196342">
+              <a:lnSpc>
+                <a:spcPts val="2240"/>
+              </a:lnSpc>
+              <a:buSzPct val="100000"/>
+              <a:buChar char="•"/>
+            </a:pPr>
+            <a:r>
+              <a:rPr lang="en-US" sz="1600" b="1" dirty="0">
+                <a:solidFill>
+                  <a:srgbClr val="46566A"/>
+                </a:solidFill>
+                <a:latin typeface="IBM Plex Sans" pitchFamily="34" charset="0"/>
+                <a:ea typeface="IBM Plex Sans" pitchFamily="34" charset="-122"/>
+                <a:cs typeface="IBM Plex Sans" pitchFamily="34" charset="-120"/>
+              </a:rPr>
+              <a:t>Threshold</a:t>
+            </a:r>
+            <a:r>
+              <a:rPr lang="en-US" sz="1600" dirty="0">
+                <a:solidFill>
+                  <a:srgbClr val="46566A"/>
+                </a:solidFill>
+                <a:latin typeface="IBM Plex Sans" pitchFamily="34" charset="0"/>
+                <a:ea typeface="IBM Plex Sans" pitchFamily="34" charset="-122"/>
+                <a:cs typeface="IBM Plex Sans" pitchFamily="34" charset="-120"/>
+              </a:rPr>
+              <a:t> from a 10⁻⁶ false-alarm rate, speckle measured per scene</a:t>
+            </a:r>
+            <a:endParaRPr lang="en-US" sz="1600" dirty="0"/>
+          </a:p>
+          <a:p>
+            <a:pPr algn="l" marL="196342" indent="-196342">
+              <a:lnSpc>
+                <a:spcPts val="2240"/>
+              </a:lnSpc>
+              <a:buSzPct val="100000"/>
+              <a:buChar char="•"/>
+            </a:pPr>
+            <a:r>
+              <a:rPr lang="en-US" sz="1600" b="1" dirty="0">
+                <a:solidFill>
+                  <a:srgbClr val="46566A"/>
+                </a:solidFill>
+                <a:latin typeface="IBM Plex Sans" pitchFamily="34" charset="0"/>
+                <a:ea typeface="IBM Plex Sans" pitchFamily="34" charset="-122"/>
+                <a:cs typeface="IBM Plex Sans" pitchFamily="34" charset="-120"/>
+              </a:rPr>
+              <a:t>Filters:</a:t>
+            </a:r>
+            <a:r>
+              <a:rPr lang="en-US" sz="1600" dirty="0">
+                <a:solidFill>
+                  <a:srgbClr val="46566A"/>
+                </a:solidFill>
+                <a:latin typeface="IBM Plex Sans" pitchFamily="34" charset="0"/>
+                <a:ea typeface="IBM Plex Sans" pitchFamily="34" charset="-122"/>
+                <a:cs typeface="IBM Plex Sans" pitchFamily="34" charset="-120"/>
+              </a:rPr>
+              <a:t> size, ice strips over 300 m, HH co-pol check</a:t>
+            </a:r>
+            <a:endParaRPr lang="en-US" sz="1600" dirty="0"/>
+          </a:p>
+          <a:p>
+            <a:pPr algn="l" marL="196342" indent="-196342">
+              <a:lnSpc>
+                <a:spcPts val="2240"/>
+              </a:lnSpc>
+              <a:buSzPct val="100000"/>
+              <a:buChar char="•"/>
+            </a:pPr>
+            <a:r>
+              <a:rPr lang="en-US" sz="1600" b="1" dirty="0">
+                <a:solidFill>
+                  <a:srgbClr val="46566A"/>
+                </a:solidFill>
+                <a:latin typeface="IBM Plex Sans" pitchFamily="34" charset="0"/>
+                <a:ea typeface="IBM Plex Sans" pitchFamily="34" charset="-122"/>
+                <a:cs typeface="IBM Plex Sans" pitchFamily="34" charset="-120"/>
+              </a:rPr>
+              <a:t>Strength:</a:t>
+            </a:r>
+            <a:r>
+              <a:rPr lang="en-US" sz="1600" dirty="0">
+                <a:solidFill>
+                  <a:srgbClr val="46566A"/>
+                </a:solidFill>
+                <a:latin typeface="IBM Plex Sans" pitchFamily="34" charset="0"/>
+                <a:ea typeface="IBM Plex Sans" pitchFamily="34" charset="-122"/>
+                <a:cs typeface="IBM Plex Sans" pitchFamily="34" charset="-120"/>
+              </a:rPr>
+              <a:t> no training, runs on a CPU</a:t>
+            </a:r>
+            <a:endParaRPr lang="en-US" sz="1600" dirty="0"/>
+          </a:p>
+          <a:p>
+            <a:pPr algn="l" marL="196342" indent="-196342">
+              <a:lnSpc>
+                <a:spcPts val="2240"/>
+              </a:lnSpc>
+              <a:buSzPct val="100000"/>
+              <a:buChar char="•"/>
+            </a:pPr>
+            <a:r>
+              <a:rPr lang="en-US" sz="1600" b="1" dirty="0">
+                <a:solidFill>
+                  <a:srgbClr val="46566A"/>
+                </a:solidFill>
+                <a:latin typeface="IBM Plex Sans" pitchFamily="34" charset="0"/>
+                <a:ea typeface="IBM Plex Sans" pitchFamily="34" charset="-122"/>
+                <a:cs typeface="IBM Plex Sans" pitchFamily="34" charset="-120"/>
+              </a:rPr>
+              <a:t>Weakness:</a:t>
+            </a:r>
+            <a:r>
+              <a:rPr lang="en-US" sz="1600" dirty="0">
+                <a:solidFill>
+                  <a:srgbClr val="46566A"/>
+                </a:solidFill>
+                <a:latin typeface="IBM Plex Sans" pitchFamily="34" charset="0"/>
+                <a:ea typeface="IBM Plex Sans" pitchFamily="34" charset="-122"/>
+                <a:cs typeface="IBM Plex Sans" pitchFamily="34" charset="-120"/>
+              </a:rPr>
+              <a:t> the strip rule drops large bergs</a:t>
+            </a:r>
+            <a:endParaRPr lang="en-US" sz="1600" dirty="0"/>
+          </a:p>
+        </p:txBody>
+      </p:sp>
+      <p:sp>
+        <p:nvSpPr>
+          <p:cNvPr id="5" name="Shape 3"/>
+          <p:cNvSpPr/>
+          <p:nvPr/>
+        </p:nvSpPr>
+        <p:spPr>
+          <a:xfrm>
+            <a:off x="5486400" y="1042415"/>
+            <a:ext cx="5885502" cy="4261104"/>
+          </a:xfrm>
+          <a:prstGeom prst="roundRect">
+            <a:avLst>
+              <a:gd name="adj" fmla="val 1788"/>
+            </a:avLst>
+          </a:prstGeom>
+          <a:solidFill>
+            <a:srgbClr val="0E2233"/>
+          </a:solidFill>
+          <a:ln/>
+        </p:spPr>
+      </p:sp>
+      <p:pic>
+        <p:nvPicPr>
+          <p:cNvPr id="6" name="Image 0" descr="HV radar scene of 8 May 2025 with land and pack ice masked in black and 140 detections circled in red">    </p:cNvPr>
+          <p:cNvPicPr>
+            <a:picLocks noChangeAspect="1"/>
+          </p:cNvPicPr>
+          <p:nvPr/>
+        </p:nvPicPr>
+        <p:blipFill>
+          <a:blip r:embed="rId4"/>
+          <a:stretch/>
+        </p:blipFill>
+        <p:spPr>
+          <a:xfrm>
+            <a:off x="5486400" y="1042415"/>
+            <a:ext cx="5885502" cy="4261104"/>
+          </a:xfrm>
+          <a:prstGeom prst="roundRect">
+            <a:avLst>
+              <a:gd name="adj" fmla="val 1788"/>
+            </a:avLst>
+          </a:prstGeom>
+        </p:spPr>
+      </p:pic>
+      <p:sp>
+        <p:nvSpPr>
+          <p:cNvPr id="7" name="Text 4"/>
+          <p:cNvSpPr/>
+          <p:nvPr/>
+        </p:nvSpPr>
+        <p:spPr>
+          <a:xfrm>
+            <a:off x="5486346" y="5401828"/>
+            <a:ext cx="6069658" cy="238810"/>
+          </a:xfrm>
+          <a:prstGeom prst="rect">
+            <a:avLst/>
+          </a:prstGeom>
+          <a:noFill/>
+          <a:ln/>
+        </p:spPr>
+        <p:txBody>
+          <a:bodyPr wrap="square" lIns="0" tIns="0" rIns="0" bIns="0" rtlCol="0" anchor="t">
+            <a:normAutofit/>
+          </a:bodyPr>
+          <a:lstStyle/>
+          <a:p>
+            <a:pPr algn="l" indent="0" marL="0">
+              <a:lnSpc>
+                <a:spcPts val="1680"/>
+              </a:lnSpc>
+              <a:buNone/>
+            </a:pPr>
+            <a:r>
+              <a:rPr lang="en-US" sz="1200" dirty="0">
+                <a:solidFill>
+                  <a:srgbClr val="5A6978"/>
+                </a:solidFill>
+                <a:latin typeface="IBM Plex Sans" pitchFamily="34" charset="0"/>
+                <a:ea typeface="IBM Plex Sans" pitchFamily="34" charset="-122"/>
+                <a:cs typeface="IBM Plex Sans" pitchFamily="34" charset="-120"/>
+              </a:rPr>
+              <a:t>HV, 2025-05-08. Land and pack ice masked (black), 111 CFAR detections circled.</a:t>
+            </a:r>
+            <a:endParaRPr lang="en-US" sz="1200" dirty="0"/>
+          </a:p>
+        </p:txBody>
+      </p:sp>
+      <p:sp>
+        <p:nvSpPr>
+          <p:cNvPr id="8" name="Text 5"/>
+          <p:cNvSpPr/>
+          <p:nvPr/>
+        </p:nvSpPr>
+        <p:spPr>
+          <a:xfrm>
+            <a:off x="812782" y="6238242"/>
+            <a:ext cx="4114800" cy="238810"/>
+          </a:xfrm>
+          <a:prstGeom prst="rect">
+            <a:avLst/>
+          </a:prstGeom>
+          <a:noFill/>
+          <a:ln/>
+        </p:spPr>
+        <p:txBody>
+          <a:bodyPr wrap="square" lIns="0" tIns="0" rIns="0" bIns="0" rtlCol="0" anchor="t">
+            <a:normAutofit/>
+          </a:bodyPr>
+          <a:lstStyle/>
+          <a:p>
+            <a:pPr algn="l" indent="0" marL="0">
+              <a:lnSpc>
+                <a:spcPts val="1680"/>
+              </a:lnSpc>
+              <a:buNone/>
+            </a:pPr>
+            <a:r>
+              <a:rPr lang="en-US" sz="1200" dirty="0">
+                <a:solidFill>
+                  <a:srgbClr val="5A6978"/>
+                </a:solidFill>
+                <a:latin typeface="IBM Plex Sans" pitchFamily="34" charset="0"/>
+                <a:ea typeface="IBM Plex Sans" pitchFamily="34" charset="-122"/>
+                <a:cs typeface="IBM Plex Sans" pitchFamily="34" charset="-120"/>
+              </a:rPr>
+              <a:t>Iceberg Alley SAR · Project brief</a:t>
+            </a:r>
+            <a:endParaRPr lang="en-US" sz="1200" dirty="0"/>
+          </a:p>
+        </p:txBody>
+      </p:sp>
+      <p:sp>
+        <p:nvSpPr>
+          <p:cNvPr id="9" name="Text 6"/>
+          <p:cNvSpPr/>
+          <p:nvPr/>
+        </p:nvSpPr>
+        <p:spPr>
+          <a:xfrm>
+            <a:off x="11237976" y="6238242"/>
+            <a:ext cx="146304" cy="238810"/>
+          </a:xfrm>
+          <a:prstGeom prst="rect">
+            <a:avLst/>
+          </a:prstGeom>
+          <a:noFill/>
+          <a:ln/>
+        </p:spPr>
+        <p:txBody>
+          <a:bodyPr wrap="square" lIns="0" tIns="0" rIns="0" bIns="0" rtlCol="0" anchor="t">
+            <a:normAutofit/>
+          </a:bodyPr>
+          <a:lstStyle/>
+          <a:p>
+            <a:pPr algn="r" indent="0" marL="0">
+              <a:lnSpc>
+                <a:spcPts val="1680"/>
+              </a:lnSpc>
+              <a:buNone/>
+            </a:pPr>
+            <a:r>
+              <a:rPr lang="en-US" sz="1200" dirty="0">
+                <a:solidFill>
+                  <a:srgbClr val="5A6978"/>
+                </a:solidFill>
+                <a:latin typeface="IBM Plex Sans" pitchFamily="34" charset="0"/>
+                <a:ea typeface="IBM Plex Sans" pitchFamily="34" charset="-122"/>
+                <a:cs typeface="IBM Plex Sans" pitchFamily="34" charset="-120"/>
+              </a:rPr>
+              <a:t>9</a:t>
+            </a:r>
+            <a:endParaRPr lang="en-US" sz="1200" dirty="0"/>
+          </a:p>
+        </p:txBody>
+      </p:sp>
+    </p:spTree>
+  </p:cSld>
+  <p:clrMapOvr>
+    <a:masterClrMapping/>
+  </p:clrMapOvr>
+</p:sld>
+</file>
+
+<file path=ppt/slides/slide6.xml><?xml version="1.0" encoding="utf-8"?>
+<p:sld xmlns:a="http://schemas.openxmlformats.org/drawingml/2006/main" xmlns:r="http://schemas.openxmlformats.org/officeDocument/2006/relationships" xmlns:p="http://schemas.openxmlformats.org/presentationml/2006/main">
+  <p:cSld name="Slide 6">
+    <p:bg>
+      <p:bgPr>
+        <a:solidFill>
+          <a:srgbClr val="F4F6F3"/>
+        </a:solidFill>
+      </p:bgPr>
+    </p:bg>
+    <p:spTree>
+      <p:nvGrpSpPr>
+        <p:cNvPr id="1" name=""/>
+        <p:cNvGrpSpPr/>
+        <p:nvPr/>
+      </p:nvGrpSpPr>
+      <p:grpSpPr>
+        <a:xfrm>
+          <a:off x="0" y="0"/>
+          <a:ext cx="0" cy="0"/>
+          <a:chOff x="0" y="0"/>
+          <a:chExt cx="0" cy="0"/>
+        </a:xfrm>
+      </p:grpSpPr>
+      <p:sp>
+        <p:nvSpPr>
+          <p:cNvPr id="2" name="Text 0"/>
+          <p:cNvSpPr/>
+          <p:nvPr/>
+        </p:nvSpPr>
+        <p:spPr>
+          <a:xfrm>
+            <a:off x="812782" y="812781"/>
+            <a:ext cx="10883429" cy="238810"/>
+          </a:xfrm>
+          <a:prstGeom prst="rect">
+            <a:avLst/>
+          </a:prstGeom>
+          <a:noFill/>
+          <a:ln/>
+        </p:spPr>
+        <p:txBody>
+          <a:bodyPr wrap="square" lIns="0" tIns="0" rIns="0" bIns="0" rtlCol="0" anchor="t">
+            <a:normAutofit/>
+          </a:bodyPr>
+          <a:lstStyle/>
+          <a:p>
+            <a:pPr algn="l" indent="0" marL="0">
+              <a:lnSpc>
+                <a:spcPts val="1680"/>
+              </a:lnSpc>
+              <a:buNone/>
+            </a:pPr>
+            <a:r>
+              <a:rPr lang="en-US" sz="1200" b="1" spc="200" kern="0" dirty="0">
+                <a:solidFill>
+                  <a:srgbClr val="A84B1A"/>
+                </a:solidFill>
+                <a:latin typeface="IBM Plex Sans" pitchFamily="34" charset="0"/>
+                <a:ea typeface="IBM Plex Sans" pitchFamily="34" charset="-122"/>
+                <a:cs typeface="IBM Plex Sans" pitchFamily="34" charset="-120"/>
+              </a:rPr>
+              <a:t>VIEWER</a:t>
+            </a:r>
+            <a:endParaRPr lang="en-US" sz="1200" dirty="0"/>
+          </a:p>
+        </p:txBody>
+      </p:sp>
+      <p:sp>
+        <p:nvSpPr>
+          <p:cNvPr id="3" name="Text 1"/>
+          <p:cNvSpPr/>
+          <p:nvPr>
+            <p:ph type="title"/>
+          </p:nvPr>
+        </p:nvSpPr>
+        <p:spPr>
+          <a:xfrm>
+            <a:off x="812782" y="1127754"/>
+            <a:ext cx="10883429" cy="528259"/>
+          </a:xfrm>
+          <a:prstGeom prst="rect">
+            <a:avLst/>
+          </a:prstGeom>
+          <a:noFill/>
+          <a:ln/>
+        </p:spPr>
+        <p:txBody>
+          <a:bodyPr wrap="square" lIns="0" tIns="0" rIns="0" bIns="0" rtlCol="0" anchor="t">
+            <a:normAutofit/>
+          </a:bodyPr>
+          <a:lstStyle/>
+          <a:p>
+            <a:pPr algn="l" indent="0" marL="0">
+              <a:lnSpc>
+                <a:spcPts val="3960"/>
+              </a:lnSpc>
+              <a:buNone/>
+            </a:pPr>
+            <a:r>
+              <a:rPr lang="en-US" sz="3600" b="1" i="0" dirty="0">
+                <a:solidFill>
+                  <a:srgbClr val="0E2233"/>
+                </a:solidFill>
+                <a:latin typeface="Source Serif 4" pitchFamily="18" charset="0"/>
+                <a:ea typeface="Source Serif 4" pitchFamily="18" charset="-122"/>
+                <a:cs typeface="Source Serif 4" pitchFamily="18" charset="-120"/>
+              </a:rPr>
+              <a:t>Every candidate on a globe, by date</a:t>
+            </a:r>
+            <a:endParaRPr lang="en-US" sz="3600" dirty="0"/>
+          </a:p>
+        </p:txBody>
+      </p:sp>
+      <p:pic>
+        <p:nvPicPr>
+          <p:cNvPr id="4" name="Image 0" descr="Vue and CesiumJS viewer with the 2 May 2025 scene footprint, pack-ice mask and coloured iceberg candidates">    </p:cNvPr>
+          <p:cNvPicPr>
+            <a:picLocks noChangeAspect="1"/>
+          </p:cNvPicPr>
+          <p:nvPr/>
+        </p:nvPicPr>
+        <p:blipFill>
+          <a:blip r:embed="rId4"/>
+          <a:stretch/>
+        </p:blipFill>
+        <p:spPr>
+          <a:xfrm>
+            <a:off x="813816" y="1883664"/>
+            <a:ext cx="6858000" cy="3857625"/>
+          </a:xfrm>
+          <a:prstGeom prst="roundRect">
+            <a:avLst>
+              <a:gd name="adj" fmla="val 1974"/>
+            </a:avLst>
+          </a:prstGeom>
+        </p:spPr>
+      </p:pic>
+      <p:sp>
+        <p:nvSpPr>
+          <p:cNvPr id="5" name="Text 2"/>
+          <p:cNvSpPr/>
+          <p:nvPr/>
+        </p:nvSpPr>
+        <p:spPr>
+          <a:xfrm>
+            <a:off x="8033222" y="1884614"/>
+            <a:ext cx="3440485" cy="3982785"/>
+          </a:xfrm>
+          <a:prstGeom prst="rect">
+            <a:avLst/>
+          </a:prstGeom>
+          <a:noFill/>
+          <a:ln/>
+        </p:spPr>
+        <p:txBody>
+          <a:bodyPr wrap="square" lIns="0" tIns="0" rIns="0" bIns="0" rtlCol="0" anchor="t">
+            <a:normAutofit/>
+          </a:bodyPr>
+          <a:lstStyle/>
+          <a:p>
+            <a:pPr algn="l" marL="196342" indent="-196342">
+              <a:lnSpc>
+                <a:spcPts val="2160"/>
+              </a:lnSpc>
+              <a:buSzPct val="100000"/>
+              <a:buChar char="•"/>
+            </a:pPr>
+            <a:r>
+              <a:rPr lang="en-US" sz="1600" dirty="0">
+                <a:solidFill>
+                  <a:srgbClr val="46566A"/>
+                </a:solidFill>
+                <a:latin typeface="IBM Plex Sans" pitchFamily="34" charset="0"/>
+                <a:ea typeface="IBM Plex Sans" pitchFamily="34" charset="-122"/>
+                <a:cs typeface="IBM Plex Sans" pitchFamily="34" charset="-120"/>
+              </a:rPr>
+              <a:t>32 scenes (28 passes), 2019–2026, live on GitHub Pages</a:t>
+            </a:r>
+            <a:endParaRPr lang="en-US" sz="1600" dirty="0"/>
+          </a:p>
+          <a:p>
+            <a:pPr algn="l" marL="196342" indent="-196342">
+              <a:lnSpc>
+                <a:spcPts val="2160"/>
+              </a:lnSpc>
+              <a:buSzPct val="100000"/>
+              <a:buChar char="•"/>
+            </a:pPr>
+            <a:r>
+              <a:rPr lang="en-US" sz="1600" dirty="0">
+                <a:solidFill>
+                  <a:srgbClr val="46566A"/>
+                </a:solidFill>
+                <a:latin typeface="IBM Plex Sans" pitchFamily="34" charset="0"/>
+                <a:ea typeface="IBM Plex Sans" pitchFamily="34" charset="-122"/>
+                <a:cs typeface="IBM Plex Sans" pitchFamily="34" charset="-120"/>
+              </a:rPr>
+              <a:t>Cyan rings: THOR. Orange dots: CA-CFAR baseline</a:t>
+            </a:r>
+            <a:endParaRPr lang="en-US" sz="1600" dirty="0"/>
+          </a:p>
+          <a:p>
+            <a:pPr algn="l" marL="196342" indent="-196342">
+              <a:lnSpc>
+                <a:spcPts val="2160"/>
+              </a:lnSpc>
+              <a:buSzPct val="100000"/>
+              <a:buChar char="•"/>
+            </a:pPr>
+            <a:r>
+              <a:rPr lang="en-US" sz="1600" dirty="0">
+                <a:solidFill>
+                  <a:srgbClr val="46566A"/>
+                </a:solidFill>
+                <a:latin typeface="IBM Plex Sans" pitchFamily="34" charset="0"/>
+                <a:ea typeface="IBM Plex Sans" pitchFamily="34" charset="-122"/>
+                <a:cs typeface="IBM Plex Sans" pitchFamily="34" charset="-120"/>
+              </a:rPr>
+              <a:t>Test passes open their THOR vs. CFAR chart</a:t>
+            </a:r>
+            <a:endParaRPr lang="en-US" sz="1600" dirty="0"/>
+          </a:p>
+          <a:p>
+            <a:pPr algn="l" marL="196342" indent="-196342">
+              <a:lnSpc>
+                <a:spcPts val="2160"/>
+              </a:lnSpc>
+              <a:buSzPct val="100000"/>
+              <a:buChar char="•"/>
+            </a:pPr>
+            <a:r>
+              <a:rPr lang="en-US" sz="1600" dirty="0">
+                <a:solidFill>
+                  <a:srgbClr val="46566A"/>
+                </a:solidFill>
+                <a:latin typeface="IBM Plex Sans" pitchFamily="34" charset="0"/>
+                <a:ea typeface="IBM Plex Sans" pitchFamily="34" charset="-122"/>
+                <a:cs typeface="IBM Plex Sans" pitchFamily="34" charset="-120"/>
+              </a:rPr>
+              <a:t>Grey: within 5 km of pack ice, likely floes</a:t>
+            </a:r>
+            <a:endParaRPr lang="en-US" sz="1600" dirty="0"/>
+          </a:p>
+        </p:txBody>
+      </p:sp>
+      <p:sp>
+        <p:nvSpPr>
+          <p:cNvPr id="6" name="Text 3"/>
+          <p:cNvSpPr/>
+          <p:nvPr/>
+        </p:nvSpPr>
+        <p:spPr>
+          <a:xfrm>
+            <a:off x="812782" y="6238242"/>
+            <a:ext cx="4114800" cy="238810"/>
+          </a:xfrm>
+          <a:prstGeom prst="rect">
+            <a:avLst/>
+          </a:prstGeom>
+          <a:noFill/>
+          <a:ln/>
+        </p:spPr>
+        <p:txBody>
+          <a:bodyPr wrap="square" lIns="0" tIns="0" rIns="0" bIns="0" rtlCol="0" anchor="t">
+            <a:normAutofit/>
+          </a:bodyPr>
+          <a:lstStyle/>
+          <a:p>
+            <a:pPr algn="l" indent="0" marL="0">
+              <a:lnSpc>
+                <a:spcPts val="1680"/>
+              </a:lnSpc>
+              <a:buNone/>
+            </a:pPr>
+            <a:r>
+              <a:rPr lang="en-US" sz="1200" dirty="0">
+                <a:solidFill>
+                  <a:srgbClr val="5A6978"/>
+                </a:solidFill>
+                <a:latin typeface="IBM Plex Sans" pitchFamily="34" charset="0"/>
+                <a:ea typeface="IBM Plex Sans" pitchFamily="34" charset="-122"/>
+                <a:cs typeface="IBM Plex Sans" pitchFamily="34" charset="-120"/>
+              </a:rPr>
+              <a:t>Iceberg Alley SAR · Project brief</a:t>
+            </a:r>
+            <a:endParaRPr lang="en-US" sz="1200" dirty="0"/>
+          </a:p>
+        </p:txBody>
+      </p:sp>
+      <p:sp>
+        <p:nvSpPr>
+          <p:cNvPr id="7" name="Text 4"/>
+          <p:cNvSpPr/>
+          <p:nvPr/>
+        </p:nvSpPr>
+        <p:spPr>
+          <a:xfrm>
+            <a:off x="11146536" y="6238242"/>
+            <a:ext cx="237744" cy="238810"/>
+          </a:xfrm>
+          <a:prstGeom prst="rect">
+            <a:avLst/>
+          </a:prstGeom>
+          <a:noFill/>
+          <a:ln/>
+        </p:spPr>
+        <p:txBody>
+          <a:bodyPr wrap="square" lIns="0" tIns="0" rIns="0" bIns="0" rtlCol="0" anchor="t">
+            <a:normAutofit/>
+          </a:bodyPr>
+          <a:lstStyle/>
+          <a:p>
+            <a:pPr algn="r" indent="0" marL="0">
+              <a:lnSpc>
+                <a:spcPts val="1680"/>
+              </a:lnSpc>
+              <a:buNone/>
+            </a:pPr>
+            <a:r>
+              <a:rPr lang="en-US" sz="1200" dirty="0">
+                <a:solidFill>
+                  <a:srgbClr val="5A6978"/>
+                </a:solidFill>
+                <a:latin typeface="IBM Plex Sans" pitchFamily="34" charset="0"/>
+                <a:ea typeface="IBM Plex Sans" pitchFamily="34" charset="-122"/>
+                <a:cs typeface="IBM Plex Sans" pitchFamily="34" charset="-120"/>
+              </a:rPr>
+              <a:t>11</a:t>
+            </a:r>
+            <a:endParaRPr lang="en-US" sz="1200" dirty="0"/>
+          </a:p>
+        </p:txBody>
+      </p:sp>
+    </p:spTree>
+  </p:cSld>
+  <p:clrMapOvr>
+    <a:masterClrMapping/>
+  </p:clrMapOvr>
+</p:sld>
+</file>
+
+<file path=ppt/slides/slide7.xml><?xml version="1.0" encoding="utf-8"?>
+<p:sld xmlns:a="http://schemas.openxmlformats.org/drawingml/2006/main" xmlns:r="http://schemas.openxmlformats.org/officeDocument/2006/relationships" xmlns:p="http://schemas.openxmlformats.org/presentationml/2006/main">
+  <p:cSld name="Slide 7">
+    <p:bg>
+      <p:bgPr>
+        <a:solidFill>
+          <a:srgbClr val="F2A766"/>
+        </a:solidFill>
+      </p:bgPr>
+    </p:bg>
+    <p:spTree>
+      <p:nvGrpSpPr>
+        <p:cNvPr id="1" name=""/>
+        <p:cNvGrpSpPr/>
+        <p:nvPr/>
+      </p:nvGrpSpPr>
+      <p:grpSpPr>
+        <a:xfrm>
+          <a:off x="0" y="0"/>
+          <a:ext cx="0" cy="0"/>
+          <a:chOff x="0" y="0"/>
+          <a:chExt cx="0" cy="0"/>
+        </a:xfrm>
+      </p:grpSpPr>
+      <p:sp>
+        <p:nvSpPr>
+          <p:cNvPr id="2" name="Text 0"/>
+          <p:cNvSpPr/>
+          <p:nvPr/>
+        </p:nvSpPr>
+        <p:spPr>
+          <a:xfrm>
+            <a:off x="812782" y="1582446"/>
+            <a:ext cx="10883429" cy="238810"/>
+          </a:xfrm>
+          <a:prstGeom prst="rect">
+            <a:avLst/>
+          </a:prstGeom>
+          <a:noFill/>
+          <a:ln/>
+        </p:spPr>
+        <p:txBody>
+          <a:bodyPr wrap="square" lIns="0" tIns="0" rIns="0" bIns="0" rtlCol="0" anchor="t">
+            <a:normAutofit/>
+          </a:bodyPr>
+          <a:lstStyle/>
+          <a:p>
+            <a:pPr algn="l" indent="0" marL="0">
+              <a:lnSpc>
+                <a:spcPts val="1680"/>
+              </a:lnSpc>
+              <a:buNone/>
+            </a:pPr>
+            <a:r>
+              <a:rPr lang="en-US" sz="1200" b="1" spc="200" kern="0" dirty="0">
+                <a:solidFill>
+                  <a:srgbClr val="0E2233"/>
+                </a:solidFill>
+                <a:latin typeface="IBM Plex Sans" pitchFamily="34" charset="0"/>
+                <a:ea typeface="IBM Plex Sans" pitchFamily="34" charset="-122"/>
+                <a:cs typeface="IBM Plex Sans" pitchFamily="34" charset="-120"/>
+              </a:rPr>
+              <a:t>HEADLINE RESULT</a:t>
+            </a:r>
+            <a:endParaRPr lang="en-US" sz="1200" dirty="0"/>
+          </a:p>
+        </p:txBody>
+      </p:sp>
+      <p:sp>
+        <p:nvSpPr>
+          <p:cNvPr id="3" name="Text 1"/>
+          <p:cNvSpPr/>
+          <p:nvPr/>
+        </p:nvSpPr>
+        <p:spPr>
+          <a:xfrm>
+            <a:off x="812782" y="1948204"/>
+            <a:ext cx="10883429" cy="1549400"/>
+          </a:xfrm>
+          <a:prstGeom prst="rect">
+            <a:avLst/>
+          </a:prstGeom>
+          <a:noFill/>
+          <a:ln/>
+        </p:spPr>
+        <p:txBody>
+          <a:bodyPr wrap="square" lIns="0" tIns="0" rIns="0" bIns="0" rtlCol="0" anchor="t">
+            <a:normAutofit/>
+          </a:bodyPr>
+          <a:lstStyle/>
+          <a:p>
+            <a:pPr algn="l" indent="0" marL="0">
+              <a:lnSpc>
+                <a:spcPts val="12000"/>
+              </a:lnSpc>
+              <a:buNone/>
+            </a:pPr>
+            <a:r>
+              <a:rPr lang="en-US" sz="12000" b="1" dirty="0">
+                <a:solidFill>
+                  <a:srgbClr val="0E2233"/>
+                </a:solidFill>
+                <a:latin typeface="Source Serif 4" pitchFamily="18" charset="0"/>
+                <a:ea typeface="Source Serif 4" pitchFamily="18" charset="-122"/>
+                <a:cs typeface="Source Serif 4" pitchFamily="18" charset="-120"/>
+              </a:rPr>
+              <a:t>84%</a:t>
+            </a:r>
+            <a:endParaRPr lang="en-US" sz="12000" dirty="0"/>
+          </a:p>
+        </p:txBody>
+      </p:sp>
+      <p:sp>
+        <p:nvSpPr>
+          <p:cNvPr id="4" name="Text 2"/>
+          <p:cNvSpPr/>
+          <p:nvPr/>
+        </p:nvSpPr>
+        <p:spPr>
+          <a:xfrm>
+            <a:off x="812782" y="3624551"/>
+            <a:ext cx="9156700" cy="751862"/>
+          </a:xfrm>
+          <a:prstGeom prst="rect">
+            <a:avLst/>
+          </a:prstGeom>
+          <a:noFill/>
+          <a:ln/>
+        </p:spPr>
+        <p:txBody>
+          <a:bodyPr wrap="square" lIns="0" tIns="0" rIns="0" bIns="0" rtlCol="0" anchor="t">
+            <a:normAutofit/>
+          </a:bodyPr>
+          <a:lstStyle/>
+          <a:p>
+            <a:pPr algn="l" indent="0" marL="0">
+              <a:lnSpc>
+                <a:spcPts val="2860"/>
+              </a:lnSpc>
+              <a:buNone/>
+            </a:pPr>
+            <a:r>
+              <a:rPr lang="en-US" sz="2200" dirty="0">
+                <a:solidFill>
+                  <a:srgbClr val="0E2233"/>
+                </a:solidFill>
+                <a:latin typeface="IBM Plex Sans" pitchFamily="34" charset="0"/>
+                <a:ea typeface="IBM Plex Sans" pitchFamily="34" charset="-122"/>
+                <a:cs typeface="IBM Plex Sans" pitchFamily="34" charset="-120"/>
+              </a:rPr>
+              <a:t>of the icebergs Ice Patrol analysts marked on four held-out passes were found by THOR: </a:t>
+            </a:r>
+            <a:r>
+              <a:rPr lang="en-US" sz="2200" b="1" dirty="0">
+                <a:solidFill>
+                  <a:srgbClr val="0E2233"/>
+                </a:solidFill>
+                <a:latin typeface="IBM Plex Sans" pitchFamily="34" charset="0"/>
+                <a:ea typeface="IBM Plex Sans" pitchFamily="34" charset="-122"/>
+                <a:cs typeface="IBM Plex Sans" pitchFamily="34" charset="-120"/>
+              </a:rPr>
+              <a:t>431 of 512</a:t>
+            </a:r>
+            <a:r>
+              <a:rPr lang="en-US" sz="2200" dirty="0">
+                <a:solidFill>
+                  <a:srgbClr val="0E2233"/>
+                </a:solidFill>
+                <a:latin typeface="IBM Plex Sans" pitchFamily="34" charset="0"/>
+                <a:ea typeface="IBM Plex Sans" pitchFamily="34" charset="-122"/>
+                <a:cs typeface="IBM Plex Sans" pitchFamily="34" charset="-120"/>
+              </a:rPr>
+              <a:t>. A classical CA-CFAR found 380, with as many detections.</a:t>
+            </a:r>
+            <a:endParaRPr lang="en-US" sz="2200" dirty="0"/>
+          </a:p>
+        </p:txBody>
+      </p:sp>
+      <p:sp>
+        <p:nvSpPr>
+          <p:cNvPr id="5" name="Text 3"/>
+          <p:cNvSpPr/>
+          <p:nvPr/>
+        </p:nvSpPr>
+        <p:spPr>
+          <a:xfrm>
+            <a:off x="812782" y="4823396"/>
+            <a:ext cx="9156700" cy="594374"/>
+          </a:xfrm>
+          <a:prstGeom prst="rect">
+            <a:avLst/>
+          </a:prstGeom>
+          <a:noFill/>
+          <a:ln/>
+        </p:spPr>
+        <p:txBody>
+          <a:bodyPr wrap="square" lIns="0" tIns="0" rIns="0" bIns="0" rtlCol="0" anchor="t">
+            <a:normAutofit/>
+          </a:bodyPr>
+          <a:lstStyle/>
+          <a:p>
+            <a:pPr algn="l" indent="0" marL="0">
+              <a:lnSpc>
+                <a:spcPts val="2240"/>
+              </a:lnSpc>
+              <a:buNone/>
+            </a:pPr>
+            <a:r>
+              <a:rPr lang="en-US" sz="1600" dirty="0">
+                <a:solidFill>
+                  <a:srgbClr val="2A3A4A"/>
+                </a:solidFill>
+                <a:latin typeface="IBM Plex Sans" pitchFamily="34" charset="0"/>
+                <a:ea typeface="IBM Plex Sans" pitchFamily="34" charset="-122"/>
+                <a:cs typeface="IBM Plex Sans" pitchFamily="34" charset="-120"/>
+              </a:rPr>
+              <a:t>April 2019 · same masks, labels, matching and detection count · large bergs: 11 of 14 vs. 4</a:t>
+            </a:r>
+            <a:endParaRPr lang="en-US" sz="1600" dirty="0"/>
+          </a:p>
+        </p:txBody>
+      </p:sp>
+      <p:sp>
+        <p:nvSpPr>
+          <p:cNvPr id="6" name="Text 4"/>
+          <p:cNvSpPr/>
+          <p:nvPr/>
+        </p:nvSpPr>
+        <p:spPr>
+          <a:xfrm>
+            <a:off x="812782" y="6238242"/>
+            <a:ext cx="4114800" cy="238810"/>
+          </a:xfrm>
+          <a:prstGeom prst="rect">
+            <a:avLst/>
+          </a:prstGeom>
+          <a:noFill/>
+          <a:ln/>
+        </p:spPr>
+        <p:txBody>
+          <a:bodyPr wrap="square" lIns="0" tIns="0" rIns="0" bIns="0" rtlCol="0" anchor="t">
+            <a:normAutofit/>
+          </a:bodyPr>
+          <a:lstStyle/>
+          <a:p>
+            <a:pPr algn="l" indent="0" marL="0">
+              <a:lnSpc>
+                <a:spcPts val="1680"/>
+              </a:lnSpc>
+              <a:buNone/>
+            </a:pPr>
+            <a:r>
+              <a:rPr lang="en-US" sz="1200" dirty="0">
+                <a:solidFill>
+                  <a:srgbClr val="2A3A4A"/>
+                </a:solidFill>
+                <a:latin typeface="IBM Plex Sans" pitchFamily="34" charset="0"/>
+                <a:ea typeface="IBM Plex Sans" pitchFamily="34" charset="-122"/>
+                <a:cs typeface="IBM Plex Sans" pitchFamily="34" charset="-120"/>
+              </a:rPr>
+              <a:t>Iceberg Alley SAR · Project brief</a:t>
+            </a:r>
+            <a:endParaRPr lang="en-US" sz="1200" dirty="0"/>
+          </a:p>
+        </p:txBody>
+      </p:sp>
+      <p:sp>
+        <p:nvSpPr>
+          <p:cNvPr id="7" name="Text 5"/>
+          <p:cNvSpPr/>
+          <p:nvPr/>
+        </p:nvSpPr>
+        <p:spPr>
+          <a:xfrm>
+            <a:off x="11237976" y="6238242"/>
+            <a:ext cx="146304" cy="238810"/>
+          </a:xfrm>
+          <a:prstGeom prst="rect">
+            <a:avLst/>
+          </a:prstGeom>
+          <a:noFill/>
+          <a:ln/>
+        </p:spPr>
+        <p:txBody>
+          <a:bodyPr wrap="square" lIns="0" tIns="0" rIns="0" bIns="0" rtlCol="0" anchor="t">
+            <a:normAutofit/>
+          </a:bodyPr>
+          <a:lstStyle/>
+          <a:p>
+            <a:pPr algn="r" indent="0" marL="0">
+              <a:lnSpc>
+                <a:spcPts val="1680"/>
+              </a:lnSpc>
+              <a:buNone/>
+            </a:pPr>
+            <a:r>
+              <a:rPr lang="en-US" sz="1200" dirty="0">
+                <a:solidFill>
+                  <a:srgbClr val="2A3A4A"/>
+                </a:solidFill>
+                <a:latin typeface="IBM Plex Sans" pitchFamily="34" charset="0"/>
+                <a:ea typeface="IBM Plex Sans" pitchFamily="34" charset="-122"/>
+                <a:cs typeface="IBM Plex Sans" pitchFamily="34" charset="-120"/>
+              </a:rPr>
+              <a:t>3</a:t>
+            </a:r>
+            <a:endParaRPr lang="en-US" sz="1200" dirty="0"/>
+          </a:p>
+        </p:txBody>
+      </p:sp>
+    </p:spTree>
+  </p:cSld>
+  <p:clrMapOvr>
+    <a:masterClrMapping/>
+  </p:clrMapOvr>
+</p:sld>
+</file>
+
+<file path=ppt/slides/slide8.xml><?xml version="1.0" encoding="utf-8"?>
+<p:sld xmlns:a="http://schemas.openxmlformats.org/drawingml/2006/main" xmlns:r="http://schemas.openxmlformats.org/officeDocument/2006/relationships" xmlns:p="http://schemas.openxmlformats.org/presentationml/2006/main">
+  <p:cSld name="Slide 8">
+    <p:bg>
+      <p:bgPr>
+        <a:solidFill>
+          <a:srgbClr val="F4F6F3"/>
+        </a:solidFill>
+      </p:bgPr>
+    </p:bg>
+    <p:spTree>
+      <p:nvGrpSpPr>
+        <p:cNvPr id="1" name=""/>
+        <p:cNvGrpSpPr/>
+        <p:nvPr/>
+      </p:nvGrpSpPr>
+      <p:grpSpPr>
+        <a:xfrm>
+          <a:off x="0" y="0"/>
+          <a:ext cx="0" cy="0"/>
+          <a:chOff x="0" y="0"/>
+          <a:chExt cx="0" cy="0"/>
+        </a:xfrm>
+      </p:grpSpPr>
       <p:sp>
         <p:nvSpPr>
           <p:cNvPr id="2" name="Text 0"/>
@@ -5191,7 +9309,7 @@
                           <a:ea typeface="IBM Plex Sans" pitchFamily="34" charset="-122"/>
                           <a:cs typeface="IBM Plex Sans" pitchFamily="34" charset="-120"/>
                         </a:rPr>
-                        <a:t>4 frames, 512 bergs</a:t>
+                        <a:t>4 passes, 512 bergs</a:t>
                       </a:r>
                       <a:endParaRPr lang="en-US" sz="1600" dirty="0">
                         <a:latin typeface="IBM Plex Sans" charset="0"/>
@@ -6322,4744 +10440,7 @@
                 <a:ea typeface="IBM Plex Sans" pitchFamily="34" charset="-122"/>
                 <a:cs typeface="IBM Plex Sans" pitchFamily="34" charset="-120"/>
               </a:rPr>
-              <a:t>Recall vs. open-water detections, 4 held-out frames. Square: CFAR at PFA 10⁻⁶.</a:t>
-            </a:r>
-            <a:endParaRPr lang="en-US" sz="1200" dirty="0"/>
-          </a:p>
-        </p:txBody>
-      </p:sp>
-      <p:sp>
-        <p:nvSpPr>
-          <p:cNvPr id="9" name="Text 5"/>
-          <p:cNvSpPr/>
-          <p:nvPr/>
-        </p:nvSpPr>
-        <p:spPr>
-          <a:xfrm>
-            <a:off x="812782" y="6238246"/>
-            <a:ext cx="4114800" cy="238810"/>
-          </a:xfrm>
-          <a:prstGeom prst="rect">
-            <a:avLst/>
-          </a:prstGeom>
-          <a:noFill/>
-          <a:ln/>
-        </p:spPr>
-        <p:txBody>
-          <a:bodyPr wrap="square" lIns="0" tIns="0" rIns="0" bIns="0" rtlCol="0" anchor="t">
-            <a:normAutofit/>
-          </a:bodyPr>
-          <a:lstStyle/>
-          <a:p>
-            <a:pPr algn="l" indent="0" marL="0">
-              <a:lnSpc>
-                <a:spcPts val="1680"/>
-              </a:lnSpc>
-              <a:buNone/>
-            </a:pPr>
-            <a:r>
-              <a:rPr lang="en-US" sz="1200" dirty="0">
-                <a:solidFill>
-                  <a:srgbClr val="5A6978"/>
-                </a:solidFill>
-                <a:latin typeface="IBM Plex Sans" pitchFamily="34" charset="0"/>
-                <a:ea typeface="IBM Plex Sans" pitchFamily="34" charset="-122"/>
-                <a:cs typeface="IBM Plex Sans" pitchFamily="34" charset="-120"/>
-              </a:rPr>
-              <a:t>Iceberg Alley SAR · Project brief</a:t>
-            </a:r>
-            <a:endParaRPr lang="en-US" sz="1200" dirty="0"/>
-          </a:p>
-        </p:txBody>
-      </p:sp>
-      <p:sp>
-        <p:nvSpPr>
-          <p:cNvPr id="10" name="Text 6"/>
-          <p:cNvSpPr/>
-          <p:nvPr/>
-        </p:nvSpPr>
-        <p:spPr>
-          <a:xfrm>
-            <a:off x="11146536" y="6238246"/>
-            <a:ext cx="237744" cy="238810"/>
-          </a:xfrm>
-          <a:prstGeom prst="rect">
-            <a:avLst/>
-          </a:prstGeom>
-          <a:noFill/>
-          <a:ln/>
-        </p:spPr>
-        <p:txBody>
-          <a:bodyPr wrap="square" lIns="0" tIns="0" rIns="0" bIns="0" rtlCol="0" anchor="t">
-            <a:normAutofit/>
-          </a:bodyPr>
-          <a:lstStyle/>
-          <a:p>
-            <a:pPr algn="r" indent="0" marL="0">
-              <a:lnSpc>
-                <a:spcPts val="1680"/>
-              </a:lnSpc>
-              <a:buNone/>
-            </a:pPr>
-            <a:r>
-              <a:rPr lang="en-US" sz="1200" dirty="0">
-                <a:solidFill>
-                  <a:srgbClr val="5A6978"/>
-                </a:solidFill>
-                <a:latin typeface="IBM Plex Sans" pitchFamily="34" charset="0"/>
-                <a:ea typeface="IBM Plex Sans" pitchFamily="34" charset="-122"/>
-                <a:cs typeface="IBM Plex Sans" pitchFamily="34" charset="-120"/>
-              </a:rPr>
-              <a:t>11</a:t>
-            </a:r>
-            <a:endParaRPr lang="en-US" sz="1200" dirty="0"/>
-          </a:p>
-        </p:txBody>
-      </p:sp>
-    </p:spTree>
-  </p:cSld>
-  <p:clrMapOvr>
-    <a:masterClrMapping/>
-  </p:clrMapOvr>
-</p:sld>
-</file>
-
-<file path=ppt/slides/slide2.xml><?xml version="1.0" encoding="utf-8"?>
-<p:sld xmlns:a="http://schemas.openxmlformats.org/drawingml/2006/main" xmlns:r="http://schemas.openxmlformats.org/officeDocument/2006/relationships" xmlns:p="http://schemas.openxmlformats.org/presentationml/2006/main">
-  <p:cSld name="Slide 2">
-    <p:bg>
-      <p:bgPr>
-        <a:solidFill>
-          <a:srgbClr val="F4F6F3"/>
-        </a:solidFill>
-      </p:bgPr>
-    </p:bg>
-    <p:spTree>
-      <p:nvGrpSpPr>
-        <p:cNvPr id="1" name=""/>
-        <p:cNvGrpSpPr/>
-        <p:nvPr/>
-      </p:nvGrpSpPr>
-      <p:grpSpPr>
-        <a:xfrm>
-          <a:off x="0" y="0"/>
-          <a:ext cx="0" cy="0"/>
-          <a:chOff x="0" y="0"/>
-          <a:chExt cx="0" cy="0"/>
-        </a:xfrm>
-      </p:grpSpPr>
-      <p:sp>
-        <p:nvSpPr>
-          <p:cNvPr id="2" name="Text 0"/>
-          <p:cNvSpPr/>
-          <p:nvPr/>
-        </p:nvSpPr>
-        <p:spPr>
-          <a:xfrm>
-            <a:off x="812782" y="812781"/>
-            <a:ext cx="10883429" cy="238810"/>
-          </a:xfrm>
-          <a:prstGeom prst="rect">
-            <a:avLst/>
-          </a:prstGeom>
-          <a:noFill/>
-          <a:ln/>
-        </p:spPr>
-        <p:txBody>
-          <a:bodyPr wrap="square" lIns="0" tIns="0" rIns="0" bIns="0" rtlCol="0" anchor="t">
-            <a:normAutofit/>
-          </a:bodyPr>
-          <a:lstStyle/>
-          <a:p>
-            <a:pPr algn="l" indent="0" marL="0">
-              <a:lnSpc>
-                <a:spcPts val="1680"/>
-              </a:lnSpc>
-              <a:buNone/>
-            </a:pPr>
-            <a:r>
-              <a:rPr lang="en-US" sz="1200" b="1" spc="200" kern="0" dirty="0">
-                <a:solidFill>
-                  <a:srgbClr val="A84B1A"/>
-                </a:solidFill>
-                <a:latin typeface="IBM Plex Sans" pitchFamily="34" charset="0"/>
-                <a:ea typeface="IBM Plex Sans" pitchFamily="34" charset="-122"/>
-                <a:cs typeface="IBM Plex Sans" pitchFamily="34" charset="-120"/>
-              </a:rPr>
-              <a:t>THE PROBLEM</a:t>
-            </a:r>
-            <a:endParaRPr lang="en-US" sz="1200" dirty="0"/>
-          </a:p>
-        </p:txBody>
-      </p:sp>
-      <p:sp>
-        <p:nvSpPr>
-          <p:cNvPr id="3" name="Text 1"/>
-          <p:cNvSpPr/>
-          <p:nvPr>
-            <p:ph type="title"/>
-          </p:nvPr>
-        </p:nvSpPr>
-        <p:spPr>
-          <a:xfrm>
-            <a:off x="812782" y="1127756"/>
-            <a:ext cx="10883429" cy="528259"/>
-          </a:xfrm>
-          <a:prstGeom prst="rect">
-            <a:avLst/>
-          </a:prstGeom>
-          <a:noFill/>
-          <a:ln/>
-        </p:spPr>
-        <p:txBody>
-          <a:bodyPr wrap="square" lIns="0" tIns="0" rIns="0" bIns="0" rtlCol="0" anchor="t">
-            <a:normAutofit/>
-          </a:bodyPr>
-          <a:lstStyle/>
-          <a:p>
-            <a:pPr algn="l" indent="0" marL="0">
-              <a:lnSpc>
-                <a:spcPts val="3960"/>
-              </a:lnSpc>
-              <a:buNone/>
-            </a:pPr>
-            <a:r>
-              <a:rPr lang="en-US" sz="3600" b="1" i="0" dirty="0">
-                <a:solidFill>
-                  <a:srgbClr val="0E2233"/>
-                </a:solidFill>
-                <a:latin typeface="Source Serif 4" pitchFamily="18" charset="0"/>
-                <a:ea typeface="Source Serif 4" pitchFamily="18" charset="-122"/>
-                <a:cs typeface="Source Serif 4" pitchFamily="18" charset="-120"/>
-              </a:rPr>
-              <a:t>Every spring, icebergs drift into busy water</a:t>
-            </a:r>
-            <a:endParaRPr lang="en-US" sz="3600" dirty="0"/>
-          </a:p>
-        </p:txBody>
-      </p:sp>
-      <p:sp>
-        <p:nvSpPr>
-          <p:cNvPr id="4" name="Shape 2"/>
-          <p:cNvSpPr/>
-          <p:nvPr/>
-        </p:nvSpPr>
-        <p:spPr>
-          <a:xfrm>
-            <a:off x="815957" y="1938572"/>
-            <a:ext cx="3380347" cy="3900253"/>
-          </a:xfrm>
-          <a:prstGeom prst="roundRect">
-            <a:avLst>
-              <a:gd name="adj" fmla="val 2912"/>
-            </a:avLst>
-          </a:prstGeom>
-          <a:solidFill>
-            <a:srgbClr val="FBFCFA"/>
-          </a:solidFill>
-          <a:ln w="6350">
-            <a:solidFill>
-              <a:srgbClr val="D5DEE0"/>
-            </a:solidFill>
-            <a:prstDash val="solid"/>
-          </a:ln>
-        </p:spPr>
-      </p:sp>
-      <p:sp>
-        <p:nvSpPr>
-          <p:cNvPr id="5" name="Text 3"/>
-          <p:cNvSpPr/>
-          <p:nvPr/>
-        </p:nvSpPr>
-        <p:spPr>
-          <a:xfrm>
-            <a:off x="1123337" y="2245951"/>
-            <a:ext cx="2848555" cy="238810"/>
-          </a:xfrm>
-          <a:prstGeom prst="rect">
-            <a:avLst/>
-          </a:prstGeom>
-          <a:noFill/>
-          <a:ln/>
-        </p:spPr>
-        <p:txBody>
-          <a:bodyPr wrap="square" lIns="0" tIns="0" rIns="0" bIns="0" rtlCol="0" anchor="t">
-            <a:normAutofit/>
-          </a:bodyPr>
-          <a:lstStyle/>
-          <a:p>
-            <a:pPr algn="l" indent="0" marL="0">
-              <a:lnSpc>
-                <a:spcPts val="1680"/>
-              </a:lnSpc>
-              <a:buNone/>
-            </a:pPr>
-            <a:r>
-              <a:rPr lang="en-US" sz="1200" b="1" dirty="0">
-                <a:solidFill>
-                  <a:srgbClr val="A84B1A"/>
-                </a:solidFill>
-                <a:latin typeface="IBM Plex Sans" pitchFamily="34" charset="0"/>
-                <a:ea typeface="IBM Plex Sans" pitchFamily="34" charset="-122"/>
-                <a:cs typeface="IBM Plex Sans" pitchFamily="34" charset="-120"/>
-              </a:rPr>
-              <a:t>01</a:t>
-            </a:r>
-            <a:endParaRPr lang="en-US" sz="1200" dirty="0"/>
-          </a:p>
-        </p:txBody>
-      </p:sp>
-      <p:sp>
-        <p:nvSpPr>
-          <p:cNvPr id="6" name="Text 4"/>
-          <p:cNvSpPr/>
-          <p:nvPr/>
-        </p:nvSpPr>
-        <p:spPr>
-          <a:xfrm>
-            <a:off x="1123337" y="2586362"/>
-            <a:ext cx="2848555" cy="360669"/>
-          </a:xfrm>
-          <a:prstGeom prst="rect">
-            <a:avLst/>
-          </a:prstGeom>
-          <a:noFill/>
-          <a:ln/>
-        </p:spPr>
-        <p:txBody>
-          <a:bodyPr wrap="square" lIns="0" tIns="0" rIns="0" bIns="0" rtlCol="0" anchor="t">
-            <a:normAutofit/>
-          </a:bodyPr>
-          <a:lstStyle/>
-          <a:p>
-            <a:pPr algn="l" indent="0" marL="0">
-              <a:lnSpc>
-                <a:spcPts val="2640"/>
-              </a:lnSpc>
-              <a:buNone/>
-            </a:pPr>
-            <a:r>
-              <a:rPr lang="en-US" sz="2200" b="1" dirty="0">
-                <a:solidFill>
-                  <a:srgbClr val="0E2233"/>
-                </a:solidFill>
-                <a:latin typeface="Source Serif 4" pitchFamily="18" charset="0"/>
-                <a:ea typeface="Source Serif 4" pitchFamily="18" charset="-122"/>
-                <a:cs typeface="Source Serif 4" pitchFamily="18" charset="-120"/>
-              </a:rPr>
-              <a:t>The hazard</a:t>
-            </a:r>
-            <a:endParaRPr lang="en-US" sz="2200" dirty="0"/>
-          </a:p>
-        </p:txBody>
-      </p:sp>
-      <p:sp>
-        <p:nvSpPr>
-          <p:cNvPr id="7" name="Text 5"/>
-          <p:cNvSpPr/>
-          <p:nvPr/>
-        </p:nvSpPr>
-        <p:spPr>
-          <a:xfrm>
-            <a:off x="1123337" y="3048631"/>
-            <a:ext cx="2848555" cy="1447836"/>
-          </a:xfrm>
-          <a:prstGeom prst="rect">
-            <a:avLst/>
-          </a:prstGeom>
-          <a:noFill/>
-          <a:ln/>
-        </p:spPr>
-        <p:txBody>
-          <a:bodyPr wrap="square" lIns="0" tIns="0" rIns="0" bIns="0" rtlCol="0" anchor="t">
-            <a:normAutofit/>
-          </a:bodyPr>
-          <a:lstStyle/>
-          <a:p>
-            <a:pPr algn="l" indent="0" marL="0">
-              <a:lnSpc>
-                <a:spcPts val="2240"/>
-              </a:lnSpc>
-              <a:buNone/>
-            </a:pPr>
-            <a:r>
-              <a:rPr lang="en-US" sz="1600" dirty="0">
-                <a:solidFill>
-                  <a:srgbClr val="46566A"/>
-                </a:solidFill>
-                <a:latin typeface="IBM Plex Sans" pitchFamily="34" charset="0"/>
-                <a:ea typeface="IBM Plex Sans" pitchFamily="34" charset="-122"/>
-                <a:cs typeface="IBM Plex Sans" pitchFamily="34" charset="-120"/>
-              </a:rPr>
-              <a:t>Greenland bergs ride the Labrador Current down "Iceberg Alley", past shipping lanes, fishing grounds and offshore platforms.</a:t>
-            </a:r>
-            <a:endParaRPr lang="en-US" sz="1600" dirty="0"/>
-          </a:p>
-        </p:txBody>
-      </p:sp>
-      <p:sp>
-        <p:nvSpPr>
-          <p:cNvPr id="8" name="Shape 6"/>
-          <p:cNvSpPr/>
-          <p:nvPr/>
-        </p:nvSpPr>
-        <p:spPr>
-          <a:xfrm>
-            <a:off x="4405781" y="1938572"/>
-            <a:ext cx="3380437" cy="3900253"/>
-          </a:xfrm>
-          <a:prstGeom prst="roundRect">
-            <a:avLst>
-              <a:gd name="adj" fmla="val 2912"/>
-            </a:avLst>
-          </a:prstGeom>
-          <a:solidFill>
-            <a:srgbClr val="FBFCFA"/>
-          </a:solidFill>
-          <a:ln w="6350">
-            <a:solidFill>
-              <a:srgbClr val="D5DEE0"/>
-            </a:solidFill>
-            <a:prstDash val="solid"/>
-          </a:ln>
-        </p:spPr>
-      </p:sp>
-      <p:sp>
-        <p:nvSpPr>
-          <p:cNvPr id="9" name="Text 7"/>
-          <p:cNvSpPr/>
-          <p:nvPr/>
-        </p:nvSpPr>
-        <p:spPr>
-          <a:xfrm>
-            <a:off x="4713161" y="2245951"/>
-            <a:ext cx="2848648" cy="238810"/>
-          </a:xfrm>
-          <a:prstGeom prst="rect">
-            <a:avLst/>
-          </a:prstGeom>
-          <a:noFill/>
-          <a:ln/>
-        </p:spPr>
-        <p:txBody>
-          <a:bodyPr wrap="square" lIns="0" tIns="0" rIns="0" bIns="0" rtlCol="0" anchor="t">
-            <a:normAutofit/>
-          </a:bodyPr>
-          <a:lstStyle/>
-          <a:p>
-            <a:pPr algn="l" indent="0" marL="0">
-              <a:lnSpc>
-                <a:spcPts val="1680"/>
-              </a:lnSpc>
-              <a:buNone/>
-            </a:pPr>
-            <a:r>
-              <a:rPr lang="en-US" sz="1200" b="1" dirty="0">
-                <a:solidFill>
-                  <a:srgbClr val="A84B1A"/>
-                </a:solidFill>
-                <a:latin typeface="IBM Plex Sans" pitchFamily="34" charset="0"/>
-                <a:ea typeface="IBM Plex Sans" pitchFamily="34" charset="-122"/>
-                <a:cs typeface="IBM Plex Sans" pitchFamily="34" charset="-120"/>
-              </a:rPr>
-              <a:t>02</a:t>
-            </a:r>
-            <a:endParaRPr lang="en-US" sz="1200" dirty="0"/>
-          </a:p>
-        </p:txBody>
-      </p:sp>
-      <p:sp>
-        <p:nvSpPr>
-          <p:cNvPr id="10" name="Text 8"/>
-          <p:cNvSpPr/>
-          <p:nvPr/>
-        </p:nvSpPr>
-        <p:spPr>
-          <a:xfrm>
-            <a:off x="4713161" y="2586362"/>
-            <a:ext cx="2848648" cy="360669"/>
-          </a:xfrm>
-          <a:prstGeom prst="rect">
-            <a:avLst/>
-          </a:prstGeom>
-          <a:noFill/>
-          <a:ln/>
-        </p:spPr>
-        <p:txBody>
-          <a:bodyPr wrap="square" lIns="0" tIns="0" rIns="0" bIns="0" rtlCol="0" anchor="t">
-            <a:normAutofit/>
-          </a:bodyPr>
-          <a:lstStyle/>
-          <a:p>
-            <a:pPr algn="l" indent="0" marL="0">
-              <a:lnSpc>
-                <a:spcPts val="2640"/>
-              </a:lnSpc>
-              <a:buNone/>
-            </a:pPr>
-            <a:r>
-              <a:rPr lang="en-US" sz="2200" b="1" dirty="0">
-                <a:solidFill>
-                  <a:srgbClr val="0E2233"/>
-                </a:solidFill>
-                <a:latin typeface="Source Serif 4" pitchFamily="18" charset="0"/>
-                <a:ea typeface="Source Serif 4" pitchFamily="18" charset="-122"/>
-                <a:cs typeface="Source Serif 4" pitchFamily="18" charset="-120"/>
-              </a:rPr>
-              <a:t>The gap</a:t>
-            </a:r>
-            <a:endParaRPr lang="en-US" sz="2200" dirty="0"/>
-          </a:p>
-        </p:txBody>
-      </p:sp>
-      <p:sp>
-        <p:nvSpPr>
-          <p:cNvPr id="11" name="Text 9"/>
-          <p:cNvSpPr/>
-          <p:nvPr/>
-        </p:nvSpPr>
-        <p:spPr>
-          <a:xfrm>
-            <a:off x="4713161" y="3048631"/>
-            <a:ext cx="2848648" cy="1163349"/>
-          </a:xfrm>
-          <a:prstGeom prst="rect">
-            <a:avLst/>
-          </a:prstGeom>
-          <a:noFill/>
-          <a:ln/>
-        </p:spPr>
-        <p:txBody>
-          <a:bodyPr wrap="square" lIns="0" tIns="0" rIns="0" bIns="0" rtlCol="0" anchor="t">
-            <a:normAutofit/>
-          </a:bodyPr>
-          <a:lstStyle/>
-          <a:p>
-            <a:pPr algn="l" indent="0" marL="0">
-              <a:lnSpc>
-                <a:spcPts val="2240"/>
-              </a:lnSpc>
-              <a:buNone/>
-            </a:pPr>
-            <a:r>
-              <a:rPr lang="en-US" sz="1600" dirty="0">
-                <a:solidFill>
-                  <a:srgbClr val="46566A"/>
-                </a:solidFill>
-                <a:latin typeface="IBM Plex Sans" pitchFamily="34" charset="0"/>
-                <a:ea typeface="IBM Plex Sans" pitchFamily="34" charset="-122"/>
-                <a:cs typeface="IBM Plex Sans" pitchFamily="34" charset="-120"/>
-              </a:rPr>
-              <a:t>Aircraft reconnaissance is costly and limited by weather, and this coast is often fogged in.</a:t>
-            </a:r>
-            <a:endParaRPr lang="en-US" sz="1600" dirty="0"/>
-          </a:p>
-        </p:txBody>
-      </p:sp>
-      <p:sp>
-        <p:nvSpPr>
-          <p:cNvPr id="12" name="Shape 10"/>
-          <p:cNvSpPr/>
-          <p:nvPr/>
-        </p:nvSpPr>
-        <p:spPr>
-          <a:xfrm>
-            <a:off x="7995696" y="1938572"/>
-            <a:ext cx="3380347" cy="3900253"/>
-          </a:xfrm>
-          <a:prstGeom prst="roundRect">
-            <a:avLst>
-              <a:gd name="adj" fmla="val 2912"/>
-            </a:avLst>
-          </a:prstGeom>
-          <a:solidFill>
-            <a:srgbClr val="FBFCFA"/>
-          </a:solidFill>
-          <a:ln w="6350">
-            <a:solidFill>
-              <a:srgbClr val="D5DEE0"/>
-            </a:solidFill>
-            <a:prstDash val="solid"/>
-          </a:ln>
-        </p:spPr>
-      </p:sp>
-      <p:sp>
-        <p:nvSpPr>
-          <p:cNvPr id="13" name="Text 11"/>
-          <p:cNvSpPr/>
-          <p:nvPr/>
-        </p:nvSpPr>
-        <p:spPr>
-          <a:xfrm>
-            <a:off x="8303075" y="2245951"/>
-            <a:ext cx="2848555" cy="238810"/>
-          </a:xfrm>
-          <a:prstGeom prst="rect">
-            <a:avLst/>
-          </a:prstGeom>
-          <a:noFill/>
-          <a:ln/>
-        </p:spPr>
-        <p:txBody>
-          <a:bodyPr wrap="square" lIns="0" tIns="0" rIns="0" bIns="0" rtlCol="0" anchor="t">
-            <a:normAutofit/>
-          </a:bodyPr>
-          <a:lstStyle/>
-          <a:p>
-            <a:pPr algn="l" indent="0" marL="0">
-              <a:lnSpc>
-                <a:spcPts val="1680"/>
-              </a:lnSpc>
-              <a:buNone/>
-            </a:pPr>
-            <a:r>
-              <a:rPr lang="en-US" sz="1200" b="1" dirty="0">
-                <a:solidFill>
-                  <a:srgbClr val="A84B1A"/>
-                </a:solidFill>
-                <a:latin typeface="IBM Plex Sans" pitchFamily="34" charset="0"/>
-                <a:ea typeface="IBM Plex Sans" pitchFamily="34" charset="-122"/>
-                <a:cs typeface="IBM Plex Sans" pitchFamily="34" charset="-120"/>
-              </a:rPr>
-              <a:t>03</a:t>
-            </a:r>
-            <a:endParaRPr lang="en-US" sz="1200" dirty="0"/>
-          </a:p>
-        </p:txBody>
-      </p:sp>
-      <p:sp>
-        <p:nvSpPr>
-          <p:cNvPr id="14" name="Text 12"/>
-          <p:cNvSpPr/>
-          <p:nvPr/>
-        </p:nvSpPr>
-        <p:spPr>
-          <a:xfrm>
-            <a:off x="8303075" y="2586362"/>
-            <a:ext cx="2848555" cy="360669"/>
-          </a:xfrm>
-          <a:prstGeom prst="rect">
-            <a:avLst/>
-          </a:prstGeom>
-          <a:noFill/>
-          <a:ln/>
-        </p:spPr>
-        <p:txBody>
-          <a:bodyPr wrap="square" lIns="0" tIns="0" rIns="0" bIns="0" rtlCol="0" anchor="t">
-            <a:normAutofit/>
-          </a:bodyPr>
-          <a:lstStyle/>
-          <a:p>
-            <a:pPr algn="l" indent="0" marL="0">
-              <a:lnSpc>
-                <a:spcPts val="2640"/>
-              </a:lnSpc>
-              <a:buNone/>
-            </a:pPr>
-            <a:r>
-              <a:rPr lang="en-US" sz="2200" b="1" dirty="0">
-                <a:solidFill>
-                  <a:srgbClr val="0E2233"/>
-                </a:solidFill>
-                <a:latin typeface="Source Serif 4" pitchFamily="18" charset="0"/>
-                <a:ea typeface="Source Serif 4" pitchFamily="18" charset="-122"/>
-                <a:cs typeface="Source Serif 4" pitchFamily="18" charset="-120"/>
-              </a:rPr>
-              <a:t>The idea</a:t>
-            </a:r>
-            <a:endParaRPr lang="en-US" sz="2200" dirty="0"/>
-          </a:p>
-        </p:txBody>
-      </p:sp>
-      <p:sp>
-        <p:nvSpPr>
-          <p:cNvPr id="15" name="Text 13"/>
-          <p:cNvSpPr/>
-          <p:nvPr/>
-        </p:nvSpPr>
-        <p:spPr>
-          <a:xfrm>
-            <a:off x="8303075" y="3048631"/>
-            <a:ext cx="2848555" cy="1163349"/>
-          </a:xfrm>
-          <a:prstGeom prst="rect">
-            <a:avLst/>
-          </a:prstGeom>
-          <a:noFill/>
-          <a:ln/>
-        </p:spPr>
-        <p:txBody>
-          <a:bodyPr wrap="square" lIns="0" tIns="0" rIns="0" bIns="0" rtlCol="0" anchor="t">
-            <a:normAutofit/>
-          </a:bodyPr>
-          <a:lstStyle/>
-          <a:p>
-            <a:pPr algn="l" indent="0" marL="0">
-              <a:lnSpc>
-                <a:spcPts val="2240"/>
-              </a:lnSpc>
-              <a:buNone/>
-            </a:pPr>
-            <a:r>
-              <a:rPr lang="en-US" sz="1600" dirty="0">
-                <a:solidFill>
-                  <a:srgbClr val="46566A"/>
-                </a:solidFill>
-                <a:latin typeface="IBM Plex Sans" pitchFamily="34" charset="0"/>
-                <a:ea typeface="IBM Plex Sans" pitchFamily="34" charset="-122"/>
-                <a:cs typeface="IBM Plex Sans" pitchFamily="34" charset="-120"/>
-              </a:rPr>
-              <a:t>Satellite radar sees through cloud and darkness. Sentinel-1 data is free and revisits every few days.</a:t>
-            </a:r>
-            <a:endParaRPr lang="en-US" sz="1600" dirty="0"/>
-          </a:p>
-        </p:txBody>
-      </p:sp>
-      <p:sp>
-        <p:nvSpPr>
-          <p:cNvPr id="16" name="Text 14"/>
-          <p:cNvSpPr/>
-          <p:nvPr/>
-        </p:nvSpPr>
-        <p:spPr>
-          <a:xfrm>
-            <a:off x="812782" y="6238242"/>
-            <a:ext cx="4114800" cy="238810"/>
-          </a:xfrm>
-          <a:prstGeom prst="rect">
-            <a:avLst/>
-          </a:prstGeom>
-          <a:noFill/>
-          <a:ln/>
-        </p:spPr>
-        <p:txBody>
-          <a:bodyPr wrap="square" lIns="0" tIns="0" rIns="0" bIns="0" rtlCol="0" anchor="t">
-            <a:normAutofit/>
-          </a:bodyPr>
-          <a:lstStyle/>
-          <a:p>
-            <a:pPr algn="l" indent="0" marL="0">
-              <a:lnSpc>
-                <a:spcPts val="1680"/>
-              </a:lnSpc>
-              <a:buNone/>
-            </a:pPr>
-            <a:r>
-              <a:rPr lang="en-US" sz="1200" dirty="0">
-                <a:solidFill>
-                  <a:srgbClr val="5A6978"/>
-                </a:solidFill>
-                <a:latin typeface="IBM Plex Sans" pitchFamily="34" charset="0"/>
-                <a:ea typeface="IBM Plex Sans" pitchFamily="34" charset="-122"/>
-                <a:cs typeface="IBM Plex Sans" pitchFamily="34" charset="-120"/>
-              </a:rPr>
-              <a:t>Iceberg Alley SAR · Project brief</a:t>
-            </a:r>
-            <a:endParaRPr lang="en-US" sz="1200" dirty="0"/>
-          </a:p>
-        </p:txBody>
-      </p:sp>
-      <p:sp>
-        <p:nvSpPr>
-          <p:cNvPr id="17" name="Text 15"/>
-          <p:cNvSpPr/>
-          <p:nvPr/>
-        </p:nvSpPr>
-        <p:spPr>
-          <a:xfrm>
-            <a:off x="11237976" y="6238242"/>
-            <a:ext cx="146304" cy="238810"/>
-          </a:xfrm>
-          <a:prstGeom prst="rect">
-            <a:avLst/>
-          </a:prstGeom>
-          <a:noFill/>
-          <a:ln/>
-        </p:spPr>
-        <p:txBody>
-          <a:bodyPr wrap="square" lIns="0" tIns="0" rIns="0" bIns="0" rtlCol="0" anchor="t">
-            <a:normAutofit/>
-          </a:bodyPr>
-          <a:lstStyle/>
-          <a:p>
-            <a:pPr algn="r" indent="0" marL="0">
-              <a:lnSpc>
-                <a:spcPts val="1680"/>
-              </a:lnSpc>
-              <a:buNone/>
-            </a:pPr>
-            <a:r>
-              <a:rPr lang="en-US" sz="1200" dirty="0">
-                <a:solidFill>
-                  <a:srgbClr val="5A6978"/>
-                </a:solidFill>
-                <a:latin typeface="IBM Plex Sans" pitchFamily="34" charset="0"/>
-                <a:ea typeface="IBM Plex Sans" pitchFamily="34" charset="-122"/>
-                <a:cs typeface="IBM Plex Sans" pitchFamily="34" charset="-120"/>
-              </a:rPr>
-              <a:t>2</a:t>
-            </a:r>
-            <a:endParaRPr lang="en-US" sz="1200" dirty="0"/>
-          </a:p>
-        </p:txBody>
-      </p:sp>
-    </p:spTree>
-  </p:cSld>
-  <p:clrMapOvr>
-    <a:masterClrMapping/>
-  </p:clrMapOvr>
-</p:sld>
-</file>
-
-<file path=ppt/slides/slide3.xml><?xml version="1.0" encoding="utf-8"?>
-<p:sld xmlns:a="http://schemas.openxmlformats.org/drawingml/2006/main" xmlns:r="http://schemas.openxmlformats.org/officeDocument/2006/relationships" xmlns:p="http://schemas.openxmlformats.org/presentationml/2006/main">
-  <p:cSld name="Slide 3">
-    <p:bg>
-      <p:bgPr>
-        <a:solidFill>
-          <a:srgbClr val="F4F6F3"/>
-        </a:solidFill>
-      </p:bgPr>
-    </p:bg>
-    <p:spTree>
-      <p:nvGrpSpPr>
-        <p:cNvPr id="1" name=""/>
-        <p:cNvGrpSpPr/>
-        <p:nvPr/>
-      </p:nvGrpSpPr>
-      <p:grpSpPr>
-        <a:xfrm>
-          <a:off x="0" y="0"/>
-          <a:ext cx="0" cy="0"/>
-          <a:chOff x="0" y="0"/>
-          <a:chExt cx="0" cy="0"/>
-        </a:xfrm>
-      </p:grpSpPr>
-      <p:sp>
-        <p:nvSpPr>
-          <p:cNvPr id="2" name="Text 0"/>
-          <p:cNvSpPr/>
-          <p:nvPr/>
-        </p:nvSpPr>
-        <p:spPr>
-          <a:xfrm>
-            <a:off x="812782" y="812781"/>
-            <a:ext cx="10883429" cy="238810"/>
-          </a:xfrm>
-          <a:prstGeom prst="rect">
-            <a:avLst/>
-          </a:prstGeom>
-          <a:noFill/>
-          <a:ln/>
-        </p:spPr>
-        <p:txBody>
-          <a:bodyPr wrap="square" lIns="0" tIns="0" rIns="0" bIns="0" rtlCol="0" anchor="t">
-            <a:normAutofit/>
-          </a:bodyPr>
-          <a:lstStyle/>
-          <a:p>
-            <a:pPr algn="l" indent="0" marL="0">
-              <a:lnSpc>
-                <a:spcPts val="1680"/>
-              </a:lnSpc>
-              <a:buNone/>
-            </a:pPr>
-            <a:r>
-              <a:rPr lang="en-US" sz="1200" b="1" spc="200" kern="0" dirty="0">
-                <a:solidFill>
-                  <a:srgbClr val="A84B1A"/>
-                </a:solidFill>
-                <a:latin typeface="IBM Plex Sans" pitchFamily="34" charset="0"/>
-                <a:ea typeface="IBM Plex Sans" pitchFamily="34" charset="-122"/>
-                <a:cs typeface="IBM Plex Sans" pitchFamily="34" charset="-120"/>
-              </a:rPr>
-              <a:t>APPROACH</a:t>
-            </a:r>
-            <a:endParaRPr lang="en-US" sz="1200" dirty="0"/>
-          </a:p>
-        </p:txBody>
-      </p:sp>
-      <p:sp>
-        <p:nvSpPr>
-          <p:cNvPr id="3" name="Text 1"/>
-          <p:cNvSpPr/>
-          <p:nvPr>
-            <p:ph type="title"/>
-          </p:nvPr>
-        </p:nvSpPr>
-        <p:spPr>
-          <a:xfrm>
-            <a:off x="812782" y="1127756"/>
-            <a:ext cx="10883429" cy="528259"/>
-          </a:xfrm>
-          <a:prstGeom prst="rect">
-            <a:avLst/>
-          </a:prstGeom>
-          <a:noFill/>
-          <a:ln/>
-        </p:spPr>
-        <p:txBody>
-          <a:bodyPr wrap="square" lIns="0" tIns="0" rIns="0" bIns="0" rtlCol="0" anchor="t">
-            <a:normAutofit/>
-          </a:bodyPr>
-          <a:lstStyle/>
-          <a:p>
-            <a:pPr algn="l" indent="0" marL="0">
-              <a:lnSpc>
-                <a:spcPts val="3960"/>
-              </a:lnSpc>
-              <a:buNone/>
-            </a:pPr>
-            <a:r>
-              <a:rPr lang="en-US" sz="3600" b="1" i="0" dirty="0">
-                <a:solidFill>
-                  <a:srgbClr val="0E2233"/>
-                </a:solidFill>
-                <a:latin typeface="Source Serif 4" pitchFamily="18" charset="0"/>
-                <a:ea typeface="Source Serif 4" pitchFamily="18" charset="-122"/>
-                <a:cs typeface="Source Serif 4" pitchFamily="18" charset="-120"/>
-              </a:rPr>
-              <a:t>Six steps from raw scene to globe</a:t>
-            </a:r>
-            <a:endParaRPr lang="en-US" sz="3600" dirty="0"/>
-          </a:p>
-        </p:txBody>
-      </p:sp>
-      <p:sp>
-        <p:nvSpPr>
-          <p:cNvPr id="4" name="Shape 2"/>
-          <p:cNvSpPr/>
-          <p:nvPr/>
-        </p:nvSpPr>
-        <p:spPr>
-          <a:xfrm>
-            <a:off x="815957" y="1938572"/>
-            <a:ext cx="1670086" cy="3310984"/>
-          </a:xfrm>
-          <a:prstGeom prst="roundRect">
-            <a:avLst>
-              <a:gd name="adj" fmla="val 4373"/>
-            </a:avLst>
-          </a:prstGeom>
-          <a:solidFill>
-            <a:srgbClr val="FBFCFA"/>
-          </a:solidFill>
-          <a:ln w="6350">
-            <a:solidFill>
-              <a:srgbClr val="D5DEE0"/>
-            </a:solidFill>
-            <a:prstDash val="solid"/>
-          </a:ln>
-        </p:spPr>
-      </p:sp>
-      <p:sp>
-        <p:nvSpPr>
-          <p:cNvPr id="5" name="Text 3"/>
-          <p:cNvSpPr/>
-          <p:nvPr/>
-        </p:nvSpPr>
-        <p:spPr>
-          <a:xfrm>
-            <a:off x="1021683" y="2144297"/>
-            <a:ext cx="1309435" cy="238810"/>
-          </a:xfrm>
-          <a:prstGeom prst="rect">
-            <a:avLst/>
-          </a:prstGeom>
-          <a:noFill/>
-          <a:ln/>
-        </p:spPr>
-        <p:txBody>
-          <a:bodyPr wrap="square" lIns="0" tIns="0" rIns="0" bIns="0" rtlCol="0" anchor="t">
-            <a:normAutofit/>
-          </a:bodyPr>
-          <a:lstStyle/>
-          <a:p>
-            <a:pPr algn="l" indent="0" marL="0">
-              <a:lnSpc>
-                <a:spcPts val="1680"/>
-              </a:lnSpc>
-              <a:buNone/>
-            </a:pPr>
-            <a:r>
-              <a:rPr lang="en-US" sz="1200" b="1" dirty="0">
-                <a:solidFill>
-                  <a:srgbClr val="A84B1A"/>
-                </a:solidFill>
-                <a:latin typeface="IBM Plex Sans" pitchFamily="34" charset="0"/>
-                <a:ea typeface="IBM Plex Sans" pitchFamily="34" charset="-122"/>
-                <a:cs typeface="IBM Plex Sans" pitchFamily="34" charset="-120"/>
-              </a:rPr>
-              <a:t>01</a:t>
-            </a:r>
-            <a:endParaRPr lang="en-US" sz="1200" dirty="0"/>
-          </a:p>
-        </p:txBody>
-      </p:sp>
-      <p:sp>
-        <p:nvSpPr>
-          <p:cNvPr id="6" name="Text 4"/>
-          <p:cNvSpPr/>
-          <p:nvPr/>
-        </p:nvSpPr>
-        <p:spPr>
-          <a:xfrm>
-            <a:off x="1021683" y="2459272"/>
-            <a:ext cx="1309435" cy="269208"/>
-          </a:xfrm>
-          <a:prstGeom prst="rect">
-            <a:avLst/>
-          </a:prstGeom>
-          <a:noFill/>
-          <a:ln/>
-        </p:spPr>
-        <p:txBody>
-          <a:bodyPr wrap="square" lIns="0" tIns="0" rIns="0" bIns="0" rtlCol="0" anchor="t">
-            <a:normAutofit/>
-          </a:bodyPr>
-          <a:lstStyle/>
-          <a:p>
-            <a:pPr algn="l" indent="0" marL="0">
-              <a:lnSpc>
-                <a:spcPts val="1920"/>
-              </a:lnSpc>
-              <a:buNone/>
-            </a:pPr>
-            <a:r>
-              <a:rPr lang="en-US" sz="1600" b="1" dirty="0">
-                <a:solidFill>
-                  <a:srgbClr val="0E2233"/>
-                </a:solidFill>
-                <a:latin typeface="IBM Plex Sans" pitchFamily="34" charset="0"/>
-                <a:ea typeface="IBM Plex Sans" pitchFamily="34" charset="-122"/>
-                <a:cs typeface="IBM Plex Sans" pitchFamily="34" charset="-120"/>
-              </a:rPr>
-              <a:t>Search</a:t>
-            </a:r>
-            <a:endParaRPr lang="en-US" sz="1600" dirty="0"/>
-          </a:p>
-        </p:txBody>
-      </p:sp>
-      <p:sp>
-        <p:nvSpPr>
-          <p:cNvPr id="7" name="Text 5"/>
-          <p:cNvSpPr/>
-          <p:nvPr/>
-        </p:nvSpPr>
-        <p:spPr>
-          <a:xfrm>
-            <a:off x="1021683" y="2804643"/>
-            <a:ext cx="1309435" cy="665632"/>
-          </a:xfrm>
-          <a:prstGeom prst="rect">
-            <a:avLst/>
-          </a:prstGeom>
-          <a:noFill/>
-          <a:ln/>
-        </p:spPr>
-        <p:txBody>
-          <a:bodyPr wrap="square" lIns="0" tIns="0" rIns="0" bIns="0" rtlCol="0" anchor="t">
-            <a:normAutofit/>
-          </a:bodyPr>
-          <a:lstStyle/>
-          <a:p>
-            <a:pPr algn="l" indent="0" marL="0">
-              <a:lnSpc>
-                <a:spcPts val="1680"/>
-              </a:lnSpc>
-              <a:buNone/>
-            </a:pPr>
-            <a:r>
-              <a:rPr lang="en-US" sz="1200" dirty="0">
-                <a:solidFill>
-                  <a:srgbClr val="46566A"/>
-                </a:solidFill>
-                <a:latin typeface="IBM Plex Sans" pitchFamily="34" charset="0"/>
-                <a:ea typeface="IBM Plex Sans" pitchFamily="34" charset="-122"/>
-                <a:cs typeface="IBM Plex Sans" pitchFamily="34" charset="-120"/>
-              </a:rPr>
-              <a:t>ASF search for HH+HV scenes over the AOI</a:t>
-            </a:r>
-            <a:endParaRPr lang="en-US" sz="1200" dirty="0"/>
-          </a:p>
-        </p:txBody>
-      </p:sp>
-      <p:sp>
-        <p:nvSpPr>
-          <p:cNvPr id="8" name="Shape 6"/>
-          <p:cNvSpPr/>
-          <p:nvPr/>
-        </p:nvSpPr>
-        <p:spPr>
-          <a:xfrm>
-            <a:off x="2593957" y="1938572"/>
-            <a:ext cx="1670086" cy="3310984"/>
-          </a:xfrm>
-          <a:prstGeom prst="roundRect">
-            <a:avLst>
-              <a:gd name="adj" fmla="val 4373"/>
-            </a:avLst>
-          </a:prstGeom>
-          <a:solidFill>
-            <a:srgbClr val="FBFCFA"/>
-          </a:solidFill>
-          <a:ln w="6350">
-            <a:solidFill>
-              <a:srgbClr val="D5DEE0"/>
-            </a:solidFill>
-            <a:prstDash val="solid"/>
-          </a:ln>
-        </p:spPr>
-      </p:sp>
-      <p:sp>
-        <p:nvSpPr>
-          <p:cNvPr id="9" name="Text 7"/>
-          <p:cNvSpPr/>
-          <p:nvPr/>
-        </p:nvSpPr>
-        <p:spPr>
-          <a:xfrm>
-            <a:off x="2799682" y="2144297"/>
-            <a:ext cx="1309435" cy="238810"/>
-          </a:xfrm>
-          <a:prstGeom prst="rect">
-            <a:avLst/>
-          </a:prstGeom>
-          <a:noFill/>
-          <a:ln/>
-        </p:spPr>
-        <p:txBody>
-          <a:bodyPr wrap="square" lIns="0" tIns="0" rIns="0" bIns="0" rtlCol="0" anchor="t">
-            <a:normAutofit/>
-          </a:bodyPr>
-          <a:lstStyle/>
-          <a:p>
-            <a:pPr algn="l" indent="0" marL="0">
-              <a:lnSpc>
-                <a:spcPts val="1680"/>
-              </a:lnSpc>
-              <a:buNone/>
-            </a:pPr>
-            <a:r>
-              <a:rPr lang="en-US" sz="1200" b="1" dirty="0">
-                <a:solidFill>
-                  <a:srgbClr val="A84B1A"/>
-                </a:solidFill>
-                <a:latin typeface="IBM Plex Sans" pitchFamily="34" charset="0"/>
-                <a:ea typeface="IBM Plex Sans" pitchFamily="34" charset="-122"/>
-                <a:cs typeface="IBM Plex Sans" pitchFamily="34" charset="-120"/>
-              </a:rPr>
-              <a:t>02</a:t>
-            </a:r>
-            <a:endParaRPr lang="en-US" sz="1200" dirty="0"/>
-          </a:p>
-        </p:txBody>
-      </p:sp>
-      <p:sp>
-        <p:nvSpPr>
-          <p:cNvPr id="10" name="Text 8"/>
-          <p:cNvSpPr/>
-          <p:nvPr/>
-        </p:nvSpPr>
-        <p:spPr>
-          <a:xfrm>
-            <a:off x="2799682" y="2459272"/>
-            <a:ext cx="1309435" cy="269208"/>
-          </a:xfrm>
-          <a:prstGeom prst="rect">
-            <a:avLst/>
-          </a:prstGeom>
-          <a:noFill/>
-          <a:ln/>
-        </p:spPr>
-        <p:txBody>
-          <a:bodyPr wrap="square" lIns="0" tIns="0" rIns="0" bIns="0" rtlCol="0" anchor="t">
-            <a:normAutofit/>
-          </a:bodyPr>
-          <a:lstStyle/>
-          <a:p>
-            <a:pPr algn="l" indent="0" marL="0">
-              <a:lnSpc>
-                <a:spcPts val="1920"/>
-              </a:lnSpc>
-              <a:buNone/>
-            </a:pPr>
-            <a:r>
-              <a:rPr lang="en-US" sz="1600" b="1" dirty="0">
-                <a:solidFill>
-                  <a:srgbClr val="0E2233"/>
-                </a:solidFill>
-                <a:latin typeface="IBM Plex Sans" pitchFamily="34" charset="0"/>
-                <a:ea typeface="IBM Plex Sans" pitchFamily="34" charset="-122"/>
-                <a:cs typeface="IBM Plex Sans" pitchFamily="34" charset="-120"/>
-              </a:rPr>
-              <a:t>Calibrate</a:t>
-            </a:r>
-            <a:endParaRPr lang="en-US" sz="1600" dirty="0"/>
-          </a:p>
-        </p:txBody>
-      </p:sp>
-      <p:sp>
-        <p:nvSpPr>
-          <p:cNvPr id="11" name="Text 9"/>
-          <p:cNvSpPr/>
-          <p:nvPr/>
-        </p:nvSpPr>
-        <p:spPr>
-          <a:xfrm>
-            <a:off x="2799682" y="2804643"/>
-            <a:ext cx="1309435" cy="879042"/>
-          </a:xfrm>
-          <a:prstGeom prst="rect">
-            <a:avLst/>
-          </a:prstGeom>
-          <a:noFill/>
-          <a:ln/>
-        </p:spPr>
-        <p:txBody>
-          <a:bodyPr wrap="square" lIns="0" tIns="0" rIns="0" bIns="0" rtlCol="0" anchor="t">
-            <a:normAutofit/>
-          </a:bodyPr>
-          <a:lstStyle/>
-          <a:p>
-            <a:pPr algn="l" indent="0" marL="0">
-              <a:lnSpc>
-                <a:spcPts val="1680"/>
-              </a:lnSpc>
-              <a:buNone/>
-            </a:pPr>
-            <a:r>
-              <a:rPr lang="en-US" sz="1200" dirty="0">
-                <a:solidFill>
-                  <a:srgbClr val="46566A"/>
-                </a:solidFill>
-                <a:latin typeface="IBM Plex Sans" pitchFamily="34" charset="0"/>
-                <a:ea typeface="IBM Plex Sans" pitchFamily="34" charset="-122"/>
-                <a:cs typeface="IBM Plex Sans" pitchFamily="34" charset="-120"/>
-              </a:rPr>
-              <a:t>HyP3 terrain correction: gamma0, linear power, 10 m</a:t>
-            </a:r>
-            <a:endParaRPr lang="en-US" sz="1200" dirty="0"/>
-          </a:p>
-        </p:txBody>
-      </p:sp>
-      <p:sp>
-        <p:nvSpPr>
-          <p:cNvPr id="12" name="Shape 10"/>
-          <p:cNvSpPr/>
-          <p:nvPr/>
-        </p:nvSpPr>
-        <p:spPr>
-          <a:xfrm>
-            <a:off x="4371957" y="1938572"/>
-            <a:ext cx="1670086" cy="3310984"/>
-          </a:xfrm>
-          <a:prstGeom prst="roundRect">
-            <a:avLst>
-              <a:gd name="adj" fmla="val 4373"/>
-            </a:avLst>
-          </a:prstGeom>
-          <a:solidFill>
-            <a:srgbClr val="FBFCFA"/>
-          </a:solidFill>
-          <a:ln w="6350">
-            <a:solidFill>
-              <a:srgbClr val="D5DEE0"/>
-            </a:solidFill>
-            <a:prstDash val="solid"/>
-          </a:ln>
-        </p:spPr>
-      </p:sp>
-      <p:sp>
-        <p:nvSpPr>
-          <p:cNvPr id="13" name="Text 11"/>
-          <p:cNvSpPr/>
-          <p:nvPr/>
-        </p:nvSpPr>
-        <p:spPr>
-          <a:xfrm>
-            <a:off x="4577682" y="2144297"/>
-            <a:ext cx="1309435" cy="238810"/>
-          </a:xfrm>
-          <a:prstGeom prst="rect">
-            <a:avLst/>
-          </a:prstGeom>
-          <a:noFill/>
-          <a:ln/>
-        </p:spPr>
-        <p:txBody>
-          <a:bodyPr wrap="square" lIns="0" tIns="0" rIns="0" bIns="0" rtlCol="0" anchor="t">
-            <a:normAutofit/>
-          </a:bodyPr>
-          <a:lstStyle/>
-          <a:p>
-            <a:pPr algn="l" indent="0" marL="0">
-              <a:lnSpc>
-                <a:spcPts val="1680"/>
-              </a:lnSpc>
-              <a:buNone/>
-            </a:pPr>
-            <a:r>
-              <a:rPr lang="en-US" sz="1200" b="1" dirty="0">
-                <a:solidFill>
-                  <a:srgbClr val="A84B1A"/>
-                </a:solidFill>
-                <a:latin typeface="IBM Plex Sans" pitchFamily="34" charset="0"/>
-                <a:ea typeface="IBM Plex Sans" pitchFamily="34" charset="-122"/>
-                <a:cs typeface="IBM Plex Sans" pitchFamily="34" charset="-120"/>
-              </a:rPr>
-              <a:t>03</a:t>
-            </a:r>
-            <a:endParaRPr lang="en-US" sz="1200" dirty="0"/>
-          </a:p>
-        </p:txBody>
-      </p:sp>
-      <p:sp>
-        <p:nvSpPr>
-          <p:cNvPr id="14" name="Text 12"/>
-          <p:cNvSpPr/>
-          <p:nvPr/>
-        </p:nvSpPr>
-        <p:spPr>
-          <a:xfrm>
-            <a:off x="4577682" y="2459272"/>
-            <a:ext cx="1309435" cy="269208"/>
-          </a:xfrm>
-          <a:prstGeom prst="rect">
-            <a:avLst/>
-          </a:prstGeom>
-          <a:noFill/>
-          <a:ln/>
-        </p:spPr>
-        <p:txBody>
-          <a:bodyPr wrap="square" lIns="0" tIns="0" rIns="0" bIns="0" rtlCol="0" anchor="t">
-            <a:normAutofit/>
-          </a:bodyPr>
-          <a:lstStyle/>
-          <a:p>
-            <a:pPr algn="l" indent="0" marL="0">
-              <a:lnSpc>
-                <a:spcPts val="1920"/>
-              </a:lnSpc>
-              <a:buNone/>
-            </a:pPr>
-            <a:r>
-              <a:rPr lang="en-US" sz="1600" b="1" dirty="0">
-                <a:solidFill>
-                  <a:srgbClr val="0E2233"/>
-                </a:solidFill>
-                <a:latin typeface="IBM Plex Sans" pitchFamily="34" charset="0"/>
-                <a:ea typeface="IBM Plex Sans" pitchFamily="34" charset="-122"/>
-                <a:cs typeface="IBM Plex Sans" pitchFamily="34" charset="-120"/>
-              </a:rPr>
-              <a:t>Mask</a:t>
-            </a:r>
-            <a:endParaRPr lang="en-US" sz="1600" dirty="0"/>
-          </a:p>
-        </p:txBody>
-      </p:sp>
-      <p:sp>
-        <p:nvSpPr>
-          <p:cNvPr id="15" name="Text 13"/>
-          <p:cNvSpPr/>
-          <p:nvPr/>
-        </p:nvSpPr>
-        <p:spPr>
-          <a:xfrm>
-            <a:off x="4577682" y="2804643"/>
-            <a:ext cx="1309435" cy="879042"/>
-          </a:xfrm>
-          <a:prstGeom prst="rect">
-            <a:avLst/>
-          </a:prstGeom>
-          <a:noFill/>
-          <a:ln/>
-        </p:spPr>
-        <p:txBody>
-          <a:bodyPr wrap="square" lIns="0" tIns="0" rIns="0" bIns="0" rtlCol="0" anchor="t">
-            <a:normAutofit/>
-          </a:bodyPr>
-          <a:lstStyle/>
-          <a:p>
-            <a:pPr algn="l" indent="0" marL="0">
-              <a:lnSpc>
-                <a:spcPts val="1680"/>
-              </a:lnSpc>
-              <a:buNone/>
-            </a:pPr>
-            <a:r>
-              <a:rPr lang="en-US" sz="1200" dirty="0">
-                <a:solidFill>
-                  <a:srgbClr val="46566A"/>
-                </a:solidFill>
-                <a:latin typeface="IBM Plex Sans" pitchFamily="34" charset="0"/>
-                <a:ea typeface="IBM Plex Sans" pitchFamily="34" charset="-122"/>
-                <a:cs typeface="IBM Plex Sans" pitchFamily="34" charset="-120"/>
-              </a:rPr>
-              <a:t>Land plus 500 m from OSM; pack ice from HV texture</a:t>
-            </a:r>
-            <a:endParaRPr lang="en-US" sz="1200" dirty="0"/>
-          </a:p>
-        </p:txBody>
-      </p:sp>
-      <p:sp>
-        <p:nvSpPr>
-          <p:cNvPr id="16" name="Shape 14"/>
-          <p:cNvSpPr/>
-          <p:nvPr/>
-        </p:nvSpPr>
-        <p:spPr>
-          <a:xfrm>
-            <a:off x="6149957" y="1938572"/>
-            <a:ext cx="1670086" cy="3310984"/>
-          </a:xfrm>
-          <a:prstGeom prst="roundRect">
-            <a:avLst>
-              <a:gd name="adj" fmla="val 4373"/>
-            </a:avLst>
-          </a:prstGeom>
-          <a:solidFill>
-            <a:srgbClr val="FBFCFA"/>
-          </a:solidFill>
-          <a:ln w="6350">
-            <a:solidFill>
-              <a:srgbClr val="D5DEE0"/>
-            </a:solidFill>
-            <a:prstDash val="solid"/>
-          </a:ln>
-        </p:spPr>
-      </p:sp>
-      <p:sp>
-        <p:nvSpPr>
-          <p:cNvPr id="17" name="Text 15"/>
-          <p:cNvSpPr/>
-          <p:nvPr/>
-        </p:nvSpPr>
-        <p:spPr>
-          <a:xfrm>
-            <a:off x="6355682" y="2144297"/>
-            <a:ext cx="1309435" cy="238810"/>
-          </a:xfrm>
-          <a:prstGeom prst="rect">
-            <a:avLst/>
-          </a:prstGeom>
-          <a:noFill/>
-          <a:ln/>
-        </p:spPr>
-        <p:txBody>
-          <a:bodyPr wrap="square" lIns="0" tIns="0" rIns="0" bIns="0" rtlCol="0" anchor="t">
-            <a:normAutofit/>
-          </a:bodyPr>
-          <a:lstStyle/>
-          <a:p>
-            <a:pPr algn="l" indent="0" marL="0">
-              <a:lnSpc>
-                <a:spcPts val="1680"/>
-              </a:lnSpc>
-              <a:buNone/>
-            </a:pPr>
-            <a:r>
-              <a:rPr lang="en-US" sz="1200" b="1" dirty="0">
-                <a:solidFill>
-                  <a:srgbClr val="A84B1A"/>
-                </a:solidFill>
-                <a:latin typeface="IBM Plex Sans" pitchFamily="34" charset="0"/>
-                <a:ea typeface="IBM Plex Sans" pitchFamily="34" charset="-122"/>
-                <a:cs typeface="IBM Plex Sans" pitchFamily="34" charset="-120"/>
-              </a:rPr>
-              <a:t>04</a:t>
-            </a:r>
-            <a:endParaRPr lang="en-US" sz="1200" dirty="0"/>
-          </a:p>
-        </p:txBody>
-      </p:sp>
-      <p:sp>
-        <p:nvSpPr>
-          <p:cNvPr id="18" name="Text 16"/>
-          <p:cNvSpPr/>
-          <p:nvPr/>
-        </p:nvSpPr>
-        <p:spPr>
-          <a:xfrm>
-            <a:off x="6355682" y="2459272"/>
-            <a:ext cx="1309435" cy="269208"/>
-          </a:xfrm>
-          <a:prstGeom prst="rect">
-            <a:avLst/>
-          </a:prstGeom>
-          <a:noFill/>
-          <a:ln/>
-        </p:spPr>
-        <p:txBody>
-          <a:bodyPr wrap="square" lIns="0" tIns="0" rIns="0" bIns="0" rtlCol="0" anchor="t">
-            <a:normAutofit/>
-          </a:bodyPr>
-          <a:lstStyle/>
-          <a:p>
-            <a:pPr algn="l" indent="0" marL="0">
-              <a:lnSpc>
-                <a:spcPts val="1920"/>
-              </a:lnSpc>
-              <a:buNone/>
-            </a:pPr>
-            <a:r>
-              <a:rPr lang="en-US" sz="1600" b="1" dirty="0">
-                <a:solidFill>
-                  <a:srgbClr val="0E2233"/>
-                </a:solidFill>
-                <a:latin typeface="IBM Plex Sans" pitchFamily="34" charset="0"/>
-                <a:ea typeface="IBM Plex Sans" pitchFamily="34" charset="-122"/>
-                <a:cs typeface="IBM Plex Sans" pitchFamily="34" charset="-120"/>
-              </a:rPr>
-              <a:t>Detect</a:t>
-            </a:r>
-            <a:endParaRPr lang="en-US" sz="1600" dirty="0"/>
-          </a:p>
-        </p:txBody>
-      </p:sp>
-      <p:sp>
-        <p:nvSpPr>
-          <p:cNvPr id="19" name="Text 17"/>
-          <p:cNvSpPr/>
-          <p:nvPr/>
-        </p:nvSpPr>
-        <p:spPr>
-          <a:xfrm>
-            <a:off x="6355682" y="2804643"/>
-            <a:ext cx="1309435" cy="879042"/>
-          </a:xfrm>
-          <a:prstGeom prst="rect">
-            <a:avLst/>
-          </a:prstGeom>
-          <a:noFill/>
-          <a:ln/>
-        </p:spPr>
-        <p:txBody>
-          <a:bodyPr wrap="square" lIns="0" tIns="0" rIns="0" bIns="0" rtlCol="0" anchor="t">
-            <a:normAutofit/>
-          </a:bodyPr>
-          <a:lstStyle/>
-          <a:p>
-            <a:pPr algn="l" indent="0" marL="0">
-              <a:lnSpc>
-                <a:spcPts val="1680"/>
-              </a:lnSpc>
-              <a:buNone/>
-            </a:pPr>
-            <a:r>
-              <a:rPr lang="en-US" sz="1200" dirty="0">
-                <a:solidFill>
-                  <a:srgbClr val="46566A"/>
-                </a:solidFill>
-                <a:latin typeface="IBM Plex Sans" pitchFamily="34" charset="0"/>
-                <a:ea typeface="IBM Plex Sans" pitchFamily="34" charset="-122"/>
-                <a:cs typeface="IBM Plex Sans" pitchFamily="34" charset="-120"/>
-              </a:rPr>
-              <a:t>CA-CFAR on HV, threshold set from the scene's speckle</a:t>
-            </a:r>
-            <a:endParaRPr lang="en-US" sz="1200" dirty="0"/>
-          </a:p>
-        </p:txBody>
-      </p:sp>
-      <p:sp>
-        <p:nvSpPr>
-          <p:cNvPr id="20" name="Shape 18"/>
-          <p:cNvSpPr/>
-          <p:nvPr/>
-        </p:nvSpPr>
-        <p:spPr>
-          <a:xfrm>
-            <a:off x="7927956" y="1938572"/>
-            <a:ext cx="1670086" cy="3310984"/>
-          </a:xfrm>
-          <a:prstGeom prst="roundRect">
-            <a:avLst>
-              <a:gd name="adj" fmla="val 4373"/>
-            </a:avLst>
-          </a:prstGeom>
-          <a:solidFill>
-            <a:srgbClr val="FBFCFA"/>
-          </a:solidFill>
-          <a:ln w="6350">
-            <a:solidFill>
-              <a:srgbClr val="D5DEE0"/>
-            </a:solidFill>
-            <a:prstDash val="solid"/>
-          </a:ln>
-        </p:spPr>
-      </p:sp>
-      <p:sp>
-        <p:nvSpPr>
-          <p:cNvPr id="21" name="Text 19"/>
-          <p:cNvSpPr/>
-          <p:nvPr/>
-        </p:nvSpPr>
-        <p:spPr>
-          <a:xfrm>
-            <a:off x="8133683" y="2144297"/>
-            <a:ext cx="1309435" cy="238810"/>
-          </a:xfrm>
-          <a:prstGeom prst="rect">
-            <a:avLst/>
-          </a:prstGeom>
-          <a:noFill/>
-          <a:ln/>
-        </p:spPr>
-        <p:txBody>
-          <a:bodyPr wrap="square" lIns="0" tIns="0" rIns="0" bIns="0" rtlCol="0" anchor="t">
-            <a:normAutofit/>
-          </a:bodyPr>
-          <a:lstStyle/>
-          <a:p>
-            <a:pPr algn="l" indent="0" marL="0">
-              <a:lnSpc>
-                <a:spcPts val="1680"/>
-              </a:lnSpc>
-              <a:buNone/>
-            </a:pPr>
-            <a:r>
-              <a:rPr lang="en-US" sz="1200" b="1" dirty="0">
-                <a:solidFill>
-                  <a:srgbClr val="A84B1A"/>
-                </a:solidFill>
-                <a:latin typeface="IBM Plex Sans" pitchFamily="34" charset="0"/>
-                <a:ea typeface="IBM Plex Sans" pitchFamily="34" charset="-122"/>
-                <a:cs typeface="IBM Plex Sans" pitchFamily="34" charset="-120"/>
-              </a:rPr>
-              <a:t>05</a:t>
-            </a:r>
-            <a:endParaRPr lang="en-US" sz="1200" dirty="0"/>
-          </a:p>
-        </p:txBody>
-      </p:sp>
-      <p:sp>
-        <p:nvSpPr>
-          <p:cNvPr id="22" name="Text 20"/>
-          <p:cNvSpPr/>
-          <p:nvPr/>
-        </p:nvSpPr>
-        <p:spPr>
-          <a:xfrm>
-            <a:off x="8133683" y="2459272"/>
-            <a:ext cx="1309435" cy="269208"/>
-          </a:xfrm>
-          <a:prstGeom prst="rect">
-            <a:avLst/>
-          </a:prstGeom>
-          <a:noFill/>
-          <a:ln/>
-        </p:spPr>
-        <p:txBody>
-          <a:bodyPr wrap="square" lIns="0" tIns="0" rIns="0" bIns="0" rtlCol="0" anchor="t">
-            <a:normAutofit/>
-          </a:bodyPr>
-          <a:lstStyle/>
-          <a:p>
-            <a:pPr algn="l" indent="0" marL="0">
-              <a:lnSpc>
-                <a:spcPts val="1920"/>
-              </a:lnSpc>
-              <a:buNone/>
-            </a:pPr>
-            <a:r>
-              <a:rPr lang="en-US" sz="1600" b="1" dirty="0">
-                <a:solidFill>
-                  <a:srgbClr val="0E2233"/>
-                </a:solidFill>
-                <a:latin typeface="IBM Plex Sans" pitchFamily="34" charset="0"/>
-                <a:ea typeface="IBM Plex Sans" pitchFamily="34" charset="-122"/>
-                <a:cs typeface="IBM Plex Sans" pitchFamily="34" charset="-120"/>
-              </a:rPr>
-              <a:t>Filter</a:t>
-            </a:r>
-            <a:endParaRPr lang="en-US" sz="1600" dirty="0"/>
-          </a:p>
-        </p:txBody>
-      </p:sp>
-      <p:sp>
-        <p:nvSpPr>
-          <p:cNvPr id="23" name="Text 21"/>
-          <p:cNvSpPr/>
-          <p:nvPr/>
-        </p:nvSpPr>
-        <p:spPr>
-          <a:xfrm>
-            <a:off x="8133683" y="2804643"/>
-            <a:ext cx="1309435" cy="665632"/>
-          </a:xfrm>
-          <a:prstGeom prst="rect">
-            <a:avLst/>
-          </a:prstGeom>
-          <a:noFill/>
-          <a:ln/>
-        </p:spPr>
-        <p:txBody>
-          <a:bodyPr wrap="square" lIns="0" tIns="0" rIns="0" bIns="0" rtlCol="0" anchor="t">
-            <a:normAutofit/>
-          </a:bodyPr>
-          <a:lstStyle/>
-          <a:p>
-            <a:pPr algn="l" indent="0" marL="0">
-              <a:lnSpc>
-                <a:spcPts val="1680"/>
-              </a:lnSpc>
-              <a:buNone/>
-            </a:pPr>
-            <a:r>
-              <a:rPr lang="en-US" sz="1200" dirty="0">
-                <a:solidFill>
-                  <a:srgbClr val="46566A"/>
-                </a:solidFill>
-                <a:latin typeface="IBM Plex Sans" pitchFamily="34" charset="0"/>
-                <a:ea typeface="IBM Plex Sans" pitchFamily="34" charset="-122"/>
-                <a:cs typeface="IBM Plex Sans" pitchFamily="34" charset="-120"/>
-              </a:rPr>
-              <a:t>Size limits, ice-strip rejection, HH co-pol check</a:t>
-            </a:r>
-            <a:endParaRPr lang="en-US" sz="1200" dirty="0"/>
-          </a:p>
-        </p:txBody>
-      </p:sp>
-      <p:sp>
-        <p:nvSpPr>
-          <p:cNvPr id="24" name="Shape 22"/>
-          <p:cNvSpPr/>
-          <p:nvPr/>
-        </p:nvSpPr>
-        <p:spPr>
-          <a:xfrm>
-            <a:off x="9705956" y="1938572"/>
-            <a:ext cx="1670086" cy="3310984"/>
-          </a:xfrm>
-          <a:prstGeom prst="roundRect">
-            <a:avLst>
-              <a:gd name="adj" fmla="val 4373"/>
-            </a:avLst>
-          </a:prstGeom>
-          <a:solidFill>
-            <a:srgbClr val="FBFCFA"/>
-          </a:solidFill>
-          <a:ln w="6350">
-            <a:solidFill>
-              <a:srgbClr val="D5DEE0"/>
-            </a:solidFill>
-            <a:prstDash val="solid"/>
-          </a:ln>
-        </p:spPr>
-      </p:sp>
-      <p:sp>
-        <p:nvSpPr>
-          <p:cNvPr id="25" name="Text 23"/>
-          <p:cNvSpPr/>
-          <p:nvPr/>
-        </p:nvSpPr>
-        <p:spPr>
-          <a:xfrm>
-            <a:off x="9911682" y="2144297"/>
-            <a:ext cx="1309435" cy="238810"/>
-          </a:xfrm>
-          <a:prstGeom prst="rect">
-            <a:avLst/>
-          </a:prstGeom>
-          <a:noFill/>
-          <a:ln/>
-        </p:spPr>
-        <p:txBody>
-          <a:bodyPr wrap="square" lIns="0" tIns="0" rIns="0" bIns="0" rtlCol="0" anchor="t">
-            <a:normAutofit/>
-          </a:bodyPr>
-          <a:lstStyle/>
-          <a:p>
-            <a:pPr algn="l" indent="0" marL="0">
-              <a:lnSpc>
-                <a:spcPts val="1680"/>
-              </a:lnSpc>
-              <a:buNone/>
-            </a:pPr>
-            <a:r>
-              <a:rPr lang="en-US" sz="1200" b="1" dirty="0">
-                <a:solidFill>
-                  <a:srgbClr val="A84B1A"/>
-                </a:solidFill>
-                <a:latin typeface="IBM Plex Sans" pitchFamily="34" charset="0"/>
-                <a:ea typeface="IBM Plex Sans" pitchFamily="34" charset="-122"/>
-                <a:cs typeface="IBM Plex Sans" pitchFamily="34" charset="-120"/>
-              </a:rPr>
-              <a:t>06</a:t>
-            </a:r>
-            <a:endParaRPr lang="en-US" sz="1200" dirty="0"/>
-          </a:p>
-        </p:txBody>
-      </p:sp>
-      <p:sp>
-        <p:nvSpPr>
-          <p:cNvPr id="26" name="Text 24"/>
-          <p:cNvSpPr/>
-          <p:nvPr/>
-        </p:nvSpPr>
-        <p:spPr>
-          <a:xfrm>
-            <a:off x="9911682" y="2459272"/>
-            <a:ext cx="1309435" cy="269208"/>
-          </a:xfrm>
-          <a:prstGeom prst="rect">
-            <a:avLst/>
-          </a:prstGeom>
-          <a:noFill/>
-          <a:ln/>
-        </p:spPr>
-        <p:txBody>
-          <a:bodyPr wrap="square" lIns="0" tIns="0" rIns="0" bIns="0" rtlCol="0" anchor="t">
-            <a:normAutofit/>
-          </a:bodyPr>
-          <a:lstStyle/>
-          <a:p>
-            <a:pPr algn="l" indent="0" marL="0">
-              <a:lnSpc>
-                <a:spcPts val="1920"/>
-              </a:lnSpc>
-              <a:buNone/>
-            </a:pPr>
-            <a:r>
-              <a:rPr lang="en-US" sz="1600" b="1" dirty="0">
-                <a:solidFill>
-                  <a:srgbClr val="0E2233"/>
-                </a:solidFill>
-                <a:latin typeface="IBM Plex Sans" pitchFamily="34" charset="0"/>
-                <a:ea typeface="IBM Plex Sans" pitchFamily="34" charset="-122"/>
-                <a:cs typeface="IBM Plex Sans" pitchFamily="34" charset="-120"/>
-              </a:rPr>
-              <a:t>Publish</a:t>
-            </a:r>
-            <a:endParaRPr lang="en-US" sz="1600" dirty="0"/>
-          </a:p>
-        </p:txBody>
-      </p:sp>
-      <p:sp>
-        <p:nvSpPr>
-          <p:cNvPr id="27" name="Text 25"/>
-          <p:cNvSpPr/>
-          <p:nvPr/>
-        </p:nvSpPr>
-        <p:spPr>
-          <a:xfrm>
-            <a:off x="9911682" y="2804643"/>
-            <a:ext cx="1309435" cy="879042"/>
-          </a:xfrm>
-          <a:prstGeom prst="rect">
-            <a:avLst/>
-          </a:prstGeom>
-          <a:noFill/>
-          <a:ln/>
-        </p:spPr>
-        <p:txBody>
-          <a:bodyPr wrap="square" lIns="0" tIns="0" rIns="0" bIns="0" rtlCol="0" anchor="t">
-            <a:normAutofit/>
-          </a:bodyPr>
-          <a:lstStyle/>
-          <a:p>
-            <a:pPr algn="l" indent="0" marL="0">
-              <a:lnSpc>
-                <a:spcPts val="1680"/>
-              </a:lnSpc>
-              <a:buNone/>
-            </a:pPr>
-            <a:r>
-              <a:rPr lang="en-US" sz="1200" dirty="0">
-                <a:solidFill>
-                  <a:srgbClr val="46566A"/>
-                </a:solidFill>
-                <a:latin typeface="IBM Plex Sans" pitchFamily="34" charset="0"/>
-                <a:ea typeface="IBM Plex Sans" pitchFamily="34" charset="-122"/>
-                <a:cs typeface="IBM Plex Sans" pitchFamily="34" charset="-120"/>
-              </a:rPr>
-              <a:t>GeoJSON and CZML, published to a live web viewer</a:t>
-            </a:r>
-            <a:endParaRPr lang="en-US" sz="1200" dirty="0"/>
-          </a:p>
-        </p:txBody>
-      </p:sp>
-      <p:sp>
-        <p:nvSpPr>
-          <p:cNvPr id="28" name="Text 26"/>
-          <p:cNvSpPr/>
-          <p:nvPr/>
-        </p:nvSpPr>
-        <p:spPr>
-          <a:xfrm>
-            <a:off x="812782" y="5557512"/>
-            <a:ext cx="11379218" cy="309887"/>
-          </a:xfrm>
-          <a:prstGeom prst="rect">
-            <a:avLst/>
-          </a:prstGeom>
-          <a:noFill/>
-          <a:ln/>
-        </p:spPr>
-        <p:txBody>
-          <a:bodyPr wrap="square" lIns="0" tIns="0" rIns="0" bIns="0" rtlCol="0" anchor="t">
-            <a:normAutofit/>
-          </a:bodyPr>
-          <a:lstStyle/>
-          <a:p>
-            <a:pPr algn="l" indent="0" marL="0">
-              <a:lnSpc>
-                <a:spcPts val="2240"/>
-              </a:lnSpc>
-              <a:buNone/>
-            </a:pPr>
-            <a:r>
-              <a:rPr lang="en-US" sz="1600" dirty="0">
-                <a:solidFill>
-                  <a:srgbClr val="46566A"/>
-                </a:solidFill>
-                <a:latin typeface="IBM Plex Sans" pitchFamily="34" charset="0"/>
-                <a:ea typeface="IBM Plex Sans" pitchFamily="34" charset="-122"/>
-                <a:cs typeface="IBM Plex Sans" pitchFamily="34" charset="-120"/>
-              </a:rPr>
-              <a:t>Every parameter lives in </a:t>
-            </a:r>
-            <a:r>
-              <a:rPr lang="en-US" sz="1600" b="1" dirty="0">
-                <a:solidFill>
-                  <a:srgbClr val="46566A"/>
-                </a:solidFill>
-                <a:latin typeface="IBM Plex Sans" pitchFamily="34" charset="0"/>
-                <a:ea typeface="IBM Plex Sans" pitchFamily="34" charset="-122"/>
-                <a:cs typeface="IBM Plex Sans" pitchFamily="34" charset="-120"/>
-              </a:rPr>
-              <a:t>config.yaml</a:t>
-            </a:r>
-            <a:r>
-              <a:rPr lang="en-US" sz="1600" dirty="0">
-                <a:solidFill>
-                  <a:srgbClr val="46566A"/>
-                </a:solidFill>
-                <a:latin typeface="IBM Plex Sans" pitchFamily="34" charset="0"/>
-                <a:ea typeface="IBM Plex Sans" pitchFamily="34" charset="-122"/>
-                <a:cs typeface="IBM Plex Sans" pitchFamily="34" charset="-120"/>
-              </a:rPr>
-              <a:t>, with lengths in metres so tuning carries over between 10 m and 20 m pixels.</a:t>
-            </a:r>
-            <a:endParaRPr lang="en-US" sz="1600" dirty="0"/>
-          </a:p>
-        </p:txBody>
-      </p:sp>
-      <p:sp>
-        <p:nvSpPr>
-          <p:cNvPr id="29" name="Text 27"/>
-          <p:cNvSpPr/>
-          <p:nvPr/>
-        </p:nvSpPr>
-        <p:spPr>
-          <a:xfrm>
-            <a:off x="812782" y="6238242"/>
-            <a:ext cx="4114800" cy="238810"/>
-          </a:xfrm>
-          <a:prstGeom prst="rect">
-            <a:avLst/>
-          </a:prstGeom>
-          <a:noFill/>
-          <a:ln/>
-        </p:spPr>
-        <p:txBody>
-          <a:bodyPr wrap="square" lIns="0" tIns="0" rIns="0" bIns="0" rtlCol="0" anchor="t">
-            <a:normAutofit/>
-          </a:bodyPr>
-          <a:lstStyle/>
-          <a:p>
-            <a:pPr algn="l" indent="0" marL="0">
-              <a:lnSpc>
-                <a:spcPts val="1680"/>
-              </a:lnSpc>
-              <a:buNone/>
-            </a:pPr>
-            <a:r>
-              <a:rPr lang="en-US" sz="1200" dirty="0">
-                <a:solidFill>
-                  <a:srgbClr val="5A6978"/>
-                </a:solidFill>
-                <a:latin typeface="IBM Plex Sans" pitchFamily="34" charset="0"/>
-                <a:ea typeface="IBM Plex Sans" pitchFamily="34" charset="-122"/>
-                <a:cs typeface="IBM Plex Sans" pitchFamily="34" charset="-120"/>
-              </a:rPr>
-              <a:t>Iceberg Alley SAR · Project brief</a:t>
-            </a:r>
-            <a:endParaRPr lang="en-US" sz="1200" dirty="0"/>
-          </a:p>
-        </p:txBody>
-      </p:sp>
-      <p:sp>
-        <p:nvSpPr>
-          <p:cNvPr id="30" name="Text 28"/>
-          <p:cNvSpPr/>
-          <p:nvPr/>
-        </p:nvSpPr>
-        <p:spPr>
-          <a:xfrm>
-            <a:off x="11237976" y="6238242"/>
-            <a:ext cx="146304" cy="238810"/>
-          </a:xfrm>
-          <a:prstGeom prst="rect">
-            <a:avLst/>
-          </a:prstGeom>
-          <a:noFill/>
-          <a:ln/>
-        </p:spPr>
-        <p:txBody>
-          <a:bodyPr wrap="square" lIns="0" tIns="0" rIns="0" bIns="0" rtlCol="0" anchor="t">
-            <a:normAutofit/>
-          </a:bodyPr>
-          <a:lstStyle/>
-          <a:p>
-            <a:pPr algn="r" indent="0" marL="0">
-              <a:lnSpc>
-                <a:spcPts val="1680"/>
-              </a:lnSpc>
-              <a:buNone/>
-            </a:pPr>
-            <a:r>
-              <a:rPr lang="en-US" sz="1200" dirty="0">
-                <a:solidFill>
-                  <a:srgbClr val="5A6978"/>
-                </a:solidFill>
-                <a:latin typeface="IBM Plex Sans" pitchFamily="34" charset="0"/>
-                <a:ea typeface="IBM Plex Sans" pitchFamily="34" charset="-122"/>
-                <a:cs typeface="IBM Plex Sans" pitchFamily="34" charset="-120"/>
-              </a:rPr>
-              <a:t>3</a:t>
-            </a:r>
-            <a:endParaRPr lang="en-US" sz="1200" dirty="0"/>
-          </a:p>
-        </p:txBody>
-      </p:sp>
-    </p:spTree>
-  </p:cSld>
-  <p:clrMapOvr>
-    <a:masterClrMapping/>
-  </p:clrMapOvr>
-</p:sld>
-</file>
-
-<file path=ppt/slides/slide4.xml><?xml version="1.0" encoding="utf-8"?>
-<p:sld xmlns:a="http://schemas.openxmlformats.org/drawingml/2006/main" xmlns:r="http://schemas.openxmlformats.org/officeDocument/2006/relationships" xmlns:p="http://schemas.openxmlformats.org/presentationml/2006/main">
-  <p:cSld name="Slide 4">
-    <p:bg>
-      <p:bgPr>
-        <a:solidFill>
-          <a:srgbClr val="E4ECEE"/>
-        </a:solidFill>
-      </p:bgPr>
-    </p:bg>
-    <p:spTree>
-      <p:nvGrpSpPr>
-        <p:cNvPr id="1" name=""/>
-        <p:cNvGrpSpPr/>
-        <p:nvPr/>
-      </p:nvGrpSpPr>
-      <p:grpSpPr>
-        <a:xfrm>
-          <a:off x="0" y="0"/>
-          <a:ext cx="0" cy="0"/>
-          <a:chOff x="0" y="0"/>
-          <a:chExt cx="0" cy="0"/>
-        </a:xfrm>
-      </p:grpSpPr>
-      <p:sp>
-        <p:nvSpPr>
-          <p:cNvPr id="2" name="Text 0"/>
-          <p:cNvSpPr/>
-          <p:nvPr/>
-        </p:nvSpPr>
-        <p:spPr>
-          <a:xfrm>
-            <a:off x="812782" y="812781"/>
-            <a:ext cx="10883429" cy="238810"/>
-          </a:xfrm>
-          <a:prstGeom prst="rect">
-            <a:avLst/>
-          </a:prstGeom>
-          <a:noFill/>
-          <a:ln/>
-        </p:spPr>
-        <p:txBody>
-          <a:bodyPr wrap="square" lIns="0" tIns="0" rIns="0" bIns="0" rtlCol="0" anchor="t">
-            <a:normAutofit/>
-          </a:bodyPr>
-          <a:lstStyle/>
-          <a:p>
-            <a:pPr algn="l" indent="0" marL="0">
-              <a:lnSpc>
-                <a:spcPts val="1680"/>
-              </a:lnSpc>
-              <a:buNone/>
-            </a:pPr>
-            <a:r>
-              <a:rPr lang="en-US" sz="1200" b="1" spc="200" kern="0" dirty="0">
-                <a:solidFill>
-                  <a:srgbClr val="A84B1A"/>
-                </a:solidFill>
-                <a:latin typeface="IBM Plex Sans" pitchFamily="34" charset="0"/>
-                <a:ea typeface="IBM Plex Sans" pitchFamily="34" charset="-122"/>
-                <a:cs typeface="IBM Plex Sans" pitchFamily="34" charset="-120"/>
-              </a:rPr>
-              <a:t>SAR IN ONE SLIDE</a:t>
-            </a:r>
-            <a:endParaRPr lang="en-US" sz="1200" dirty="0"/>
-          </a:p>
-        </p:txBody>
-      </p:sp>
-      <p:sp>
-        <p:nvSpPr>
-          <p:cNvPr id="3" name="Text 1"/>
-          <p:cNvSpPr/>
-          <p:nvPr>
-            <p:ph type="title"/>
-          </p:nvPr>
-        </p:nvSpPr>
-        <p:spPr>
-          <a:xfrm>
-            <a:off x="812782" y="1127756"/>
-            <a:ext cx="10883429" cy="528259"/>
-          </a:xfrm>
-          <a:prstGeom prst="rect">
-            <a:avLst/>
-          </a:prstGeom>
-          <a:noFill/>
-          <a:ln/>
-        </p:spPr>
-        <p:txBody>
-          <a:bodyPr wrap="square" lIns="0" tIns="0" rIns="0" bIns="0" rtlCol="0" anchor="t">
-            <a:normAutofit/>
-          </a:bodyPr>
-          <a:lstStyle/>
-          <a:p>
-            <a:pPr algn="l" indent="0" marL="0">
-              <a:lnSpc>
-                <a:spcPts val="3960"/>
-              </a:lnSpc>
-              <a:buNone/>
-            </a:pPr>
-            <a:r>
-              <a:rPr lang="en-US" sz="3600" b="1" i="0" dirty="0">
-                <a:solidFill>
-                  <a:srgbClr val="0E2233"/>
-                </a:solidFill>
-                <a:latin typeface="Source Serif 4" pitchFamily="18" charset="0"/>
-                <a:ea typeface="Source Serif 4" pitchFamily="18" charset="-122"/>
-                <a:cs typeface="Source Serif 4" pitchFamily="18" charset="-120"/>
-              </a:rPr>
-              <a:t>Four ideas behind the detector</a:t>
-            </a:r>
-            <a:endParaRPr lang="en-US" sz="3600" dirty="0"/>
-          </a:p>
-        </p:txBody>
-      </p:sp>
-      <p:sp>
-        <p:nvSpPr>
-          <p:cNvPr id="4" name="Shape 2"/>
-          <p:cNvSpPr/>
-          <p:nvPr/>
-        </p:nvSpPr>
-        <p:spPr>
-          <a:xfrm>
-            <a:off x="812782" y="1884614"/>
-            <a:ext cx="5207000" cy="1902474"/>
-          </a:xfrm>
-          <a:prstGeom prst="roundRect">
-            <a:avLst>
-              <a:gd name="adj" fmla="val 5340"/>
-            </a:avLst>
-          </a:prstGeom>
-          <a:solidFill>
-            <a:srgbClr val="FBFCFA"/>
-          </a:solidFill>
-          <a:ln/>
-        </p:spPr>
-      </p:sp>
-      <p:sp>
-        <p:nvSpPr>
-          <p:cNvPr id="5" name="Text 3"/>
-          <p:cNvSpPr/>
-          <p:nvPr/>
-        </p:nvSpPr>
-        <p:spPr>
-          <a:xfrm>
-            <a:off x="1066782" y="2113178"/>
-            <a:ext cx="4839970" cy="360669"/>
-          </a:xfrm>
-          <a:prstGeom prst="rect">
-            <a:avLst/>
-          </a:prstGeom>
-          <a:noFill/>
-          <a:ln/>
-        </p:spPr>
-        <p:txBody>
-          <a:bodyPr wrap="square" lIns="0" tIns="0" rIns="0" bIns="0" rtlCol="0" anchor="t">
-            <a:normAutofit/>
-          </a:bodyPr>
-          <a:lstStyle/>
-          <a:p>
-            <a:pPr algn="l" indent="0" marL="0">
-              <a:lnSpc>
-                <a:spcPts val="2640"/>
-              </a:lnSpc>
-              <a:buNone/>
-            </a:pPr>
-            <a:r>
-              <a:rPr lang="en-US" sz="2200" b="1" dirty="0">
-                <a:solidFill>
-                  <a:srgbClr val="0E2233"/>
-                </a:solidFill>
-                <a:latin typeface="Source Serif 4" pitchFamily="18" charset="0"/>
-                <a:ea typeface="Source Serif 4" pitchFamily="18" charset="-122"/>
-                <a:cs typeface="Source Serif 4" pitchFamily="18" charset="-120"/>
-              </a:rPr>
-              <a:t>Backscatter</a:t>
-            </a:r>
-            <a:endParaRPr lang="en-US" sz="2200" dirty="0"/>
-          </a:p>
-        </p:txBody>
-      </p:sp>
-      <p:sp>
-        <p:nvSpPr>
-          <p:cNvPr id="6" name="Text 4"/>
-          <p:cNvSpPr/>
-          <p:nvPr/>
-        </p:nvSpPr>
-        <p:spPr>
-          <a:xfrm>
-            <a:off x="1066782" y="2524575"/>
-            <a:ext cx="4839970" cy="573989"/>
-          </a:xfrm>
-          <a:prstGeom prst="rect">
-            <a:avLst/>
-          </a:prstGeom>
-          <a:noFill/>
-          <a:ln/>
-        </p:spPr>
-        <p:txBody>
-          <a:bodyPr wrap="square" lIns="0" tIns="0" rIns="0" bIns="0" rtlCol="0" anchor="t">
-            <a:normAutofit/>
-          </a:bodyPr>
-          <a:lstStyle/>
-          <a:p>
-            <a:pPr algn="l" indent="0" marL="0">
-              <a:lnSpc>
-                <a:spcPts val="2160"/>
-              </a:lnSpc>
-              <a:buNone/>
-            </a:pPr>
-            <a:r>
-              <a:rPr lang="en-US" sz="1600" dirty="0">
-                <a:solidFill>
-                  <a:srgbClr val="46566A"/>
-                </a:solidFill>
-                <a:latin typeface="IBM Plex Sans" pitchFamily="34" charset="0"/>
-                <a:ea typeface="IBM Plex Sans" pitchFamily="34" charset="-122"/>
-                <a:cs typeface="IBM Plex Sans" pitchFamily="34" charset="-120"/>
-              </a:rPr>
-              <a:t>Calm water reflects radar away and looks dark. An iceberg's facets send energy back and look bright.</a:t>
-            </a:r>
-            <a:endParaRPr lang="en-US" sz="1600" dirty="0"/>
-          </a:p>
-        </p:txBody>
-      </p:sp>
-      <p:sp>
-        <p:nvSpPr>
-          <p:cNvPr id="7" name="Shape 5"/>
-          <p:cNvSpPr/>
-          <p:nvPr/>
-        </p:nvSpPr>
-        <p:spPr>
-          <a:xfrm>
-            <a:off x="6172128" y="1884614"/>
-            <a:ext cx="5207090" cy="1902474"/>
-          </a:xfrm>
-          <a:prstGeom prst="roundRect">
-            <a:avLst>
-              <a:gd name="adj" fmla="val 5340"/>
-            </a:avLst>
-          </a:prstGeom>
-          <a:solidFill>
-            <a:srgbClr val="FBFCFA"/>
-          </a:solidFill>
-          <a:ln/>
-        </p:spPr>
-      </p:sp>
-      <p:sp>
-        <p:nvSpPr>
-          <p:cNvPr id="8" name="Text 6"/>
-          <p:cNvSpPr/>
-          <p:nvPr/>
-        </p:nvSpPr>
-        <p:spPr>
-          <a:xfrm>
-            <a:off x="6426128" y="2113178"/>
-            <a:ext cx="4840063" cy="360669"/>
-          </a:xfrm>
-          <a:prstGeom prst="rect">
-            <a:avLst/>
-          </a:prstGeom>
-          <a:noFill/>
-          <a:ln/>
-        </p:spPr>
-        <p:txBody>
-          <a:bodyPr wrap="square" lIns="0" tIns="0" rIns="0" bIns="0" rtlCol="0" anchor="t">
-            <a:normAutofit/>
-          </a:bodyPr>
-          <a:lstStyle/>
-          <a:p>
-            <a:pPr algn="l" indent="0" marL="0">
-              <a:lnSpc>
-                <a:spcPts val="2640"/>
-              </a:lnSpc>
-              <a:buNone/>
-            </a:pPr>
-            <a:r>
-              <a:rPr lang="en-US" sz="2200" b="1" dirty="0">
-                <a:solidFill>
-                  <a:srgbClr val="0E2233"/>
-                </a:solidFill>
-                <a:latin typeface="Source Serif 4" pitchFamily="18" charset="0"/>
-                <a:ea typeface="Source Serif 4" pitchFamily="18" charset="-122"/>
-                <a:cs typeface="Source Serif 4" pitchFamily="18" charset="-120"/>
-              </a:rPr>
-              <a:t>Polarization</a:t>
-            </a:r>
-            <a:endParaRPr lang="en-US" sz="2200" dirty="0"/>
-          </a:p>
-        </p:txBody>
-      </p:sp>
-      <p:sp>
-        <p:nvSpPr>
-          <p:cNvPr id="9" name="Text 7"/>
-          <p:cNvSpPr/>
-          <p:nvPr/>
-        </p:nvSpPr>
-        <p:spPr>
-          <a:xfrm>
-            <a:off x="6426128" y="2524575"/>
-            <a:ext cx="4840063" cy="573989"/>
-          </a:xfrm>
-          <a:prstGeom prst="rect">
-            <a:avLst/>
-          </a:prstGeom>
-          <a:noFill/>
-          <a:ln/>
-        </p:spPr>
-        <p:txBody>
-          <a:bodyPr wrap="square" lIns="0" tIns="0" rIns="0" bIns="0" rtlCol="0" anchor="t">
-            <a:normAutofit/>
-          </a:bodyPr>
-          <a:lstStyle/>
-          <a:p>
-            <a:pPr algn="l" indent="0" marL="0">
-              <a:lnSpc>
-                <a:spcPts val="2160"/>
-              </a:lnSpc>
-              <a:buNone/>
-            </a:pPr>
-            <a:r>
-              <a:rPr lang="en-US" sz="1600" dirty="0">
-                <a:solidFill>
-                  <a:srgbClr val="46566A"/>
-                </a:solidFill>
-                <a:latin typeface="IBM Plex Sans" pitchFamily="34" charset="0"/>
-                <a:ea typeface="IBM Plex Sans" pitchFamily="34" charset="-122"/>
-                <a:cs typeface="IBM Plex Sans" pitchFamily="34" charset="-120"/>
-              </a:rPr>
-              <a:t>Sea clutter is far weaker in cross-pol (HV), so bergs stand out there. HH is the second check.</a:t>
-            </a:r>
-            <a:endParaRPr lang="en-US" sz="1600" dirty="0"/>
-          </a:p>
-        </p:txBody>
-      </p:sp>
-      <p:sp>
-        <p:nvSpPr>
-          <p:cNvPr id="10" name="Shape 8"/>
-          <p:cNvSpPr/>
-          <p:nvPr/>
-        </p:nvSpPr>
-        <p:spPr>
-          <a:xfrm>
-            <a:off x="812782" y="3939434"/>
-            <a:ext cx="5207000" cy="1902564"/>
-          </a:xfrm>
-          <a:prstGeom prst="roundRect">
-            <a:avLst>
-              <a:gd name="adj" fmla="val 5340"/>
-            </a:avLst>
-          </a:prstGeom>
-          <a:solidFill>
-            <a:srgbClr val="FBFCFA"/>
-          </a:solidFill>
-          <a:ln/>
-        </p:spPr>
-      </p:sp>
-      <p:sp>
-        <p:nvSpPr>
-          <p:cNvPr id="11" name="Text 9"/>
-          <p:cNvSpPr/>
-          <p:nvPr/>
-        </p:nvSpPr>
-        <p:spPr>
-          <a:xfrm>
-            <a:off x="1066782" y="4167998"/>
-            <a:ext cx="4839970" cy="360669"/>
-          </a:xfrm>
-          <a:prstGeom prst="rect">
-            <a:avLst/>
-          </a:prstGeom>
-          <a:noFill/>
-          <a:ln/>
-        </p:spPr>
-        <p:txBody>
-          <a:bodyPr wrap="square" lIns="0" tIns="0" rIns="0" bIns="0" rtlCol="0" anchor="t">
-            <a:normAutofit/>
-          </a:bodyPr>
-          <a:lstStyle/>
-          <a:p>
-            <a:pPr algn="l" indent="0" marL="0">
-              <a:lnSpc>
-                <a:spcPts val="2640"/>
-              </a:lnSpc>
-              <a:buNone/>
-            </a:pPr>
-            <a:r>
-              <a:rPr lang="en-US" sz="2200" b="1" dirty="0">
-                <a:solidFill>
-                  <a:srgbClr val="0E2233"/>
-                </a:solidFill>
-                <a:latin typeface="Source Serif 4" pitchFamily="18" charset="0"/>
-                <a:ea typeface="Source Serif 4" pitchFamily="18" charset="-122"/>
-                <a:cs typeface="Source Serif 4" pitchFamily="18" charset="-120"/>
-              </a:rPr>
-              <a:t>Speckle</a:t>
-            </a:r>
-            <a:endParaRPr lang="en-US" sz="2200" dirty="0"/>
-          </a:p>
-        </p:txBody>
-      </p:sp>
-      <p:sp>
-        <p:nvSpPr>
-          <p:cNvPr id="12" name="Text 10"/>
-          <p:cNvSpPr/>
-          <p:nvPr/>
-        </p:nvSpPr>
-        <p:spPr>
-          <a:xfrm>
-            <a:off x="1066782" y="4579395"/>
-            <a:ext cx="4839970" cy="573989"/>
-          </a:xfrm>
-          <a:prstGeom prst="rect">
-            <a:avLst/>
-          </a:prstGeom>
-          <a:noFill/>
-          <a:ln/>
-        </p:spPr>
-        <p:txBody>
-          <a:bodyPr wrap="square" lIns="0" tIns="0" rIns="0" bIns="0" rtlCol="0" anchor="t">
-            <a:normAutofit/>
-          </a:bodyPr>
-          <a:lstStyle/>
-          <a:p>
-            <a:pPr algn="l" indent="0" marL="0">
-              <a:lnSpc>
-                <a:spcPts val="2160"/>
-              </a:lnSpc>
-              <a:buNone/>
-            </a:pPr>
-            <a:r>
-              <a:rPr lang="en-US" sz="1600" dirty="0">
-                <a:solidFill>
-                  <a:srgbClr val="46566A"/>
-                </a:solidFill>
-                <a:latin typeface="IBM Plex Sans" pitchFamily="34" charset="0"/>
-                <a:ea typeface="IBM Plex Sans" pitchFamily="34" charset="-122"/>
-                <a:cs typeface="IBM Plex Sans" pitchFamily="34" charset="-120"/>
-              </a:rPr>
-              <a:t>Grainy noise in every SAR image. Its strength (ENL) is measured per scene and sets the threshold.</a:t>
-            </a:r>
-            <a:endParaRPr lang="en-US" sz="1600" dirty="0"/>
-          </a:p>
-        </p:txBody>
-      </p:sp>
-      <p:sp>
-        <p:nvSpPr>
-          <p:cNvPr id="13" name="Shape 11"/>
-          <p:cNvSpPr/>
-          <p:nvPr/>
-        </p:nvSpPr>
-        <p:spPr>
-          <a:xfrm>
-            <a:off x="6172128" y="3939434"/>
-            <a:ext cx="5207090" cy="1902564"/>
-          </a:xfrm>
-          <a:prstGeom prst="roundRect">
-            <a:avLst>
-              <a:gd name="adj" fmla="val 5340"/>
-            </a:avLst>
-          </a:prstGeom>
-          <a:solidFill>
-            <a:srgbClr val="FBFCFA"/>
-          </a:solidFill>
-          <a:ln/>
-        </p:spPr>
-      </p:sp>
-      <p:sp>
-        <p:nvSpPr>
-          <p:cNvPr id="14" name="Text 12"/>
-          <p:cNvSpPr/>
-          <p:nvPr/>
-        </p:nvSpPr>
-        <p:spPr>
-          <a:xfrm>
-            <a:off x="6426128" y="4167998"/>
-            <a:ext cx="4840063" cy="360669"/>
-          </a:xfrm>
-          <a:prstGeom prst="rect">
-            <a:avLst/>
-          </a:prstGeom>
-          <a:noFill/>
-          <a:ln/>
-        </p:spPr>
-        <p:txBody>
-          <a:bodyPr wrap="square" lIns="0" tIns="0" rIns="0" bIns="0" rtlCol="0" anchor="t">
-            <a:normAutofit/>
-          </a:bodyPr>
-          <a:lstStyle/>
-          <a:p>
-            <a:pPr algn="l" indent="0" marL="0">
-              <a:lnSpc>
-                <a:spcPts val="2640"/>
-              </a:lnSpc>
-              <a:buNone/>
-            </a:pPr>
-            <a:r>
-              <a:rPr lang="en-US" sz="2200" b="1" dirty="0">
-                <a:solidFill>
-                  <a:srgbClr val="0E2233"/>
-                </a:solidFill>
-                <a:latin typeface="Source Serif 4" pitchFamily="18" charset="0"/>
-                <a:ea typeface="Source Serif 4" pitchFamily="18" charset="-122"/>
-                <a:cs typeface="Source Serif 4" pitchFamily="18" charset="-120"/>
-              </a:rPr>
-              <a:t>CFAR</a:t>
-            </a:r>
-            <a:endParaRPr lang="en-US" sz="2200" dirty="0"/>
-          </a:p>
-        </p:txBody>
-      </p:sp>
-      <p:sp>
-        <p:nvSpPr>
-          <p:cNvPr id="15" name="Text 13"/>
-          <p:cNvSpPr/>
-          <p:nvPr/>
-        </p:nvSpPr>
-        <p:spPr>
-          <a:xfrm>
-            <a:off x="6426128" y="4579395"/>
-            <a:ext cx="4840063" cy="573989"/>
-          </a:xfrm>
-          <a:prstGeom prst="rect">
-            <a:avLst/>
-          </a:prstGeom>
-          <a:noFill/>
-          <a:ln/>
-        </p:spPr>
-        <p:txBody>
-          <a:bodyPr wrap="square" lIns="0" tIns="0" rIns="0" bIns="0" rtlCol="0" anchor="t">
-            <a:normAutofit/>
-          </a:bodyPr>
-          <a:lstStyle/>
-          <a:p>
-            <a:pPr algn="l" indent="0" marL="0">
-              <a:lnSpc>
-                <a:spcPts val="2160"/>
-              </a:lnSpc>
-              <a:buNone/>
-            </a:pPr>
-            <a:r>
-              <a:rPr lang="en-US" sz="1600" dirty="0">
-                <a:solidFill>
-                  <a:srgbClr val="46566A"/>
-                </a:solidFill>
-                <a:latin typeface="IBM Plex Sans" pitchFamily="34" charset="0"/>
-                <a:ea typeface="IBM Plex Sans" pitchFamily="34" charset="-122"/>
-                <a:cs typeface="IBM Plex Sans" pitchFamily="34" charset="-120"/>
-              </a:rPr>
-              <a:t>Each pixel is compared with its local background, so false alarms stay rare in calm and rough seas.</a:t>
-            </a:r>
-            <a:endParaRPr lang="en-US" sz="1600" dirty="0"/>
-          </a:p>
-        </p:txBody>
-      </p:sp>
-      <p:sp>
-        <p:nvSpPr>
-          <p:cNvPr id="16" name="Text 14"/>
-          <p:cNvSpPr/>
-          <p:nvPr/>
-        </p:nvSpPr>
-        <p:spPr>
-          <a:xfrm>
-            <a:off x="812782" y="6238242"/>
-            <a:ext cx="4114800" cy="238810"/>
-          </a:xfrm>
-          <a:prstGeom prst="rect">
-            <a:avLst/>
-          </a:prstGeom>
-          <a:noFill/>
-          <a:ln/>
-        </p:spPr>
-        <p:txBody>
-          <a:bodyPr wrap="square" lIns="0" tIns="0" rIns="0" bIns="0" rtlCol="0" anchor="t">
-            <a:normAutofit/>
-          </a:bodyPr>
-          <a:lstStyle/>
-          <a:p>
-            <a:pPr algn="l" indent="0" marL="0">
-              <a:lnSpc>
-                <a:spcPts val="1680"/>
-              </a:lnSpc>
-              <a:buNone/>
-            </a:pPr>
-            <a:r>
-              <a:rPr lang="en-US" sz="1200" dirty="0">
-                <a:solidFill>
-                  <a:srgbClr val="5A6978"/>
-                </a:solidFill>
-                <a:latin typeface="IBM Plex Sans" pitchFamily="34" charset="0"/>
-                <a:ea typeface="IBM Plex Sans" pitchFamily="34" charset="-122"/>
-                <a:cs typeface="IBM Plex Sans" pitchFamily="34" charset="-120"/>
-              </a:rPr>
-              <a:t>Iceberg Alley SAR · Project brief</a:t>
-            </a:r>
-            <a:endParaRPr lang="en-US" sz="1200" dirty="0"/>
-          </a:p>
-        </p:txBody>
-      </p:sp>
-      <p:sp>
-        <p:nvSpPr>
-          <p:cNvPr id="17" name="Text 15"/>
-          <p:cNvSpPr/>
-          <p:nvPr/>
-        </p:nvSpPr>
-        <p:spPr>
-          <a:xfrm>
-            <a:off x="11237976" y="6238242"/>
-            <a:ext cx="146304" cy="238810"/>
-          </a:xfrm>
-          <a:prstGeom prst="rect">
-            <a:avLst/>
-          </a:prstGeom>
-          <a:noFill/>
-          <a:ln/>
-        </p:spPr>
-        <p:txBody>
-          <a:bodyPr wrap="square" lIns="0" tIns="0" rIns="0" bIns="0" rtlCol="0" anchor="t">
-            <a:normAutofit/>
-          </a:bodyPr>
-          <a:lstStyle/>
-          <a:p>
-            <a:pPr algn="r" indent="0" marL="0">
-              <a:lnSpc>
-                <a:spcPts val="1680"/>
-              </a:lnSpc>
-              <a:buNone/>
-            </a:pPr>
-            <a:r>
-              <a:rPr lang="en-US" sz="1200" dirty="0">
-                <a:solidFill>
-                  <a:srgbClr val="5A6978"/>
-                </a:solidFill>
-                <a:latin typeface="IBM Plex Sans" pitchFamily="34" charset="0"/>
-                <a:ea typeface="IBM Plex Sans" pitchFamily="34" charset="-122"/>
-                <a:cs typeface="IBM Plex Sans" pitchFamily="34" charset="-120"/>
-              </a:rPr>
-              <a:t>4</a:t>
-            </a:r>
-            <a:endParaRPr lang="en-US" sz="1200" dirty="0"/>
-          </a:p>
-        </p:txBody>
-      </p:sp>
-    </p:spTree>
-  </p:cSld>
-  <p:clrMapOvr>
-    <a:masterClrMapping/>
-  </p:clrMapOvr>
-</p:sld>
-</file>
-
-<file path=ppt/slides/slide5.xml><?xml version="1.0" encoding="utf-8"?>
-<p:sld xmlns:a="http://schemas.openxmlformats.org/drawingml/2006/main" xmlns:r="http://schemas.openxmlformats.org/officeDocument/2006/relationships" xmlns:p="http://schemas.openxmlformats.org/presentationml/2006/main">
-  <p:cSld name="Slide 5">
-    <p:bg>
-      <p:bgPr>
-        <a:solidFill>
-          <a:srgbClr val="F4F6F3"/>
-        </a:solidFill>
-      </p:bgPr>
-    </p:bg>
-    <p:spTree>
-      <p:nvGrpSpPr>
-        <p:cNvPr id="1" name=""/>
-        <p:cNvGrpSpPr/>
-        <p:nvPr/>
-      </p:nvGrpSpPr>
-      <p:grpSpPr>
-        <a:xfrm>
-          <a:off x="0" y="0"/>
-          <a:ext cx="0" cy="0"/>
-          <a:chOff x="0" y="0"/>
-          <a:chExt cx="0" cy="0"/>
-        </a:xfrm>
-      </p:grpSpPr>
-      <p:sp>
-        <p:nvSpPr>
-          <p:cNvPr id="2" name="Text 0"/>
-          <p:cNvSpPr/>
-          <p:nvPr/>
-        </p:nvSpPr>
-        <p:spPr>
-          <a:xfrm>
-            <a:off x="812782" y="1518949"/>
-            <a:ext cx="4447540" cy="238810"/>
-          </a:xfrm>
-          <a:prstGeom prst="rect">
-            <a:avLst/>
-          </a:prstGeom>
-          <a:noFill/>
-          <a:ln/>
-        </p:spPr>
-        <p:txBody>
-          <a:bodyPr wrap="square" lIns="0" tIns="0" rIns="0" bIns="0" rtlCol="0" anchor="t">
-            <a:normAutofit/>
-          </a:bodyPr>
-          <a:lstStyle/>
-          <a:p>
-            <a:pPr algn="l" indent="0" marL="0">
-              <a:lnSpc>
-                <a:spcPts val="1680"/>
-              </a:lnSpc>
-              <a:buNone/>
-            </a:pPr>
-            <a:r>
-              <a:rPr lang="en-US" sz="1200" b="1" spc="200" kern="0" dirty="0">
-                <a:solidFill>
-                  <a:srgbClr val="A84B1A"/>
-                </a:solidFill>
-                <a:latin typeface="IBM Plex Sans" pitchFamily="34" charset="0"/>
-                <a:ea typeface="IBM Plex Sans" pitchFamily="34" charset="-122"/>
-                <a:cs typeface="IBM Plex Sans" pitchFamily="34" charset="-120"/>
-              </a:rPr>
-              <a:t>DETECTION</a:t>
-            </a:r>
-            <a:endParaRPr lang="en-US" sz="1200" dirty="0"/>
-          </a:p>
-        </p:txBody>
-      </p:sp>
-      <p:sp>
-        <p:nvSpPr>
-          <p:cNvPr id="3" name="Text 1"/>
-          <p:cNvSpPr/>
-          <p:nvPr>
-            <p:ph type="title"/>
-          </p:nvPr>
-        </p:nvSpPr>
-        <p:spPr>
-          <a:xfrm>
-            <a:off x="812782" y="1935485"/>
-            <a:ext cx="4447540" cy="1031117"/>
-          </a:xfrm>
-          <a:prstGeom prst="rect">
-            <a:avLst/>
-          </a:prstGeom>
-          <a:noFill/>
-          <a:ln/>
-        </p:spPr>
-        <p:txBody>
-          <a:bodyPr wrap="square" lIns="0" tIns="0" rIns="0" bIns="0" rtlCol="0" anchor="t">
-            <a:normAutofit/>
-          </a:bodyPr>
-          <a:lstStyle/>
-          <a:p>
-            <a:pPr algn="l" indent="0" marL="0">
-              <a:lnSpc>
-                <a:spcPts val="3960"/>
-              </a:lnSpc>
-              <a:buNone/>
-            </a:pPr>
-            <a:r>
-              <a:rPr lang="en-US" sz="3600" b="1" i="0" dirty="0">
-                <a:solidFill>
-                  <a:srgbClr val="0E2233"/>
-                </a:solidFill>
-                <a:latin typeface="Source Serif 4" pitchFamily="18" charset="0"/>
-                <a:ea typeface="Source Serif 4" pitchFamily="18" charset="-122"/>
-                <a:cs typeface="Source Serif 4" pitchFamily="18" charset="-120"/>
-              </a:rPr>
-              <a:t>CFAR on HV, then three filters</a:t>
-            </a:r>
-            <a:endParaRPr lang="en-US" sz="3600" dirty="0"/>
-          </a:p>
-        </p:txBody>
-      </p:sp>
-      <p:sp>
-        <p:nvSpPr>
-          <p:cNvPr id="4" name="Text 2"/>
-          <p:cNvSpPr/>
-          <p:nvPr/>
-        </p:nvSpPr>
-        <p:spPr>
-          <a:xfrm>
-            <a:off x="870440" y="3144332"/>
-            <a:ext cx="4382262" cy="2016810"/>
-          </a:xfrm>
-          <a:prstGeom prst="rect">
-            <a:avLst/>
-          </a:prstGeom>
-          <a:noFill/>
-          <a:ln/>
-        </p:spPr>
-        <p:txBody>
-          <a:bodyPr wrap="square" lIns="0" tIns="0" rIns="0" bIns="0" rtlCol="0" anchor="t">
-            <a:normAutofit/>
-          </a:bodyPr>
-          <a:lstStyle/>
-          <a:p>
-            <a:pPr algn="l" marL="196342" indent="-196342">
-              <a:lnSpc>
-                <a:spcPts val="2240"/>
-              </a:lnSpc>
-              <a:buSzPct val="100000"/>
-              <a:buChar char="•"/>
-            </a:pPr>
-            <a:r>
-              <a:rPr lang="en-US" sz="1600" b="1" dirty="0">
-                <a:solidFill>
-                  <a:srgbClr val="46566A"/>
-                </a:solidFill>
-                <a:latin typeface="IBM Plex Sans" pitchFamily="34" charset="0"/>
-                <a:ea typeface="IBM Plex Sans" pitchFamily="34" charset="-122"/>
-                <a:cs typeface="IBM Plex Sans" pitchFamily="34" charset="-120"/>
-              </a:rPr>
-              <a:t>Threshold</a:t>
-            </a:r>
-            <a:r>
-              <a:rPr lang="en-US" sz="1600" dirty="0">
-                <a:solidFill>
-                  <a:srgbClr val="46566A"/>
-                </a:solidFill>
-                <a:latin typeface="IBM Plex Sans" pitchFamily="34" charset="0"/>
-                <a:ea typeface="IBM Plex Sans" pitchFamily="34" charset="-122"/>
-                <a:cs typeface="IBM Plex Sans" pitchFamily="34" charset="-120"/>
-              </a:rPr>
-              <a:t> from a 10⁻⁶ false-alarm rate, speckle measured per scene</a:t>
-            </a:r>
-            <a:endParaRPr lang="en-US" sz="1600" dirty="0"/>
-          </a:p>
-          <a:p>
-            <a:pPr algn="l" marL="196342" indent="-196342">
-              <a:lnSpc>
-                <a:spcPts val="2240"/>
-              </a:lnSpc>
-              <a:buSzPct val="100000"/>
-              <a:buChar char="•"/>
-            </a:pPr>
-            <a:r>
-              <a:rPr lang="en-US" sz="1600" b="1" dirty="0">
-                <a:solidFill>
-                  <a:srgbClr val="46566A"/>
-                </a:solidFill>
-                <a:latin typeface="IBM Plex Sans" pitchFamily="34" charset="0"/>
-                <a:ea typeface="IBM Plex Sans" pitchFamily="34" charset="-122"/>
-                <a:cs typeface="IBM Plex Sans" pitchFamily="34" charset="-120"/>
-              </a:rPr>
-              <a:t>Size:</a:t>
-            </a:r>
-            <a:r>
-              <a:rPr lang="en-US" sz="1600" dirty="0">
-                <a:solidFill>
-                  <a:srgbClr val="46566A"/>
-                </a:solidFill>
-                <a:latin typeface="IBM Plex Sans" pitchFamily="34" charset="0"/>
-                <a:ea typeface="IBM Plex Sans" pitchFamily="34" charset="-122"/>
-                <a:cs typeface="IBM Plex Sans" pitchFamily="34" charset="-120"/>
-              </a:rPr>
-              <a:t> 2 px to 0.8 km²</a:t>
-            </a:r>
-            <a:endParaRPr lang="en-US" sz="1600" dirty="0"/>
-          </a:p>
-          <a:p>
-            <a:pPr algn="l" marL="196342" indent="-196342">
-              <a:lnSpc>
-                <a:spcPts val="2240"/>
-              </a:lnSpc>
-              <a:buSzPct val="100000"/>
-              <a:buChar char="•"/>
-            </a:pPr>
-            <a:r>
-              <a:rPr lang="en-US" sz="1600" b="1" dirty="0">
-                <a:solidFill>
-                  <a:srgbClr val="46566A"/>
-                </a:solidFill>
-                <a:latin typeface="IBM Plex Sans" pitchFamily="34" charset="0"/>
-                <a:ea typeface="IBM Plex Sans" pitchFamily="34" charset="-122"/>
-                <a:cs typeface="IBM Plex Sans" pitchFamily="34" charset="-120"/>
-              </a:rPr>
-              <a:t>Ice strips:</a:t>
-            </a:r>
-            <a:r>
-              <a:rPr lang="en-US" sz="1600" dirty="0">
-                <a:solidFill>
-                  <a:srgbClr val="46566A"/>
-                </a:solidFill>
-                <a:latin typeface="IBM Plex Sans" pitchFamily="34" charset="0"/>
-                <a:ea typeface="IBM Plex Sans" pitchFamily="34" charset="-122"/>
-                <a:cs typeface="IBM Plex Sans" pitchFamily="34" charset="-120"/>
-              </a:rPr>
-              <a:t> reject bright structures longer than 300 m</a:t>
-            </a:r>
-            <a:endParaRPr lang="en-US" sz="1600" dirty="0"/>
-          </a:p>
-          <a:p>
-            <a:pPr algn="l" marL="196342" indent="-196342">
-              <a:lnSpc>
-                <a:spcPts val="2240"/>
-              </a:lnSpc>
-              <a:buSzPct val="100000"/>
-              <a:buChar char="•"/>
-            </a:pPr>
-            <a:r>
-              <a:rPr lang="en-US" sz="1600" b="1" dirty="0">
-                <a:solidFill>
-                  <a:srgbClr val="46566A"/>
-                </a:solidFill>
-                <a:latin typeface="IBM Plex Sans" pitchFamily="34" charset="0"/>
-                <a:ea typeface="IBM Plex Sans" pitchFamily="34" charset="-122"/>
-                <a:cs typeface="IBM Plex Sans" pitchFamily="34" charset="-120"/>
-              </a:rPr>
-              <a:t>HH check:</a:t>
-            </a:r>
-            <a:r>
-              <a:rPr lang="en-US" sz="1600" dirty="0">
-                <a:solidFill>
-                  <a:srgbClr val="46566A"/>
-                </a:solidFill>
-                <a:latin typeface="IBM Plex Sans" pitchFamily="34" charset="0"/>
-                <a:ea typeface="IBM Plex Sans" pitchFamily="34" charset="-122"/>
-                <a:cs typeface="IBM Plex Sans" pitchFamily="34" charset="-120"/>
-              </a:rPr>
-              <a:t> at least 6 dB above background in both polarizations</a:t>
-            </a:r>
-            <a:endParaRPr lang="en-US" sz="1600" dirty="0"/>
-          </a:p>
-        </p:txBody>
-      </p:sp>
-      <p:sp>
-        <p:nvSpPr>
-          <p:cNvPr id="5" name="Shape 3"/>
-          <p:cNvSpPr/>
-          <p:nvPr/>
-        </p:nvSpPr>
-        <p:spPr>
-          <a:xfrm>
-            <a:off x="5486400" y="1042415"/>
-            <a:ext cx="5885502" cy="4261104"/>
-          </a:xfrm>
-          <a:prstGeom prst="roundRect">
-            <a:avLst>
-              <a:gd name="adj" fmla="val 1788"/>
-            </a:avLst>
-          </a:prstGeom>
-          <a:solidFill>
-            <a:srgbClr val="0E2233"/>
-          </a:solidFill>
-          <a:ln/>
-        </p:spPr>
-      </p:sp>
-      <p:pic>
-        <p:nvPicPr>
-          <p:cNvPr id="6" name="Image 0" descr="HV radar scene of 8 May 2025 with land and pack ice masked in black and 140 detections circled in red">    </p:cNvPr>
-          <p:cNvPicPr>
-            <a:picLocks noChangeAspect="1"/>
-          </p:cNvPicPr>
-          <p:nvPr/>
-        </p:nvPicPr>
-        <p:blipFill>
-          <a:blip r:embed="rId4"/>
-          <a:stretch/>
-        </p:blipFill>
-        <p:spPr>
-          <a:xfrm>
-            <a:off x="5486400" y="1042415"/>
-            <a:ext cx="5885502" cy="4261104"/>
-          </a:xfrm>
-          <a:prstGeom prst="roundRect">
-            <a:avLst>
-              <a:gd name="adj" fmla="val 1788"/>
-            </a:avLst>
-          </a:prstGeom>
-        </p:spPr>
-      </p:pic>
-      <p:sp>
-        <p:nvSpPr>
-          <p:cNvPr id="7" name="Text 4"/>
-          <p:cNvSpPr/>
-          <p:nvPr/>
-        </p:nvSpPr>
-        <p:spPr>
-          <a:xfrm>
-            <a:off x="5486346" y="5401828"/>
-            <a:ext cx="6069658" cy="238810"/>
-          </a:xfrm>
-          <a:prstGeom prst="rect">
-            <a:avLst/>
-          </a:prstGeom>
-          <a:noFill/>
-          <a:ln/>
-        </p:spPr>
-        <p:txBody>
-          <a:bodyPr wrap="square" lIns="0" tIns="0" rIns="0" bIns="0" rtlCol="0" anchor="t">
-            <a:normAutofit/>
-          </a:bodyPr>
-          <a:lstStyle/>
-          <a:p>
-            <a:pPr algn="l" indent="0" marL="0">
-              <a:lnSpc>
-                <a:spcPts val="1680"/>
-              </a:lnSpc>
-              <a:buNone/>
-            </a:pPr>
-            <a:r>
-              <a:rPr lang="en-US" sz="1200" dirty="0">
-                <a:solidFill>
-                  <a:srgbClr val="5A6978"/>
-                </a:solidFill>
-                <a:latin typeface="IBM Plex Sans" pitchFamily="34" charset="0"/>
-                <a:ea typeface="IBM Plex Sans" pitchFamily="34" charset="-122"/>
-                <a:cs typeface="IBM Plex Sans" pitchFamily="34" charset="-120"/>
-              </a:rPr>
-              <a:t>HV, 2025-05-08. Land and pack ice masked (black), 111 detections circled.</a:t>
-            </a:r>
-            <a:endParaRPr lang="en-US" sz="1200" dirty="0"/>
-          </a:p>
-        </p:txBody>
-      </p:sp>
-      <p:sp>
-        <p:nvSpPr>
-          <p:cNvPr id="8" name="Text 5"/>
-          <p:cNvSpPr/>
-          <p:nvPr/>
-        </p:nvSpPr>
-        <p:spPr>
-          <a:xfrm>
-            <a:off x="812782" y="6238242"/>
-            <a:ext cx="4114800" cy="238810"/>
-          </a:xfrm>
-          <a:prstGeom prst="rect">
-            <a:avLst/>
-          </a:prstGeom>
-          <a:noFill/>
-          <a:ln/>
-        </p:spPr>
-        <p:txBody>
-          <a:bodyPr wrap="square" lIns="0" tIns="0" rIns="0" bIns="0" rtlCol="0" anchor="t">
-            <a:normAutofit/>
-          </a:bodyPr>
-          <a:lstStyle/>
-          <a:p>
-            <a:pPr algn="l" indent="0" marL="0">
-              <a:lnSpc>
-                <a:spcPts val="1680"/>
-              </a:lnSpc>
-              <a:buNone/>
-            </a:pPr>
-            <a:r>
-              <a:rPr lang="en-US" sz="1200" dirty="0">
-                <a:solidFill>
-                  <a:srgbClr val="5A6978"/>
-                </a:solidFill>
-                <a:latin typeface="IBM Plex Sans" pitchFamily="34" charset="0"/>
-                <a:ea typeface="IBM Plex Sans" pitchFamily="34" charset="-122"/>
-                <a:cs typeface="IBM Plex Sans" pitchFamily="34" charset="-120"/>
-              </a:rPr>
-              <a:t>Iceberg Alley SAR · Project brief</a:t>
-            </a:r>
-            <a:endParaRPr lang="en-US" sz="1200" dirty="0"/>
-          </a:p>
-        </p:txBody>
-      </p:sp>
-      <p:sp>
-        <p:nvSpPr>
-          <p:cNvPr id="9" name="Text 6"/>
-          <p:cNvSpPr/>
-          <p:nvPr/>
-        </p:nvSpPr>
-        <p:spPr>
-          <a:xfrm>
-            <a:off x="11237976" y="6238242"/>
-            <a:ext cx="146304" cy="238810"/>
-          </a:xfrm>
-          <a:prstGeom prst="rect">
-            <a:avLst/>
-          </a:prstGeom>
-          <a:noFill/>
-          <a:ln/>
-        </p:spPr>
-        <p:txBody>
-          <a:bodyPr wrap="square" lIns="0" tIns="0" rIns="0" bIns="0" rtlCol="0" anchor="t">
-            <a:normAutofit/>
-          </a:bodyPr>
-          <a:lstStyle/>
-          <a:p>
-            <a:pPr algn="r" indent="0" marL="0">
-              <a:lnSpc>
-                <a:spcPts val="1680"/>
-              </a:lnSpc>
-              <a:buNone/>
-            </a:pPr>
-            <a:r>
-              <a:rPr lang="en-US" sz="1200" dirty="0">
-                <a:solidFill>
-                  <a:srgbClr val="5A6978"/>
-                </a:solidFill>
-                <a:latin typeface="IBM Plex Sans" pitchFamily="34" charset="0"/>
-                <a:ea typeface="IBM Plex Sans" pitchFamily="34" charset="-122"/>
-                <a:cs typeface="IBM Plex Sans" pitchFamily="34" charset="-120"/>
-              </a:rPr>
-              <a:t>5</a:t>
-            </a:r>
-            <a:endParaRPr lang="en-US" sz="1200" dirty="0"/>
-          </a:p>
-        </p:txBody>
-      </p:sp>
-    </p:spTree>
-  </p:cSld>
-  <p:clrMapOvr>
-    <a:masterClrMapping/>
-  </p:clrMapOvr>
-</p:sld>
-</file>
-
-<file path=ppt/slides/slide6.xml><?xml version="1.0" encoding="utf-8"?>
-<p:sld xmlns:a="http://schemas.openxmlformats.org/drawingml/2006/main" xmlns:r="http://schemas.openxmlformats.org/officeDocument/2006/relationships" xmlns:p="http://schemas.openxmlformats.org/presentationml/2006/main">
-  <p:cSld name="Slide 6">
-    <p:bg>
-      <p:bgPr>
-        <a:solidFill>
-          <a:srgbClr val="F4F6F3"/>
-        </a:solidFill>
-      </p:bgPr>
-    </p:bg>
-    <p:spTree>
-      <p:nvGrpSpPr>
-        <p:cNvPr id="1" name=""/>
-        <p:cNvGrpSpPr/>
-        <p:nvPr/>
-      </p:nvGrpSpPr>
-      <p:grpSpPr>
-        <a:xfrm>
-          <a:off x="0" y="0"/>
-          <a:ext cx="0" cy="0"/>
-          <a:chOff x="0" y="0"/>
-          <a:chExt cx="0" cy="0"/>
-        </a:xfrm>
-      </p:grpSpPr>
-      <p:sp>
-        <p:nvSpPr>
-          <p:cNvPr id="2" name="Text 0"/>
-          <p:cNvSpPr/>
-          <p:nvPr/>
-        </p:nvSpPr>
-        <p:spPr>
-          <a:xfrm>
-            <a:off x="812782" y="812781"/>
-            <a:ext cx="10883429" cy="238810"/>
-          </a:xfrm>
-          <a:prstGeom prst="rect">
-            <a:avLst/>
-          </a:prstGeom>
-          <a:noFill/>
-          <a:ln/>
-        </p:spPr>
-        <p:txBody>
-          <a:bodyPr wrap="square" lIns="0" tIns="0" rIns="0" bIns="0" rtlCol="0" anchor="t">
-            <a:normAutofit/>
-          </a:bodyPr>
-          <a:lstStyle/>
-          <a:p>
-            <a:pPr algn="l" indent="0" marL="0">
-              <a:lnSpc>
-                <a:spcPts val="1680"/>
-              </a:lnSpc>
-              <a:buNone/>
-            </a:pPr>
-            <a:r>
-              <a:rPr lang="en-US" sz="1200" b="1" spc="200" kern="0" dirty="0">
-                <a:solidFill>
-                  <a:srgbClr val="A84B1A"/>
-                </a:solidFill>
-                <a:latin typeface="IBM Plex Sans" pitchFamily="34" charset="0"/>
-                <a:ea typeface="IBM Plex Sans" pitchFamily="34" charset="-122"/>
-                <a:cs typeface="IBM Plex Sans" pitchFamily="34" charset="-120"/>
-              </a:rPr>
-              <a:t>VIEWER</a:t>
-            </a:r>
-            <a:endParaRPr lang="en-US" sz="1200" dirty="0"/>
-          </a:p>
-        </p:txBody>
-      </p:sp>
-      <p:sp>
-        <p:nvSpPr>
-          <p:cNvPr id="3" name="Text 1"/>
-          <p:cNvSpPr/>
-          <p:nvPr>
-            <p:ph type="title"/>
-          </p:nvPr>
-        </p:nvSpPr>
-        <p:spPr>
-          <a:xfrm>
-            <a:off x="812782" y="1127754"/>
-            <a:ext cx="10883429" cy="528259"/>
-          </a:xfrm>
-          <a:prstGeom prst="rect">
-            <a:avLst/>
-          </a:prstGeom>
-          <a:noFill/>
-          <a:ln/>
-        </p:spPr>
-        <p:txBody>
-          <a:bodyPr wrap="square" lIns="0" tIns="0" rIns="0" bIns="0" rtlCol="0" anchor="t">
-            <a:normAutofit/>
-          </a:bodyPr>
-          <a:lstStyle/>
-          <a:p>
-            <a:pPr algn="l" indent="0" marL="0">
-              <a:lnSpc>
-                <a:spcPts val="3960"/>
-              </a:lnSpc>
-              <a:buNone/>
-            </a:pPr>
-            <a:r>
-              <a:rPr lang="en-US" sz="3600" b="1" i="0" dirty="0">
-                <a:solidFill>
-                  <a:srgbClr val="0E2233"/>
-                </a:solidFill>
-                <a:latin typeface="Source Serif 4" pitchFamily="18" charset="0"/>
-                <a:ea typeface="Source Serif 4" pitchFamily="18" charset="-122"/>
-                <a:cs typeface="Source Serif 4" pitchFamily="18" charset="-120"/>
-              </a:rPr>
-              <a:t>Every candidate on a globe, by date</a:t>
-            </a:r>
-            <a:endParaRPr lang="en-US" sz="3600" dirty="0"/>
-          </a:p>
-        </p:txBody>
-      </p:sp>
-      <p:pic>
-        <p:nvPicPr>
-          <p:cNvPr id="4" name="Image 0" descr="Vue and CesiumJS viewer with the 2 May 2025 scene footprint, pack-ice mask and coloured iceberg candidates">    </p:cNvPr>
-          <p:cNvPicPr>
-            <a:picLocks noChangeAspect="1"/>
-          </p:cNvPicPr>
-          <p:nvPr/>
-        </p:nvPicPr>
-        <p:blipFill>
-          <a:blip r:embed="rId1"/>
-          <a:srcRect l="41" r="41" t="0" b="0"/>
-          <a:stretch/>
-        </p:blipFill>
-        <p:spPr>
-          <a:xfrm>
-            <a:off x="812782" y="1884614"/>
-            <a:ext cx="6858000" cy="3860782"/>
-          </a:xfrm>
-          <a:prstGeom prst="roundRect">
-            <a:avLst>
-              <a:gd name="adj" fmla="val 1974"/>
-            </a:avLst>
-          </a:prstGeom>
-        </p:spPr>
-      </p:pic>
-      <p:sp>
-        <p:nvSpPr>
-          <p:cNvPr id="5" name="Text 2"/>
-          <p:cNvSpPr/>
-          <p:nvPr/>
-        </p:nvSpPr>
-        <p:spPr>
-          <a:xfrm>
-            <a:off x="8033222" y="1884614"/>
-            <a:ext cx="3440485" cy="3982785"/>
-          </a:xfrm>
-          <a:prstGeom prst="rect">
-            <a:avLst/>
-          </a:prstGeom>
-          <a:noFill/>
-          <a:ln/>
-        </p:spPr>
-        <p:txBody>
-          <a:bodyPr wrap="square" lIns="0" tIns="0" rIns="0" bIns="0" rtlCol="0" anchor="t">
-            <a:normAutofit/>
-          </a:bodyPr>
-          <a:lstStyle/>
-          <a:p>
-            <a:pPr algn="l" marL="196342" indent="-196342">
-              <a:lnSpc>
-                <a:spcPts val="2160"/>
-              </a:lnSpc>
-              <a:buSzPct val="100000"/>
-              <a:buChar char="•"/>
-            </a:pPr>
-            <a:r>
-              <a:rPr lang="en-US" sz="1600" dirty="0">
-                <a:solidFill>
-                  <a:srgbClr val="46566A"/>
-                </a:solidFill>
-                <a:latin typeface="IBM Plex Sans" pitchFamily="34" charset="0"/>
-                <a:ea typeface="IBM Plex Sans" pitchFamily="34" charset="-122"/>
-                <a:cs typeface="IBM Plex Sans" pitchFamily="34" charset="-120"/>
-              </a:rPr>
-              <a:t>32 passes, 2019–2026, live on GitHub Pages</a:t>
-            </a:r>
-            <a:endParaRPr lang="en-US" sz="1600" dirty="0"/>
-          </a:p>
-          <a:p>
-            <a:pPr algn="l" marL="196342" indent="-196342">
-              <a:lnSpc>
-                <a:spcPts val="2160"/>
-              </a:lnSpc>
-              <a:buSzPct val="100000"/>
-              <a:buChar char="•"/>
-            </a:pPr>
-            <a:r>
-              <a:rPr lang="en-US" sz="1600" dirty="0">
-                <a:solidFill>
-                  <a:srgbClr val="46566A"/>
-                </a:solidFill>
-                <a:latin typeface="IBM Plex Sans" pitchFamily="34" charset="0"/>
-                <a:ea typeface="IBM Plex Sans" pitchFamily="34" charset="-122"/>
-                <a:cs typeface="IBM Plex Sans" pitchFamily="34" charset="-120"/>
-              </a:rPr>
-              <a:t>Scrub the timeline, click a target to see its attributes</a:t>
-            </a:r>
-            <a:endParaRPr lang="en-US" sz="1600" dirty="0"/>
-          </a:p>
-          <a:p>
-            <a:pPr algn="l" marL="196342" indent="-196342">
-              <a:lnSpc>
-                <a:spcPts val="2160"/>
-              </a:lnSpc>
-              <a:buSzPct val="100000"/>
-              <a:buChar char="•"/>
-            </a:pPr>
-            <a:r>
-              <a:rPr lang="en-US" sz="1600" dirty="0">
-                <a:solidFill>
-                  <a:srgbClr val="46566A"/>
-                </a:solidFill>
-                <a:latin typeface="IBM Plex Sans" pitchFamily="34" charset="0"/>
-                <a:ea typeface="IBM Plex Sans" pitchFamily="34" charset="-122"/>
-                <a:cs typeface="IBM Plex Sans" pitchFamily="34" charset="-120"/>
-              </a:rPr>
-              <a:t>Orange dots: CA-CFAR. Cyan rings: THOR (toggle)</a:t>
-            </a:r>
-            <a:endParaRPr lang="en-US" sz="1600" dirty="0"/>
-          </a:p>
-          <a:p>
-            <a:pPr algn="l" marL="196342" indent="-196342">
-              <a:lnSpc>
-                <a:spcPts val="2160"/>
-              </a:lnSpc>
-              <a:buSzPct val="100000"/>
-              <a:buChar char="•"/>
-            </a:pPr>
-            <a:r>
-              <a:rPr lang="en-US" sz="1600" dirty="0">
-                <a:solidFill>
-                  <a:srgbClr val="46566A"/>
-                </a:solidFill>
-                <a:latin typeface="IBM Plex Sans" pitchFamily="34" charset="0"/>
-                <a:ea typeface="IBM Plex Sans" pitchFamily="34" charset="-122"/>
-                <a:cs typeface="IBM Plex Sans" pitchFamily="34" charset="-120"/>
-              </a:rPr>
-              <a:t>Grey: within 5 km of pack ice, likely floes</a:t>
-            </a:r>
-            <a:endParaRPr lang="en-US" sz="1600" dirty="0"/>
-          </a:p>
-        </p:txBody>
-      </p:sp>
-      <p:sp>
-        <p:nvSpPr>
-          <p:cNvPr id="6" name="Text 3"/>
-          <p:cNvSpPr/>
-          <p:nvPr/>
-        </p:nvSpPr>
-        <p:spPr>
-          <a:xfrm>
-            <a:off x="812782" y="6238242"/>
-            <a:ext cx="4114800" cy="238810"/>
-          </a:xfrm>
-          <a:prstGeom prst="rect">
-            <a:avLst/>
-          </a:prstGeom>
-          <a:noFill/>
-          <a:ln/>
-        </p:spPr>
-        <p:txBody>
-          <a:bodyPr wrap="square" lIns="0" tIns="0" rIns="0" bIns="0" rtlCol="0" anchor="t">
-            <a:normAutofit/>
-          </a:bodyPr>
-          <a:lstStyle/>
-          <a:p>
-            <a:pPr algn="l" indent="0" marL="0">
-              <a:lnSpc>
-                <a:spcPts val="1680"/>
-              </a:lnSpc>
-              <a:buNone/>
-            </a:pPr>
-            <a:r>
-              <a:rPr lang="en-US" sz="1200" dirty="0">
-                <a:solidFill>
-                  <a:srgbClr val="5A6978"/>
-                </a:solidFill>
-                <a:latin typeface="IBM Plex Sans" pitchFamily="34" charset="0"/>
-                <a:ea typeface="IBM Plex Sans" pitchFamily="34" charset="-122"/>
-                <a:cs typeface="IBM Plex Sans" pitchFamily="34" charset="-120"/>
-              </a:rPr>
-              <a:t>Iceberg Alley SAR · Project brief</a:t>
-            </a:r>
-            <a:endParaRPr lang="en-US" sz="1200" dirty="0"/>
-          </a:p>
-        </p:txBody>
-      </p:sp>
-      <p:sp>
-        <p:nvSpPr>
-          <p:cNvPr id="7" name="Text 4"/>
-          <p:cNvSpPr/>
-          <p:nvPr/>
-        </p:nvSpPr>
-        <p:spPr>
-          <a:xfrm>
-            <a:off x="11237976" y="6238242"/>
-            <a:ext cx="146304" cy="238810"/>
-          </a:xfrm>
-          <a:prstGeom prst="rect">
-            <a:avLst/>
-          </a:prstGeom>
-          <a:noFill/>
-          <a:ln/>
-        </p:spPr>
-        <p:txBody>
-          <a:bodyPr wrap="square" lIns="0" tIns="0" rIns="0" bIns="0" rtlCol="0" anchor="t">
-            <a:normAutofit/>
-          </a:bodyPr>
-          <a:lstStyle/>
-          <a:p>
-            <a:pPr algn="r" indent="0" marL="0">
-              <a:lnSpc>
-                <a:spcPts val="1680"/>
-              </a:lnSpc>
-              <a:buNone/>
-            </a:pPr>
-            <a:r>
-              <a:rPr lang="en-US" sz="1200" dirty="0">
-                <a:solidFill>
-                  <a:srgbClr val="5A6978"/>
-                </a:solidFill>
-                <a:latin typeface="IBM Plex Sans" pitchFamily="34" charset="0"/>
-                <a:ea typeface="IBM Plex Sans" pitchFamily="34" charset="-122"/>
-                <a:cs typeface="IBM Plex Sans" pitchFamily="34" charset="-120"/>
-              </a:rPr>
-              <a:t>6</a:t>
-            </a:r>
-            <a:endParaRPr lang="en-US" sz="1200" dirty="0"/>
-          </a:p>
-        </p:txBody>
-      </p:sp>
-    </p:spTree>
-  </p:cSld>
-  <p:clrMapOvr>
-    <a:masterClrMapping/>
-  </p:clrMapOvr>
-</p:sld>
-</file>
-
-<file path=ppt/slides/slide7.xml><?xml version="1.0" encoding="utf-8"?>
-<p:sld xmlns:a="http://schemas.openxmlformats.org/drawingml/2006/main" xmlns:r="http://schemas.openxmlformats.org/officeDocument/2006/relationships" xmlns:p="http://schemas.openxmlformats.org/presentationml/2006/main">
-  <p:cSld name="Slide 7">
-    <p:bg>
-      <p:bgPr>
-        <a:solidFill>
-          <a:srgbClr val="F2A766"/>
-        </a:solidFill>
-      </p:bgPr>
-    </p:bg>
-    <p:spTree>
-      <p:nvGrpSpPr>
-        <p:cNvPr id="1" name=""/>
-        <p:cNvGrpSpPr/>
-        <p:nvPr/>
-      </p:nvGrpSpPr>
-      <p:grpSpPr>
-        <a:xfrm>
-          <a:off x="0" y="0"/>
-          <a:ext cx="0" cy="0"/>
-          <a:chOff x="0" y="0"/>
-          <a:chExt cx="0" cy="0"/>
-        </a:xfrm>
-      </p:grpSpPr>
-      <p:sp>
-        <p:nvSpPr>
-          <p:cNvPr id="2" name="Text 0"/>
-          <p:cNvSpPr/>
-          <p:nvPr/>
-        </p:nvSpPr>
-        <p:spPr>
-          <a:xfrm>
-            <a:off x="812782" y="1582446"/>
-            <a:ext cx="10883429" cy="238810"/>
-          </a:xfrm>
-          <a:prstGeom prst="rect">
-            <a:avLst/>
-          </a:prstGeom>
-          <a:noFill/>
-          <a:ln/>
-        </p:spPr>
-        <p:txBody>
-          <a:bodyPr wrap="square" lIns="0" tIns="0" rIns="0" bIns="0" rtlCol="0" anchor="t">
-            <a:normAutofit/>
-          </a:bodyPr>
-          <a:lstStyle/>
-          <a:p>
-            <a:pPr algn="l" indent="0" marL="0">
-              <a:lnSpc>
-                <a:spcPts val="1680"/>
-              </a:lnSpc>
-              <a:buNone/>
-            </a:pPr>
-            <a:r>
-              <a:rPr lang="en-US" sz="1200" b="1" spc="200" kern="0" dirty="0">
-                <a:solidFill>
-                  <a:srgbClr val="0E2233"/>
-                </a:solidFill>
-                <a:latin typeface="IBM Plex Sans" pitchFamily="34" charset="0"/>
-                <a:ea typeface="IBM Plex Sans" pitchFamily="34" charset="-122"/>
-                <a:cs typeface="IBM Plex Sans" pitchFamily="34" charset="-120"/>
-              </a:rPr>
-              <a:t>HEADLINE RESULT</a:t>
-            </a:r>
-            <a:endParaRPr lang="en-US" sz="1200" dirty="0"/>
-          </a:p>
-        </p:txBody>
-      </p:sp>
-      <p:sp>
-        <p:nvSpPr>
-          <p:cNvPr id="3" name="Text 1"/>
-          <p:cNvSpPr/>
-          <p:nvPr/>
-        </p:nvSpPr>
-        <p:spPr>
-          <a:xfrm>
-            <a:off x="812782" y="1948204"/>
-            <a:ext cx="10883429" cy="1549400"/>
-          </a:xfrm>
-          <a:prstGeom prst="rect">
-            <a:avLst/>
-          </a:prstGeom>
-          <a:noFill/>
-          <a:ln/>
-        </p:spPr>
-        <p:txBody>
-          <a:bodyPr wrap="square" lIns="0" tIns="0" rIns="0" bIns="0" rtlCol="0" anchor="t">
-            <a:normAutofit/>
-          </a:bodyPr>
-          <a:lstStyle/>
-          <a:p>
-            <a:pPr algn="l" indent="0" marL="0">
-              <a:lnSpc>
-                <a:spcPts val="12000"/>
-              </a:lnSpc>
-              <a:buNone/>
-            </a:pPr>
-            <a:r>
-              <a:rPr lang="en-US" sz="12000" b="1" dirty="0">
-                <a:solidFill>
-                  <a:srgbClr val="0E2233"/>
-                </a:solidFill>
-                <a:latin typeface="Source Serif 4" pitchFamily="18" charset="0"/>
-                <a:ea typeface="Source Serif 4" pitchFamily="18" charset="-122"/>
-                <a:cs typeface="Source Serif 4" pitchFamily="18" charset="-120"/>
-              </a:rPr>
-              <a:t>78%</a:t>
-            </a:r>
-            <a:endParaRPr lang="en-US" sz="12000" dirty="0"/>
-          </a:p>
-        </p:txBody>
-      </p:sp>
-      <p:sp>
-        <p:nvSpPr>
-          <p:cNvPr id="4" name="Text 2"/>
-          <p:cNvSpPr/>
-          <p:nvPr/>
-        </p:nvSpPr>
-        <p:spPr>
-          <a:xfrm>
-            <a:off x="812782" y="3624551"/>
-            <a:ext cx="9156700" cy="751862"/>
-          </a:xfrm>
-          <a:prstGeom prst="rect">
-            <a:avLst/>
-          </a:prstGeom>
-          <a:noFill/>
-          <a:ln/>
-        </p:spPr>
-        <p:txBody>
-          <a:bodyPr wrap="square" lIns="0" tIns="0" rIns="0" bIns="0" rtlCol="0" anchor="t">
-            <a:normAutofit/>
-          </a:bodyPr>
-          <a:lstStyle/>
-          <a:p>
-            <a:pPr algn="l" indent="0" marL="0">
-              <a:lnSpc>
-                <a:spcPts val="2860"/>
-              </a:lnSpc>
-              <a:buNone/>
-            </a:pPr>
-            <a:r>
-              <a:rPr lang="en-US" sz="2200" dirty="0">
-                <a:solidFill>
-                  <a:srgbClr val="0E2233"/>
-                </a:solidFill>
-                <a:latin typeface="IBM Plex Sans" pitchFamily="34" charset="0"/>
-                <a:ea typeface="IBM Plex Sans" pitchFamily="34" charset="-122"/>
-                <a:cs typeface="IBM Plex Sans" pitchFamily="34" charset="-120"/>
-              </a:rPr>
-              <a:t>of the icebergs that International Ice Patrol analysts marked on the same Sentinel-1 pass were found: </a:t>
-            </a:r>
-            <a:r>
-              <a:rPr lang="en-US" sz="2200" b="1" dirty="0">
-                <a:solidFill>
-                  <a:srgbClr val="0E2233"/>
-                </a:solidFill>
-                <a:latin typeface="IBM Plex Sans" pitchFamily="34" charset="0"/>
-                <a:ea typeface="IBM Plex Sans" pitchFamily="34" charset="-122"/>
-                <a:cs typeface="IBM Plex Sans" pitchFamily="34" charset="-120"/>
-              </a:rPr>
-              <a:t>207 of 267</a:t>
-            </a:r>
-            <a:r>
-              <a:rPr lang="en-US" sz="2200" dirty="0">
-                <a:solidFill>
-                  <a:srgbClr val="0E2233"/>
-                </a:solidFill>
-                <a:latin typeface="IBM Plex Sans" pitchFamily="34" charset="0"/>
-                <a:ea typeface="IBM Plex Sans" pitchFamily="34" charset="-122"/>
-                <a:cs typeface="IBM Plex Sans" pitchFamily="34" charset="-120"/>
-              </a:rPr>
-              <a:t>.</a:t>
-            </a:r>
-            <a:endParaRPr lang="en-US" sz="2200" dirty="0"/>
-          </a:p>
-        </p:txBody>
-      </p:sp>
-      <p:sp>
-        <p:nvSpPr>
-          <p:cNvPr id="5" name="Text 3"/>
-          <p:cNvSpPr/>
-          <p:nvPr/>
-        </p:nvSpPr>
-        <p:spPr>
-          <a:xfrm>
-            <a:off x="812782" y="4503356"/>
-            <a:ext cx="9156700" cy="594374"/>
-          </a:xfrm>
-          <a:prstGeom prst="rect">
-            <a:avLst/>
-          </a:prstGeom>
-          <a:noFill/>
-          <a:ln/>
-        </p:spPr>
-        <p:txBody>
-          <a:bodyPr wrap="square" lIns="0" tIns="0" rIns="0" bIns="0" rtlCol="0" anchor="t">
-            <a:normAutofit/>
-          </a:bodyPr>
-          <a:lstStyle/>
-          <a:p>
-            <a:pPr algn="l" indent="0" marL="0">
-              <a:lnSpc>
-                <a:spcPts val="2240"/>
-              </a:lnSpc>
-              <a:buNone/>
-            </a:pPr>
-            <a:r>
-              <a:rPr lang="en-US" sz="1600" dirty="0">
-                <a:solidFill>
-                  <a:srgbClr val="2A3A4A"/>
-                </a:solidFill>
-                <a:latin typeface="IBM Plex Sans" pitchFamily="34" charset="0"/>
-                <a:ea typeface="IBM Plex Sans" pitchFamily="34" charset="-122"/>
-                <a:cs typeface="IBM Plex Sans" pitchFamily="34" charset="-120"/>
-              </a:rPr>
-              <a:t>2019-04-29 · median position difference 67 m · recall steady at 73–84% from the coast to 100 km offshore</a:t>
-            </a:r>
-            <a:endParaRPr lang="en-US" sz="1600" dirty="0"/>
-          </a:p>
-        </p:txBody>
-      </p:sp>
-      <p:sp>
-        <p:nvSpPr>
-          <p:cNvPr id="6" name="Text 4"/>
-          <p:cNvSpPr/>
-          <p:nvPr/>
-        </p:nvSpPr>
-        <p:spPr>
-          <a:xfrm>
-            <a:off x="812782" y="6238242"/>
-            <a:ext cx="4114800" cy="238810"/>
-          </a:xfrm>
-          <a:prstGeom prst="rect">
-            <a:avLst/>
-          </a:prstGeom>
-          <a:noFill/>
-          <a:ln/>
-        </p:spPr>
-        <p:txBody>
-          <a:bodyPr wrap="square" lIns="0" tIns="0" rIns="0" bIns="0" rtlCol="0" anchor="t">
-            <a:normAutofit/>
-          </a:bodyPr>
-          <a:lstStyle/>
-          <a:p>
-            <a:pPr algn="l" indent="0" marL="0">
-              <a:lnSpc>
-                <a:spcPts val="1680"/>
-              </a:lnSpc>
-              <a:buNone/>
-            </a:pPr>
-            <a:r>
-              <a:rPr lang="en-US" sz="1200" dirty="0">
-                <a:solidFill>
-                  <a:srgbClr val="2A3A4A"/>
-                </a:solidFill>
-                <a:latin typeface="IBM Plex Sans" pitchFamily="34" charset="0"/>
-                <a:ea typeface="IBM Plex Sans" pitchFamily="34" charset="-122"/>
-                <a:cs typeface="IBM Plex Sans" pitchFamily="34" charset="-120"/>
-              </a:rPr>
-              <a:t>Iceberg Alley SAR · Project brief</a:t>
-            </a:r>
-            <a:endParaRPr lang="en-US" sz="1200" dirty="0"/>
-          </a:p>
-        </p:txBody>
-      </p:sp>
-      <p:sp>
-        <p:nvSpPr>
-          <p:cNvPr id="7" name="Text 5"/>
-          <p:cNvSpPr/>
-          <p:nvPr/>
-        </p:nvSpPr>
-        <p:spPr>
-          <a:xfrm>
-            <a:off x="11237976" y="6238242"/>
-            <a:ext cx="146304" cy="238810"/>
-          </a:xfrm>
-          <a:prstGeom prst="rect">
-            <a:avLst/>
-          </a:prstGeom>
-          <a:noFill/>
-          <a:ln/>
-        </p:spPr>
-        <p:txBody>
-          <a:bodyPr wrap="square" lIns="0" tIns="0" rIns="0" bIns="0" rtlCol="0" anchor="t">
-            <a:normAutofit/>
-          </a:bodyPr>
-          <a:lstStyle/>
-          <a:p>
-            <a:pPr algn="r" indent="0" marL="0">
-              <a:lnSpc>
-                <a:spcPts val="1680"/>
-              </a:lnSpc>
-              <a:buNone/>
-            </a:pPr>
-            <a:r>
-              <a:rPr lang="en-US" sz="1200" dirty="0">
-                <a:solidFill>
-                  <a:srgbClr val="2A3A4A"/>
-                </a:solidFill>
-                <a:latin typeface="IBM Plex Sans" pitchFamily="34" charset="0"/>
-                <a:ea typeface="IBM Plex Sans" pitchFamily="34" charset="-122"/>
-                <a:cs typeface="IBM Plex Sans" pitchFamily="34" charset="-120"/>
-              </a:rPr>
-              <a:t>7</a:t>
-            </a:r>
-            <a:endParaRPr lang="en-US" sz="1200" dirty="0"/>
-          </a:p>
-        </p:txBody>
-      </p:sp>
-    </p:spTree>
-  </p:cSld>
-  <p:clrMapOvr>
-    <a:masterClrMapping/>
-  </p:clrMapOvr>
-</p:sld>
-</file>
-
-<file path=ppt/slides/slide8.xml><?xml version="1.0" encoding="utf-8"?>
-<p:sld xmlns:a="http://schemas.openxmlformats.org/drawingml/2006/main" xmlns:r="http://schemas.openxmlformats.org/officeDocument/2006/relationships" xmlns:p="http://schemas.openxmlformats.org/presentationml/2006/main">
-  <p:cSld name="Slide 8">
-    <p:bg>
-      <p:bgPr>
-        <a:solidFill>
-          <a:srgbClr val="F4F6F3"/>
-        </a:solidFill>
-      </p:bgPr>
-    </p:bg>
-    <p:spTree>
-      <p:nvGrpSpPr>
-        <p:cNvPr id="1" name=""/>
-        <p:cNvGrpSpPr/>
-        <p:nvPr/>
-      </p:nvGrpSpPr>
-      <p:grpSpPr>
-        <a:xfrm>
-          <a:off x="0" y="0"/>
-          <a:ext cx="0" cy="0"/>
-          <a:chOff x="0" y="0"/>
-          <a:chExt cx="0" cy="0"/>
-        </a:xfrm>
-      </p:grpSpPr>
-      <p:sp>
-        <p:nvSpPr>
-          <p:cNvPr id="2" name="Text 0"/>
-          <p:cNvSpPr/>
-          <p:nvPr/>
-        </p:nvSpPr>
-        <p:spPr>
-          <a:xfrm>
-            <a:off x="812782" y="812784"/>
-            <a:ext cx="10883429" cy="238810"/>
-          </a:xfrm>
-          <a:prstGeom prst="rect">
-            <a:avLst/>
-          </a:prstGeom>
-          <a:noFill/>
-          <a:ln/>
-        </p:spPr>
-        <p:txBody>
-          <a:bodyPr wrap="square" lIns="0" tIns="0" rIns="0" bIns="0" rtlCol="0" anchor="t">
-            <a:normAutofit/>
-          </a:bodyPr>
-          <a:lstStyle/>
-          <a:p>
-            <a:pPr algn="l" indent="0" marL="0">
-              <a:lnSpc>
-                <a:spcPts val="1680"/>
-              </a:lnSpc>
-              <a:buNone/>
-            </a:pPr>
-            <a:r>
-              <a:rPr lang="en-US" sz="1200" b="1" spc="200" kern="0" dirty="0">
-                <a:solidFill>
-                  <a:srgbClr val="A84B1A"/>
-                </a:solidFill>
-                <a:latin typeface="IBM Plex Sans" pitchFamily="34" charset="0"/>
-                <a:ea typeface="IBM Plex Sans" pitchFamily="34" charset="-122"/>
-                <a:cs typeface="IBM Plex Sans" pitchFamily="34" charset="-120"/>
-              </a:rPr>
-              <a:t>RECALL BY SIZE</a:t>
-            </a:r>
-            <a:endParaRPr lang="en-US" sz="1200" dirty="0"/>
-          </a:p>
-        </p:txBody>
-      </p:sp>
-      <p:sp>
-        <p:nvSpPr>
-          <p:cNvPr id="3" name="Text 1"/>
-          <p:cNvSpPr/>
-          <p:nvPr>
-            <p:ph type="title"/>
-          </p:nvPr>
-        </p:nvSpPr>
-        <p:spPr>
-          <a:xfrm>
-            <a:off x="812782" y="1127758"/>
-            <a:ext cx="10883429" cy="528259"/>
-          </a:xfrm>
-          <a:prstGeom prst="rect">
-            <a:avLst/>
-          </a:prstGeom>
-          <a:noFill/>
-          <a:ln/>
-        </p:spPr>
-        <p:txBody>
-          <a:bodyPr wrap="square" lIns="0" tIns="0" rIns="0" bIns="0" rtlCol="0" anchor="t">
-            <a:normAutofit/>
-          </a:bodyPr>
-          <a:lstStyle/>
-          <a:p>
-            <a:pPr algn="l" indent="0" marL="0">
-              <a:lnSpc>
-                <a:spcPts val="3960"/>
-              </a:lnSpc>
-              <a:buNone/>
-            </a:pPr>
-            <a:r>
-              <a:rPr lang="en-US" sz="3600" b="1" i="0" dirty="0">
-                <a:solidFill>
-                  <a:srgbClr val="0E2233"/>
-                </a:solidFill>
-                <a:latin typeface="Source Serif 4" pitchFamily="18" charset="0"/>
-                <a:ea typeface="Source Serif 4" pitchFamily="18" charset="-122"/>
-                <a:cs typeface="Source Serif 4" pitchFamily="18" charset="-120"/>
-              </a:rPr>
-              <a:t>Medium bergs are found best</a:t>
-            </a:r>
-            <a:endParaRPr lang="en-US" sz="3600" dirty="0"/>
-          </a:p>
-        </p:txBody>
-      </p:sp>
-      <p:graphicFrame>
-        <p:nvGraphicFramePr>
-          <p:cNvPr id="4" name="Table 0"/>
-          <p:cNvGraphicFramePr>
-            <a:graphicFrameLocks noGrp="1"/>
-          </p:cNvGraphicFramePr>
-          <p:nvPr>
-            <p:extLst>
-              <p:ext uri="{D42A27DB-BD31-4B8C-83A1-F6EECF244321}">
-                <p14:modId xmlns:p14="http://schemas.microsoft.com/office/powerpoint/2010/main" val="1579011935"/>
-              </p:ext>
-            </p:extLst>
-          </p:nvPr>
-        </p:nvGraphicFramePr>
-        <p:xfrm>
-          <a:off x="824327" y="1896162"/>
-          <a:ext cx="4050792" cy="2190930"/>
-        </p:xfrm>
-        <a:graphic>
-          <a:graphicData uri="http://schemas.openxmlformats.org/drawingml/2006/table">
-            <a:tbl>
-              <a:tblPr/>
-              <a:tblGrid>
-                <a:gridCol w="2432304"/>
-                <a:gridCol w="1618488"/>
-              </a:tblGrid>
-              <a:tr h="438186">
-                <a:tc>
-                  <a:txBody>
-                    <a:bodyPr/>
-                    <a:lstStyle/>
-                    <a:p>
-                      <a:pPr indent="0" marL="0" algn="l">
-                        <a:lnSpc>
-                          <a:spcPts val="2240"/>
-                        </a:lnSpc>
-                        <a:buNone/>
-                      </a:pPr>
-                      <a:r>
-                        <a:rPr lang="en-US" sz="1600" b="1" dirty="0">
-                          <a:solidFill>
-                            <a:srgbClr val="0E2233"/>
-                          </a:solidFill>
-                          <a:latin typeface="IBM Plex Sans" pitchFamily="34" charset="0"/>
-                          <a:ea typeface="IBM Plex Sans" pitchFamily="34" charset="-122"/>
-                          <a:cs typeface="IBM Plex Sans" pitchFamily="34" charset="-120"/>
-                        </a:rPr>
-                        <a:t>Berg size</a:t>
-                      </a:r>
-                      <a:endParaRPr lang="en-US" sz="1600" dirty="0">
-                        <a:latin typeface="IBM Plex Sans" charset="0"/>
-                        <a:ea typeface="IBM Plex Sans" charset="0"/>
-                        <a:cs typeface="IBM Plex Sans" charset="0"/>
-                      </a:endParaRPr>
-                    </a:p>
-                  </a:txBody>
-                  <a:tcPr marL="71120" marR="71120" marT="71120" marB="71120" anchor="t">
-                    <a:lnL w="12700" cap="flat" cmpd="sng" algn="ctr">
-                      <a:solidFill>
-                        <a:srgbClr val="C3C4C2"/>
-                      </a:solidFill>
-                      <a:prstDash val="solid"/>
-                      <a:round/>
-                      <a:headEnd type="none" w="med" len="med"/>
-                      <a:tailEnd type="none" w="med" len="med"/>
-                    </a:lnL>
-                    <a:lnR w="12700" cap="flat" cmpd="sng" algn="ctr">
-                      <a:solidFill>
-                        <a:srgbClr val="B5B6B4"/>
-                      </a:solidFill>
-                      <a:prstDash val="solid"/>
-                      <a:round/>
-                      <a:headEnd type="none" w="med" len="med"/>
-                      <a:tailEnd type="none" w="med" len="med"/>
-                    </a:lnR>
-                    <a:lnT w="12700" cap="flat" cmpd="sng" algn="ctr">
-                      <a:solidFill>
-                        <a:srgbClr val="C3C4C2"/>
-                      </a:solidFill>
-                      <a:prstDash val="solid"/>
-                      <a:round/>
-                      <a:headEnd type="none" w="med" len="med"/>
-                      <a:tailEnd type="none" w="med" len="med"/>
-                    </a:lnT>
-                    <a:lnB w="12700" cap="flat" cmpd="sng" algn="ctr">
-                      <a:solidFill>
-                        <a:srgbClr val="B5B6B4"/>
-                      </a:solidFill>
-                      <a:prstDash val="solid"/>
-                      <a:round/>
-                      <a:headEnd type="none" w="med" len="med"/>
-                      <a:tailEnd type="none" w="med" len="med"/>
-                    </a:lnB>
-                    <a:solidFill>
-                      <a:srgbClr val="E2E4E1"/>
-                    </a:solidFill>
-                  </a:tcPr>
-                </a:tc>
-                <a:tc>
-                  <a:txBody>
-                    <a:bodyPr/>
-                    <a:lstStyle/>
-                    <a:p>
-                      <a:pPr algn="r" indent="0" marL="0">
-                        <a:lnSpc>
-                          <a:spcPts val="2240"/>
-                        </a:lnSpc>
-                        <a:buNone/>
-                      </a:pPr>
-                      <a:r>
-                        <a:rPr lang="en-US" sz="1600" b="1" dirty="0">
-                          <a:solidFill>
-                            <a:srgbClr val="0E2233"/>
-                          </a:solidFill>
-                          <a:latin typeface="IBM Plex Sans" pitchFamily="34" charset="0"/>
-                          <a:ea typeface="IBM Plex Sans" pitchFamily="34" charset="-122"/>
-                          <a:cs typeface="IBM Plex Sans" pitchFamily="34" charset="-120"/>
-                        </a:rPr>
-                        <a:t>Recall</a:t>
-                      </a:r>
-                      <a:endParaRPr lang="en-US" sz="1600" dirty="0">
-                        <a:latin typeface="IBM Plex Sans" charset="0"/>
-                        <a:ea typeface="IBM Plex Sans" charset="0"/>
-                        <a:cs typeface="IBM Plex Sans" charset="0"/>
-                      </a:endParaRPr>
-                    </a:p>
-                  </a:txBody>
-                  <a:tcPr marL="71120" marR="71120" marT="71120" marB="71120" anchor="t">
-                    <a:lnL w="12700" cap="flat" cmpd="sng" algn="ctr">
-                      <a:solidFill>
-                        <a:srgbClr val="B5B6B4"/>
-                      </a:solidFill>
-                      <a:prstDash val="solid"/>
-                      <a:round/>
-                      <a:headEnd type="none" w="med" len="med"/>
-                      <a:tailEnd type="none" w="med" len="med"/>
-                    </a:lnL>
-                    <a:lnR w="12700" cap="flat" cmpd="sng" algn="ctr">
-                      <a:solidFill>
-                        <a:srgbClr val="B5B6B4"/>
-                      </a:solidFill>
-                      <a:prstDash val="solid"/>
-                      <a:round/>
-                      <a:headEnd type="none" w="med" len="med"/>
-                      <a:tailEnd type="none" w="med" len="med"/>
-                    </a:lnR>
-                    <a:lnT w="12700" cap="flat" cmpd="sng" algn="ctr">
-                      <a:solidFill>
-                        <a:srgbClr val="C3C4C2"/>
-                      </a:solidFill>
-                      <a:prstDash val="solid"/>
-                      <a:round/>
-                      <a:headEnd type="none" w="med" len="med"/>
-                      <a:tailEnd type="none" w="med" len="med"/>
-                    </a:lnT>
-                    <a:lnB w="12700" cap="flat" cmpd="sng" algn="ctr">
-                      <a:solidFill>
-                        <a:srgbClr val="B5B6B4"/>
-                      </a:solidFill>
-                      <a:prstDash val="solid"/>
-                      <a:round/>
-                      <a:headEnd type="none" w="med" len="med"/>
-                      <a:tailEnd type="none" w="med" len="med"/>
-                    </a:lnB>
-                    <a:solidFill>
-                      <a:srgbClr val="E2E4E1"/>
-                    </a:solidFill>
-                  </a:tcPr>
-                </a:tc>
-              </a:tr>
-              <a:tr h="438186">
-                <a:tc>
-                  <a:txBody>
-                    <a:bodyPr/>
-                    <a:lstStyle/>
-                    <a:p>
-                      <a:pPr indent="0" marL="0" algn="l">
-                        <a:lnSpc>
-                          <a:spcPts val="2240"/>
-                        </a:lnSpc>
-                        <a:buNone/>
-                      </a:pPr>
-                      <a:r>
-                        <a:rPr lang="en-US" sz="1600" dirty="0">
-                          <a:solidFill>
-                            <a:srgbClr val="0E2233"/>
-                          </a:solidFill>
-                          <a:latin typeface="IBM Plex Sans" pitchFamily="34" charset="0"/>
-                          <a:ea typeface="IBM Plex Sans" pitchFamily="34" charset="-122"/>
-                          <a:cs typeface="IBM Plex Sans" pitchFamily="34" charset="-120"/>
-                        </a:rPr>
-                        <a:t>Small, 15–60 m</a:t>
-                      </a:r>
-                      <a:endParaRPr lang="en-US" sz="1600" dirty="0">
-                        <a:latin typeface="IBM Plex Sans" charset="0"/>
-                        <a:ea typeface="IBM Plex Sans" charset="0"/>
-                        <a:cs typeface="IBM Plex Sans" charset="0"/>
-                      </a:endParaRPr>
-                    </a:p>
-                  </a:txBody>
-                  <a:tcPr marL="71120" marR="71120" marT="71120" marB="71120" anchor="t">
-                    <a:lnL w="12700" cap="flat" cmpd="sng" algn="ctr">
-                      <a:solidFill>
-                        <a:srgbClr val="C3C4C2"/>
-                      </a:solidFill>
-                      <a:prstDash val="solid"/>
-                      <a:round/>
-                      <a:headEnd type="none" w="med" len="med"/>
-                      <a:tailEnd type="none" w="med" len="med"/>
-                    </a:lnL>
-                    <a:lnR w="12700" cap="flat" cmpd="sng" algn="ctr">
-                      <a:solidFill>
-                        <a:srgbClr val="C3C4C2"/>
-                      </a:solidFill>
-                      <a:prstDash val="solid"/>
-                      <a:round/>
-                      <a:headEnd type="none" w="med" len="med"/>
-                      <a:tailEnd type="none" w="med" len="med"/>
-                    </a:lnR>
-                    <a:lnT w="12700" cap="flat" cmpd="sng" algn="ctr">
-                      <a:solidFill>
-                        <a:srgbClr val="B5B6B4"/>
-                      </a:solidFill>
-                      <a:prstDash val="solid"/>
-                      <a:round/>
-                      <a:headEnd type="none" w="med" len="med"/>
-                      <a:tailEnd type="none" w="med" len="med"/>
-                    </a:lnT>
-                    <a:lnB w="12700" cap="flat" cmpd="sng" algn="ctr">
-                      <a:solidFill>
-                        <a:srgbClr val="C3C4C2"/>
-                      </a:solidFill>
-                      <a:prstDash val="solid"/>
-                      <a:round/>
-                      <a:headEnd type="none" w="med" len="med"/>
-                      <a:tailEnd type="none" w="med" len="med"/>
-                    </a:lnB>
-                  </a:tcPr>
-                </a:tc>
-                <a:tc>
-                  <a:txBody>
-                    <a:bodyPr/>
-                    <a:lstStyle/>
-                    <a:p>
-                      <a:pPr algn="r" indent="0" marL="0">
-                        <a:lnSpc>
-                          <a:spcPts val="2240"/>
-                        </a:lnSpc>
-                        <a:buNone/>
-                      </a:pPr>
-                      <a:r>
-                        <a:rPr lang="en-US" sz="1600" dirty="0">
-                          <a:solidFill>
-                            <a:srgbClr val="0E2233"/>
-                          </a:solidFill>
-                          <a:latin typeface="IBM Plex Sans" pitchFamily="34" charset="0"/>
-                          <a:ea typeface="IBM Plex Sans" pitchFamily="34" charset="-122"/>
-                          <a:cs typeface="IBM Plex Sans" pitchFamily="34" charset="-120"/>
-                        </a:rPr>
-                        <a:t>65%</a:t>
-                      </a:r>
-                      <a:endParaRPr lang="en-US" sz="1600" dirty="0">
-                        <a:latin typeface="IBM Plex Sans" charset="0"/>
-                        <a:ea typeface="IBM Plex Sans" charset="0"/>
-                        <a:cs typeface="IBM Plex Sans" charset="0"/>
-                      </a:endParaRPr>
-                    </a:p>
-                  </a:txBody>
-                  <a:tcPr marL="71120" marR="71120" marT="71120" marB="71120" anchor="t">
-                    <a:lnL w="12700" cap="flat" cmpd="sng" algn="ctr">
-                      <a:solidFill>
-                        <a:srgbClr val="C3C4C2"/>
-                      </a:solidFill>
-                      <a:prstDash val="solid"/>
-                      <a:round/>
-                      <a:headEnd type="none" w="med" len="med"/>
-                      <a:tailEnd type="none" w="med" len="med"/>
-                    </a:lnL>
-                    <a:lnR w="12700" cap="flat" cmpd="sng" algn="ctr">
-                      <a:solidFill>
-                        <a:srgbClr val="C3C4C2"/>
-                      </a:solidFill>
-                      <a:prstDash val="solid"/>
-                      <a:round/>
-                      <a:headEnd type="none" w="med" len="med"/>
-                      <a:tailEnd type="none" w="med" len="med"/>
-                    </a:lnR>
-                    <a:lnT w="12700" cap="flat" cmpd="sng" algn="ctr">
-                      <a:solidFill>
-                        <a:srgbClr val="B5B6B4"/>
-                      </a:solidFill>
-                      <a:prstDash val="solid"/>
-                      <a:round/>
-                      <a:headEnd type="none" w="med" len="med"/>
-                      <a:tailEnd type="none" w="med" len="med"/>
-                    </a:lnT>
-                    <a:lnB w="12700" cap="flat" cmpd="sng" algn="ctr">
-                      <a:solidFill>
-                        <a:srgbClr val="C3C4C2"/>
-                      </a:solidFill>
-                      <a:prstDash val="solid"/>
-                      <a:round/>
-                      <a:headEnd type="none" w="med" len="med"/>
-                      <a:tailEnd type="none" w="med" len="med"/>
-                    </a:lnB>
-                  </a:tcPr>
-                </a:tc>
-              </a:tr>
-              <a:tr h="438186">
-                <a:tc>
-                  <a:txBody>
-                    <a:bodyPr/>
-                    <a:lstStyle/>
-                    <a:p>
-                      <a:pPr indent="0" marL="0" algn="l">
-                        <a:lnSpc>
-                          <a:spcPts val="2240"/>
-                        </a:lnSpc>
-                        <a:buNone/>
-                      </a:pPr>
-                      <a:r>
-                        <a:rPr lang="en-US" sz="1600" dirty="0">
-                          <a:solidFill>
-                            <a:srgbClr val="0E2233"/>
-                          </a:solidFill>
-                          <a:latin typeface="IBM Plex Sans" pitchFamily="34" charset="0"/>
-                          <a:ea typeface="IBM Plex Sans" pitchFamily="34" charset="-122"/>
-                          <a:cs typeface="IBM Plex Sans" pitchFamily="34" charset="-120"/>
-                        </a:rPr>
-                        <a:t>Medium, 61–120 m</a:t>
-                      </a:r>
-                      <a:endParaRPr lang="en-US" sz="1600" dirty="0">
-                        <a:latin typeface="IBM Plex Sans" charset="0"/>
-                        <a:ea typeface="IBM Plex Sans" charset="0"/>
-                        <a:cs typeface="IBM Plex Sans" charset="0"/>
-                      </a:endParaRPr>
-                    </a:p>
-                  </a:txBody>
-                  <a:tcPr marL="71120" marR="71120" marT="71120" marB="71120" anchor="t">
-                    <a:lnL w="12700" cap="flat" cmpd="sng" algn="ctr">
-                      <a:solidFill>
-                        <a:srgbClr val="C3C4C2"/>
-                      </a:solidFill>
-                      <a:prstDash val="solid"/>
-                      <a:round/>
-                      <a:headEnd type="none" w="med" len="med"/>
-                      <a:tailEnd type="none" w="med" len="med"/>
-                    </a:lnL>
-                    <a:lnR w="12700" cap="flat" cmpd="sng" algn="ctr">
-                      <a:solidFill>
-                        <a:srgbClr val="C3C4C2"/>
-                      </a:solidFill>
-                      <a:prstDash val="solid"/>
-                      <a:round/>
-                      <a:headEnd type="none" w="med" len="med"/>
-                      <a:tailEnd type="none" w="med" len="med"/>
-                    </a:lnR>
-                    <a:lnT w="12700" cap="flat" cmpd="sng" algn="ctr">
-                      <a:solidFill>
-                        <a:srgbClr val="C3C4C2"/>
-                      </a:solidFill>
-                      <a:prstDash val="solid"/>
-                      <a:round/>
-                      <a:headEnd type="none" w="med" len="med"/>
-                      <a:tailEnd type="none" w="med" len="med"/>
-                    </a:lnT>
-                    <a:lnB w="12700" cap="flat" cmpd="sng" algn="ctr">
-                      <a:solidFill>
-                        <a:srgbClr val="C3C4C2"/>
-                      </a:solidFill>
-                      <a:prstDash val="solid"/>
-                      <a:round/>
-                      <a:headEnd type="none" w="med" len="med"/>
-                      <a:tailEnd type="none" w="med" len="med"/>
-                    </a:lnB>
-                  </a:tcPr>
-                </a:tc>
-                <a:tc>
-                  <a:txBody>
-                    <a:bodyPr/>
-                    <a:lstStyle/>
-                    <a:p>
-                      <a:pPr algn="r" indent="0" marL="0">
-                        <a:lnSpc>
-                          <a:spcPts val="2240"/>
-                        </a:lnSpc>
-                        <a:buNone/>
-                      </a:pPr>
-                      <a:r>
-                        <a:rPr lang="en-US" sz="1600" dirty="0">
-                          <a:solidFill>
-                            <a:srgbClr val="0E2233"/>
-                          </a:solidFill>
-                          <a:latin typeface="IBM Plex Sans" pitchFamily="34" charset="0"/>
-                          <a:ea typeface="IBM Plex Sans" pitchFamily="34" charset="-122"/>
-                          <a:cs typeface="IBM Plex Sans" pitchFamily="34" charset="-120"/>
-                        </a:rPr>
-                        <a:t>81%</a:t>
-                      </a:r>
-                      <a:endParaRPr lang="en-US" sz="1600" dirty="0">
-                        <a:latin typeface="IBM Plex Sans" charset="0"/>
-                        <a:ea typeface="IBM Plex Sans" charset="0"/>
-                        <a:cs typeface="IBM Plex Sans" charset="0"/>
-                      </a:endParaRPr>
-                    </a:p>
-                  </a:txBody>
-                  <a:tcPr marL="71120" marR="71120" marT="71120" marB="71120" anchor="t">
-                    <a:lnL w="12700" cap="flat" cmpd="sng" algn="ctr">
-                      <a:solidFill>
-                        <a:srgbClr val="C3C4C2"/>
-                      </a:solidFill>
-                      <a:prstDash val="solid"/>
-                      <a:round/>
-                      <a:headEnd type="none" w="med" len="med"/>
-                      <a:tailEnd type="none" w="med" len="med"/>
-                    </a:lnL>
-                    <a:lnR w="12700" cap="flat" cmpd="sng" algn="ctr">
-                      <a:solidFill>
-                        <a:srgbClr val="C3C4C2"/>
-                      </a:solidFill>
-                      <a:prstDash val="solid"/>
-                      <a:round/>
-                      <a:headEnd type="none" w="med" len="med"/>
-                      <a:tailEnd type="none" w="med" len="med"/>
-                    </a:lnR>
-                    <a:lnT w="12700" cap="flat" cmpd="sng" algn="ctr">
-                      <a:solidFill>
-                        <a:srgbClr val="C3C4C2"/>
-                      </a:solidFill>
-                      <a:prstDash val="solid"/>
-                      <a:round/>
-                      <a:headEnd type="none" w="med" len="med"/>
-                      <a:tailEnd type="none" w="med" len="med"/>
-                    </a:lnT>
-                    <a:lnB w="12700" cap="flat" cmpd="sng" algn="ctr">
-                      <a:solidFill>
-                        <a:srgbClr val="C3C4C2"/>
-                      </a:solidFill>
-                      <a:prstDash val="solid"/>
-                      <a:round/>
-                      <a:headEnd type="none" w="med" len="med"/>
-                      <a:tailEnd type="none" w="med" len="med"/>
-                    </a:lnB>
-                  </a:tcPr>
-                </a:tc>
-              </a:tr>
-              <a:tr h="438186">
-                <a:tc>
-                  <a:txBody>
-                    <a:bodyPr/>
-                    <a:lstStyle/>
-                    <a:p>
-                      <a:pPr indent="0" marL="0" algn="l">
-                        <a:lnSpc>
-                          <a:spcPts val="2240"/>
-                        </a:lnSpc>
-                        <a:buNone/>
-                      </a:pPr>
-                      <a:r>
-                        <a:rPr lang="en-US" sz="1600" dirty="0">
-                          <a:solidFill>
-                            <a:srgbClr val="0E2233"/>
-                          </a:solidFill>
-                          <a:latin typeface="IBM Plex Sans" pitchFamily="34" charset="0"/>
-                          <a:ea typeface="IBM Plex Sans" pitchFamily="34" charset="-122"/>
-                          <a:cs typeface="IBM Plex Sans" pitchFamily="34" charset="-120"/>
-                        </a:rPr>
-                        <a:t>Large, over 120 m</a:t>
-                      </a:r>
-                      <a:endParaRPr lang="en-US" sz="1600" dirty="0">
-                        <a:latin typeface="IBM Plex Sans" charset="0"/>
-                        <a:ea typeface="IBM Plex Sans" charset="0"/>
-                        <a:cs typeface="IBM Plex Sans" charset="0"/>
-                      </a:endParaRPr>
-                    </a:p>
-                  </a:txBody>
-                  <a:tcPr marL="71120" marR="71120" marT="71120" marB="71120" anchor="t">
-                    <a:lnL w="12700" cap="flat" cmpd="sng" algn="ctr">
-                      <a:solidFill>
-                        <a:srgbClr val="C3C4C2"/>
-                      </a:solidFill>
-                      <a:prstDash val="solid"/>
-                      <a:round/>
-                      <a:headEnd type="none" w="med" len="med"/>
-                      <a:tailEnd type="none" w="med" len="med"/>
-                    </a:lnL>
-                    <a:lnR w="12700" cap="flat" cmpd="sng" algn="ctr">
-                      <a:solidFill>
-                        <a:srgbClr val="C3C4C2"/>
-                      </a:solidFill>
-                      <a:prstDash val="solid"/>
-                      <a:round/>
-                      <a:headEnd type="none" w="med" len="med"/>
-                      <a:tailEnd type="none" w="med" len="med"/>
-                    </a:lnR>
-                    <a:lnT w="12700" cap="flat" cmpd="sng" algn="ctr">
-                      <a:solidFill>
-                        <a:srgbClr val="C3C4C2"/>
-                      </a:solidFill>
-                      <a:prstDash val="solid"/>
-                      <a:round/>
-                      <a:headEnd type="none" w="med" len="med"/>
-                      <a:tailEnd type="none" w="med" len="med"/>
-                    </a:lnT>
-                    <a:lnB w="12700" cap="flat" cmpd="sng" algn="ctr">
-                      <a:solidFill>
-                        <a:srgbClr val="C3C4C2"/>
-                      </a:solidFill>
-                      <a:prstDash val="solid"/>
-                      <a:round/>
-                      <a:headEnd type="none" w="med" len="med"/>
-                      <a:tailEnd type="none" w="med" len="med"/>
-                    </a:lnB>
-                  </a:tcPr>
-                </a:tc>
-                <a:tc>
-                  <a:txBody>
-                    <a:bodyPr/>
-                    <a:lstStyle/>
-                    <a:p>
-                      <a:pPr algn="r" indent="0" marL="0">
-                        <a:lnSpc>
-                          <a:spcPts val="2240"/>
-                        </a:lnSpc>
-                        <a:buNone/>
-                      </a:pPr>
-                      <a:r>
-                        <a:rPr lang="en-US" sz="1600" dirty="0">
-                          <a:solidFill>
-                            <a:srgbClr val="0E2233"/>
-                          </a:solidFill>
-                          <a:latin typeface="IBM Plex Sans" pitchFamily="34" charset="0"/>
-                          <a:ea typeface="IBM Plex Sans" pitchFamily="34" charset="-122"/>
-                          <a:cs typeface="IBM Plex Sans" pitchFamily="34" charset="-120"/>
-                        </a:rPr>
-                        <a:t>0 of 4</a:t>
-                      </a:r>
-                      <a:endParaRPr lang="en-US" sz="1600" dirty="0">
-                        <a:latin typeface="IBM Plex Sans" charset="0"/>
-                        <a:ea typeface="IBM Plex Sans" charset="0"/>
-                        <a:cs typeface="IBM Plex Sans" charset="0"/>
-                      </a:endParaRPr>
-                    </a:p>
-                  </a:txBody>
-                  <a:tcPr marL="71120" marR="71120" marT="71120" marB="71120" anchor="t">
-                    <a:lnL w="12700" cap="flat" cmpd="sng" algn="ctr">
-                      <a:solidFill>
-                        <a:srgbClr val="C3C4C2"/>
-                      </a:solidFill>
-                      <a:prstDash val="solid"/>
-                      <a:round/>
-                      <a:headEnd type="none" w="med" len="med"/>
-                      <a:tailEnd type="none" w="med" len="med"/>
-                    </a:lnL>
-                    <a:lnR w="12700" cap="flat" cmpd="sng" algn="ctr">
-                      <a:solidFill>
-                        <a:srgbClr val="C3C4C2"/>
-                      </a:solidFill>
-                      <a:prstDash val="solid"/>
-                      <a:round/>
-                      <a:headEnd type="none" w="med" len="med"/>
-                      <a:tailEnd type="none" w="med" len="med"/>
-                    </a:lnR>
-                    <a:lnT w="12700" cap="flat" cmpd="sng" algn="ctr">
-                      <a:solidFill>
-                        <a:srgbClr val="C3C4C2"/>
-                      </a:solidFill>
-                      <a:prstDash val="solid"/>
-                      <a:round/>
-                      <a:headEnd type="none" w="med" len="med"/>
-                      <a:tailEnd type="none" w="med" len="med"/>
-                    </a:lnT>
-                    <a:lnB w="12700" cap="flat" cmpd="sng" algn="ctr">
-                      <a:solidFill>
-                        <a:srgbClr val="C3C4C2"/>
-                      </a:solidFill>
-                      <a:prstDash val="solid"/>
-                      <a:round/>
-                      <a:headEnd type="none" w="med" len="med"/>
-                      <a:tailEnd type="none" w="med" len="med"/>
-                    </a:lnB>
-                  </a:tcPr>
-                </a:tc>
-              </a:tr>
-              <a:tr h="438186">
-                <a:tc>
-                  <a:txBody>
-                    <a:bodyPr/>
-                    <a:lstStyle/>
-                    <a:p>
-                      <a:pPr indent="0" marL="0" algn="l">
-                        <a:lnSpc>
-                          <a:spcPts val="2240"/>
-                        </a:lnSpc>
-                        <a:buNone/>
-                      </a:pPr>
-                      <a:r>
-                        <a:rPr lang="en-US" sz="1600" dirty="0">
-                          <a:solidFill>
-                            <a:srgbClr val="0E2233"/>
-                          </a:solidFill>
-                          <a:latin typeface="IBM Plex Sans" pitchFamily="34" charset="0"/>
-                          <a:ea typeface="IBM Plex Sans" pitchFamily="34" charset="-122"/>
-                          <a:cs typeface="IBM Plex Sans" pitchFamily="34" charset="-120"/>
-                        </a:rPr>
-                        <a:t>All</a:t>
-                      </a:r>
-                      <a:endParaRPr lang="en-US" sz="1600" dirty="0">
-                        <a:latin typeface="IBM Plex Sans" charset="0"/>
-                        <a:ea typeface="IBM Plex Sans" charset="0"/>
-                        <a:cs typeface="IBM Plex Sans" charset="0"/>
-                      </a:endParaRPr>
-                    </a:p>
-                  </a:txBody>
-                  <a:tcPr marL="71120" marR="71120" marT="71120" marB="71120" anchor="t">
-                    <a:lnL w="12700" cap="flat" cmpd="sng" algn="ctr">
-                      <a:solidFill>
-                        <a:srgbClr val="C3C4C2"/>
-                      </a:solidFill>
-                      <a:prstDash val="solid"/>
-                      <a:round/>
-                      <a:headEnd type="none" w="med" len="med"/>
-                      <a:tailEnd type="none" w="med" len="med"/>
-                    </a:lnL>
-                    <a:lnR w="12700" cap="flat" cmpd="sng" algn="ctr">
-                      <a:solidFill>
-                        <a:srgbClr val="B6BCBE"/>
-                      </a:solidFill>
-                      <a:prstDash val="solid"/>
-                      <a:round/>
-                      <a:headEnd type="none" w="med" len="med"/>
-                      <a:tailEnd type="none" w="med" len="med"/>
-                    </a:lnR>
-                    <a:lnT w="12700" cap="flat" cmpd="sng" algn="ctr">
-                      <a:solidFill>
-                        <a:srgbClr val="C3C4C2"/>
-                      </a:solidFill>
-                      <a:prstDash val="solid"/>
-                      <a:round/>
-                      <a:headEnd type="none" w="med" len="med"/>
-                      <a:tailEnd type="none" w="med" len="med"/>
-                    </a:lnT>
-                    <a:lnB w="12700" cap="flat" cmpd="sng" algn="ctr">
-                      <a:solidFill>
-                        <a:srgbClr val="B6BCBE"/>
-                      </a:solidFill>
-                      <a:prstDash val="solid"/>
-                      <a:round/>
-                      <a:headEnd type="none" w="med" len="med"/>
-                      <a:tailEnd type="none" w="med" len="med"/>
-                    </a:lnB>
-                    <a:solidFill>
-                      <a:srgbClr val="E4ECEE"/>
-                    </a:solidFill>
-                  </a:tcPr>
-                </a:tc>
-                <a:tc>
-                  <a:txBody>
-                    <a:bodyPr/>
-                    <a:lstStyle/>
-                    <a:p>
-                      <a:pPr algn="r" indent="0" marL="0">
-                        <a:lnSpc>
-                          <a:spcPts val="2240"/>
-                        </a:lnSpc>
-                        <a:buNone/>
-                      </a:pPr>
-                      <a:r>
-                        <a:rPr lang="en-US" sz="1600" dirty="0">
-                          <a:solidFill>
-                            <a:srgbClr val="0E2233"/>
-                          </a:solidFill>
-                          <a:latin typeface="IBM Plex Sans" pitchFamily="34" charset="0"/>
-                          <a:ea typeface="IBM Plex Sans" pitchFamily="34" charset="-122"/>
-                          <a:cs typeface="IBM Plex Sans" pitchFamily="34" charset="-120"/>
-                        </a:rPr>
-                        <a:t>78%</a:t>
-                      </a:r>
-                      <a:endParaRPr lang="en-US" sz="1600" dirty="0">
-                        <a:latin typeface="IBM Plex Sans" charset="0"/>
-                        <a:ea typeface="IBM Plex Sans" charset="0"/>
-                        <a:cs typeface="IBM Plex Sans" charset="0"/>
-                      </a:endParaRPr>
-                    </a:p>
-                  </a:txBody>
-                  <a:tcPr marL="71120" marR="71120" marT="71120" marB="71120" anchor="t">
-                    <a:lnL w="12700" cap="flat" cmpd="sng" algn="ctr">
-                      <a:solidFill>
-                        <a:srgbClr val="B6BCBE"/>
-                      </a:solidFill>
-                      <a:prstDash val="solid"/>
-                      <a:round/>
-                      <a:headEnd type="none" w="med" len="med"/>
-                      <a:tailEnd type="none" w="med" len="med"/>
-                    </a:lnL>
-                    <a:lnR w="12700" cap="flat" cmpd="sng" algn="ctr">
-                      <a:solidFill>
-                        <a:srgbClr val="B6BCBE"/>
-                      </a:solidFill>
-                      <a:prstDash val="solid"/>
-                      <a:round/>
-                      <a:headEnd type="none" w="med" len="med"/>
-                      <a:tailEnd type="none" w="med" len="med"/>
-                    </a:lnR>
-                    <a:lnT w="12700" cap="flat" cmpd="sng" algn="ctr">
-                      <a:solidFill>
-                        <a:srgbClr val="C3C4C2"/>
-                      </a:solidFill>
-                      <a:prstDash val="solid"/>
-                      <a:round/>
-                      <a:headEnd type="none" w="med" len="med"/>
-                      <a:tailEnd type="none" w="med" len="med"/>
-                    </a:lnT>
-                    <a:lnB w="12700" cap="flat" cmpd="sng" algn="ctr">
-                      <a:solidFill>
-                        <a:srgbClr val="B6BCBE"/>
-                      </a:solidFill>
-                      <a:prstDash val="solid"/>
-                      <a:round/>
-                      <a:headEnd type="none" w="med" len="med"/>
-                      <a:tailEnd type="none" w="med" len="med"/>
-                    </a:lnB>
-                    <a:solidFill>
-                      <a:srgbClr val="E4ECEE"/>
-                    </a:solidFill>
-                  </a:tcPr>
-                </a:tc>
-              </a:tr>
-            </a:tbl>
-          </a:graphicData>
-        </a:graphic>
-      </p:graphicFrame>
-      <p:sp>
-        <p:nvSpPr>
-          <p:cNvPr id="5" name="Shape 2"/>
-          <p:cNvSpPr/>
-          <p:nvPr/>
-        </p:nvSpPr>
-        <p:spPr>
-          <a:xfrm>
-            <a:off x="5184648" y="1892807"/>
-            <a:ext cx="6150834" cy="3136391"/>
-          </a:xfrm>
-          <a:prstGeom prst="roundRect">
-            <a:avLst>
-              <a:gd name="adj" fmla="val 2419"/>
-            </a:avLst>
-          </a:prstGeom>
-          <a:solidFill>
-            <a:srgbClr val="FBFCFA"/>
-          </a:solidFill>
-          <a:ln/>
-        </p:spPr>
-      </p:sp>
-      <p:pic>
-        <p:nvPicPr>
-          <p:cNvPr id="6" name="Image 0" descr="Map comparing detections with IIP analyst labels on 29 April 2019">    </p:cNvPr>
-          <p:cNvPicPr>
-            <a:picLocks noChangeAspect="1"/>
-          </p:cNvPicPr>
-          <p:nvPr/>
-        </p:nvPicPr>
-        <p:blipFill>
-          <a:blip r:embed="rId4"/>
-          <a:stretch/>
-        </p:blipFill>
-        <p:spPr>
-          <a:xfrm>
-            <a:off x="5184648" y="1892807"/>
-            <a:ext cx="6150834" cy="3136391"/>
-          </a:xfrm>
-          <a:prstGeom prst="roundRect">
-            <a:avLst>
-              <a:gd name="adj" fmla="val 2227"/>
-            </a:avLst>
-          </a:prstGeom>
-        </p:spPr>
-      </p:pic>
-      <p:sp>
-        <p:nvSpPr>
-          <p:cNvPr id="7" name="Shape 3"/>
-          <p:cNvSpPr/>
-          <p:nvPr/>
-        </p:nvSpPr>
-        <p:spPr>
-          <a:xfrm>
-            <a:off x="5184648" y="1892807"/>
-            <a:ext cx="6150834" cy="3136391"/>
-          </a:xfrm>
-          <a:prstGeom prst="roundRect">
-            <a:avLst>
-              <a:gd name="adj" fmla="val 2323"/>
-            </a:avLst>
-          </a:prstGeom>
-          <a:noFill/>
-          <a:ln w="6350">
-            <a:solidFill>
-              <a:srgbClr val="D5DEE0"/>
-            </a:solidFill>
-            <a:prstDash val="solid"/>
-          </a:ln>
-        </p:spPr>
-      </p:sp>
-      <p:sp>
-        <p:nvSpPr>
-          <p:cNvPr id="8" name="Text 4"/>
-          <p:cNvSpPr/>
-          <p:nvPr/>
-        </p:nvSpPr>
-        <p:spPr>
-          <a:xfrm>
-            <a:off x="5181564" y="5135745"/>
-            <a:ext cx="6383583" cy="238810"/>
-          </a:xfrm>
-          <a:prstGeom prst="rect">
-            <a:avLst/>
-          </a:prstGeom>
-          <a:noFill/>
-          <a:ln/>
-        </p:spPr>
-        <p:txBody>
-          <a:bodyPr wrap="square" lIns="0" tIns="0" rIns="0" bIns="0" rtlCol="0" anchor="t">
-            <a:normAutofit/>
-          </a:bodyPr>
-          <a:lstStyle/>
-          <a:p>
-            <a:pPr algn="l" indent="0" marL="0">
-              <a:lnSpc>
-                <a:spcPts val="1680"/>
-              </a:lnSpc>
-              <a:buNone/>
-            </a:pPr>
-            <a:r>
-              <a:rPr lang="en-US" sz="1200" dirty="0">
-                <a:solidFill>
-                  <a:srgbClr val="5A6978"/>
-                </a:solidFill>
-                <a:latin typeface="IBM Plex Sans" pitchFamily="34" charset="0"/>
-                <a:ea typeface="IBM Plex Sans" pitchFamily="34" charset="-122"/>
-                <a:cs typeface="IBM Plex Sans" pitchFamily="34" charset="-120"/>
-              </a:rPr>
-              <a:t>Detections vs. IIP analyst labels, 2019-04-29.</a:t>
+              <a:t>Recall vs. open-water detections, 4 held-out passes. Square: CFAR at PFA 10⁻⁶.</a:t>
             </a:r>
             <a:endParaRPr lang="en-US" sz="1200" dirty="0"/>
           </a:p>
@@ -11291,16 +10672,16 @@
         </p:nvGraphicFramePr>
         <p:xfrm>
           <a:off x="824327" y="1896156"/>
-          <a:ext cx="10554890" cy="1923491"/>
+          <a:ext cx="10552176" cy="1923491"/>
         </p:xfrm>
         <a:graphic>
           <a:graphicData uri="http://schemas.openxmlformats.org/drawingml/2006/table">
             <a:tbl>
               <a:tblPr/>
               <a:tblGrid>
-                <a:gridCol w="2955369"/>
-                <a:gridCol w="3166467"/>
-                <a:gridCol w="4433054"/>
+                <a:gridCol w="2743200"/>
+                <a:gridCol w="3291840"/>
+                <a:gridCol w="4517136"/>
               </a:tblGrid>
               <a:tr h="384698">
                 <a:tc>
@@ -11308,7 +10689,7 @@
                     <a:bodyPr/>
                     <a:lstStyle/>
                     <a:p>
-                      <a:pPr indent="0" marL="0">
+                      <a:pPr indent="0" marL="0" algn="l">
                         <a:lnSpc>
                           <a:spcPts val="1960"/>
                         </a:lnSpc>
@@ -11379,7 +10760,7 @@
                     <a:bodyPr/>
                     <a:lstStyle/>
                     <a:p>
-                      <a:pPr indent="0" marL="0">
+                      <a:pPr indent="0" marL="0" algn="l">
                         <a:lnSpc>
                           <a:spcPts val="1960"/>
                         </a:lnSpc>
@@ -11450,7 +10831,7 @@
                     <a:bodyPr/>
                     <a:lstStyle/>
                     <a:p>
-                      <a:pPr indent="0" marL="0">
+                      <a:pPr indent="0" marL="0" algn="l">
                         <a:lnSpc>
                           <a:spcPts val="1960"/>
                         </a:lnSpc>
@@ -11523,7 +10904,7 @@
                     <a:bodyPr/>
                     <a:lstStyle/>
                     <a:p>
-                      <a:pPr indent="0" marL="0">
+                      <a:pPr indent="0" marL="0" algn="l">
                         <a:lnSpc>
                           <a:spcPts val="1960"/>
                         </a:lnSpc>
@@ -11591,7 +10972,7 @@
                     <a:bodyPr/>
                     <a:lstStyle/>
                     <a:p>
-                      <a:pPr indent="0" marL="0">
+                      <a:pPr indent="0" marL="0" algn="l">
                         <a:lnSpc>
                           <a:spcPts val="1960"/>
                         </a:lnSpc>
@@ -11659,7 +11040,7 @@
                     <a:bodyPr/>
                     <a:lstStyle/>
                     <a:p>
-                      <a:pPr indent="0" marL="0">
+                      <a:pPr indent="0" marL="0" algn="l">
                         <a:lnSpc>
                           <a:spcPts val="1960"/>
                         </a:lnSpc>
@@ -11729,7 +11110,7 @@
                     <a:bodyPr/>
                     <a:lstStyle/>
                     <a:p>
-                      <a:pPr indent="0" marL="0">
+                      <a:pPr indent="0" marL="0" algn="l">
                         <a:lnSpc>
                           <a:spcPts val="1960"/>
                         </a:lnSpc>
@@ -11797,7 +11178,7 @@
                     <a:bodyPr/>
                     <a:lstStyle/>
                     <a:p>
-                      <a:pPr indent="0" marL="0">
+                      <a:pPr indent="0" marL="0" algn="l">
                         <a:lnSpc>
                           <a:spcPts val="1960"/>
                         </a:lnSpc>
@@ -11865,7 +11246,7 @@
                     <a:bodyPr/>
                     <a:lstStyle/>
                     <a:p>
-                      <a:pPr indent="0" marL="0">
+                      <a:pPr indent="0" marL="0" algn="l">
                         <a:lnSpc>
                           <a:spcPts val="1960"/>
                         </a:lnSpc>
@@ -11935,7 +11316,7 @@
                     <a:bodyPr/>
                     <a:lstStyle/>
                     <a:p>
-                      <a:pPr indent="0" marL="0">
+                      <a:pPr indent="0" marL="0" algn="l">
                         <a:lnSpc>
                           <a:spcPts val="1960"/>
                         </a:lnSpc>
@@ -12003,7 +11384,7 @@
                     <a:bodyPr/>
                     <a:lstStyle/>
                     <a:p>
-                      <a:pPr indent="0" marL="0">
+                      <a:pPr indent="0" marL="0" algn="l">
                         <a:lnSpc>
                           <a:spcPts val="1960"/>
                         </a:lnSpc>
@@ -12071,7 +11452,7 @@
                     <a:bodyPr/>
                     <a:lstStyle/>
                     <a:p>
-                      <a:pPr indent="0" marL="0">
+                      <a:pPr indent="0" marL="0" algn="l">
                         <a:lnSpc>
                           <a:spcPts val="1960"/>
                         </a:lnSpc>
@@ -12141,7 +11522,7 @@
                     <a:bodyPr/>
                     <a:lstStyle/>
                     <a:p>
-                      <a:pPr indent="0" marL="0">
+                      <a:pPr indent="0" marL="0" algn="l">
                         <a:lnSpc>
                           <a:spcPts val="1960"/>
                         </a:lnSpc>
@@ -12212,7 +11593,7 @@
                     <a:bodyPr/>
                     <a:lstStyle/>
                     <a:p>
-                      <a:pPr indent="0" marL="0">
+                      <a:pPr indent="0" marL="0" algn="l">
                         <a:lnSpc>
                           <a:spcPts val="1960"/>
                         </a:lnSpc>
@@ -12283,7 +11664,7 @@
                     <a:bodyPr/>
                     <a:lstStyle/>
                     <a:p>
-                      <a:pPr indent="0" marL="0">
+                      <a:pPr indent="0" marL="0" algn="l">
                         <a:lnSpc>
                           <a:spcPts val="1960"/>
                         </a:lnSpc>
@@ -12298,7 +11679,7 @@
                           <a:ea typeface="IBM Plex Sans" pitchFamily="34" charset="-122"/>
                           <a:cs typeface="IBM Plex Sans" pitchFamily="34" charset="-120"/>
                         </a:rPr>
-                        <a:t>Headline: 78% recall, no drift</a:t>
+                        <a:t>Train and test sets: no drift</a:t>
                       </a:r>
                       <a:endParaRPr lang="en-US" sz="1400" dirty="0">
                         <a:latin typeface="IBM Plex Sans" charset="0"/>
@@ -12450,8 +11831,8 @@
         </p:nvSpPr>
         <p:spPr>
           <a:xfrm>
-            <a:off x="11237976" y="6238242"/>
-            <a:ext cx="146304" cy="238810"/>
+            <a:off x="11146536" y="6238242"/>
+            <a:ext cx="237744" cy="238810"/>
           </a:xfrm>
           <a:prstGeom prst="rect">
             <a:avLst/>
@@ -12480,7 +11861,7 @@
                 <a:ea typeface="IBM Plex Sans" pitchFamily="34" charset="-122"/>
                 <a:cs typeface="IBM Plex Sans" pitchFamily="34" charset="-120"/>
               </a:rPr>
-              <a:t>9</a:t>
+              <a:t>10</a:t>
             </a:r>
             <a:endParaRPr lang="en-US" sz="1200" dirty="0"/>
           </a:p>
